--- a/presentacion/salida/presentacion_final.pptx
+++ b/presentacion/salida/presentacion_final.pptx
@@ -4591,7 +4591,7 @@
                 </a:solidFill>
                 <a:latin typeface="Calibri"/>
               </a:rPr>
-              <a:t>Diego Moctezuma</a:t>
+              <a:t>Datisa</a:t>
             </a:r>
           </a:p>
         </p:txBody>

--- a/presentacion/salida/presentacion_final.pptx
+++ b/presentacion/salida/presentacion_final.pptx
@@ -4,23 +4,26 @@
   <p:sldMasterIdLst>
     <p:sldMasterId id="2147483648" r:id="rId1"/>
   </p:sldMasterIdLst>
+  <p:notesMasterIdLst>
+    <p:notesMasterId r:id="rId16"/>
+  </p:notesMasterIdLst>
   <p:sldIdLst>
-    <p:sldId id="256" r:id="rId7"/>
-    <p:sldId id="257" r:id="rId9"/>
-    <p:sldId id="258" r:id="rId10"/>
-    <p:sldId id="259" r:id="rId11"/>
-    <p:sldId id="260" r:id="rId12"/>
-    <p:sldId id="261" r:id="rId13"/>
-    <p:sldId id="262" r:id="rId14"/>
-    <p:sldId id="263" r:id="rId15"/>
-    <p:sldId id="264" r:id="rId16"/>
-    <p:sldId id="265" r:id="rId17"/>
-    <p:sldId id="266" r:id="rId18"/>
-    <p:sldId id="267" r:id="rId19"/>
-    <p:sldId id="268" r:id="rId20"/>
-    <p:sldId id="269" r:id="rId21"/>
+    <p:sldId id="256" r:id="rId2"/>
+    <p:sldId id="257" r:id="rId3"/>
+    <p:sldId id="258" r:id="rId4"/>
+    <p:sldId id="259" r:id="rId5"/>
+    <p:sldId id="260" r:id="rId6"/>
+    <p:sldId id="261" r:id="rId7"/>
+    <p:sldId id="262" r:id="rId8"/>
+    <p:sldId id="263" r:id="rId9"/>
+    <p:sldId id="264" r:id="rId10"/>
+    <p:sldId id="265" r:id="rId11"/>
+    <p:sldId id="266" r:id="rId12"/>
+    <p:sldId id="267" r:id="rId13"/>
+    <p:sldId id="268" r:id="rId14"/>
+    <p:sldId id="269" r:id="rId15"/>
   </p:sldIdLst>
-  <p:sldSz cx="12191695" cy="6858000" type="screen4x3"/>
+  <p:sldSz cx="12192000" cy="6858000"/>
   <p:notesSz cx="6858000" cy="9144000"/>
   <p:defaultTextStyle>
     <a:defPPr>
@@ -117,11 +120,27 @@
       </a:defRPr>
     </a:lvl9pPr>
   </p:defaultTextStyle>
+  <p:extLst>
+    <p:ext uri="{EFAFB233-063F-42B5-8137-9DF3F51BA10A}">
+      <p15:sldGuideLst xmlns:p15="http://schemas.microsoft.com/office/powerpoint/2012/main">
+        <p15:guide id="1" orient="horz" pos="2160">
+          <p15:clr>
+            <a:srgbClr val="A4A3A4"/>
+          </p15:clr>
+        </p15:guide>
+        <p15:guide id="2" pos="2880">
+          <p15:clr>
+            <a:srgbClr val="A4A3A4"/>
+          </p15:clr>
+        </p15:guide>
+      </p15:sldGuideLst>
+    </p:ext>
+  </p:extLst>
 </p:presentation>
 </file>
 
 <file path=ppt/notesMasters/notesMaster1.xml><?xml version="1.0" encoding="utf-8"?>
-<p:notesMaster xmlns:a="http://schemas.openxmlformats.org/drawingml/2006/main" xmlns:p="http://schemas.openxmlformats.org/presentationml/2006/main" xmlns:r="http://schemas.openxmlformats.org/officeDocument/2006/relationships">
+<p:notesMaster xmlns:a="http://schemas.openxmlformats.org/drawingml/2006/main" xmlns:r="http://schemas.openxmlformats.org/officeDocument/2006/relationships" xmlns:p="http://schemas.openxmlformats.org/presentationml/2006/main">
   <p:cSld>
     <p:bg>
       <p:bgRef idx="1001">
@@ -142,241 +161,16 @@
           <a:chExt cx="0" cy="0"/>
         </a:xfrm>
       </p:grpSpPr>
-      <p:sp>
-        <p:nvSpPr>
-          <p:cNvPr id="2" name="Header Placeholder 1"/>
-          <p:cNvSpPr>
-            <a:spLocks noGrp="1"/>
-          </p:cNvSpPr>
-          <p:nvPr>
-            <p:ph type="hdr" sz="quarter"/>
-          </p:nvPr>
-        </p:nvSpPr>
-        <p:spPr>
-          <a:xfrm>
-            <a:off x="0" y="0"/>
-            <a:ext cx="2971800" cy="457200"/>
-          </a:xfrm>
-          <a:prstGeom prst="rect">
-            <a:avLst/>
-          </a:prstGeom>
-        </p:spPr>
-        <p:txBody>
-          <a:bodyPr vert="horz" lIns="91440" tIns="45720" rIns="91440" bIns="45720" rtlCol="0"/>
-          <a:lstStyle>
-            <a:lvl1pPr algn="l">
-              <a:defRPr sz="1200"/>
-            </a:lvl1pPr>
-          </a:lstStyle>
-          <a:p>
-            <a:endParaRPr lang="en-US"/>
-          </a:p>
-        </p:txBody>
-      </p:sp>
-      <p:sp>
-        <p:nvSpPr>
-          <p:cNvPr id="3" name="Date Placeholder 2"/>
-          <p:cNvSpPr>
-            <a:spLocks noGrp="1"/>
-          </p:cNvSpPr>
-          <p:nvPr>
-            <p:ph type="dt" idx="1"/>
-          </p:nvPr>
-        </p:nvSpPr>
-        <p:spPr>
-          <a:xfrm>
-            <a:off x="3884613" y="0"/>
-            <a:ext cx="2971800" cy="457200"/>
-          </a:xfrm>
-          <a:prstGeom prst="rect">
-            <a:avLst/>
-          </a:prstGeom>
-        </p:spPr>
-        <p:txBody>
-          <a:bodyPr vert="horz" lIns="91440" tIns="45720" rIns="91440" bIns="45720" rtlCol="0"/>
-          <a:lstStyle>
-            <a:lvl1pPr algn="r">
-              <a:defRPr sz="1200"/>
-            </a:lvl1pPr>
-          </a:lstStyle>
-          <a:p>
-            <a:fld id="{0F89C1C7-3DCD-1040-A9CF-14679D8B5DDD}" type="datetimeFigureOut">
-              <a:rPr lang="en-US" smtClean="0"/>
-              <a:t>10/17/16</a:t>
-            </a:fld>
-            <a:endParaRPr lang="en-US"/>
-          </a:p>
-        </p:txBody>
-      </p:sp>
-      <p:sp>
-        <p:nvSpPr>
-          <p:cNvPr id="4" name="Slide Image Placeholder 3"/>
-          <p:cNvSpPr>
-            <a:spLocks noGrp="1" noRot="1" noChangeAspect="1"/>
-          </p:cNvSpPr>
-          <p:nvPr>
-            <p:ph type="sldImg" idx="2"/>
-          </p:nvPr>
-        </p:nvSpPr>
-        <p:spPr>
-          <a:xfrm>
-            <a:off x="1143000" y="685800"/>
-            <a:ext cx="4572000" cy="3429000"/>
-          </a:xfrm>
-          <a:prstGeom prst="rect">
-            <a:avLst/>
-          </a:prstGeom>
-          <a:noFill/>
-          <a:ln w="12700">
-            <a:solidFill>
-              <a:prstClr val="black"/>
-            </a:solidFill>
-          </a:ln>
-        </p:spPr>
-        <p:txBody>
-          <a:bodyPr vert="horz" lIns="91440" tIns="45720" rIns="91440" bIns="45720" rtlCol="0" anchor="ctr"/>
-          <a:lstStyle/>
-          <a:p>
-            <a:endParaRPr lang="en-US"/>
-          </a:p>
-        </p:txBody>
-      </p:sp>
-      <p:sp>
-        <p:nvSpPr>
-          <p:cNvPr id="5" name="Notes Placeholder 4"/>
-          <p:cNvSpPr>
-            <a:spLocks noGrp="1"/>
-          </p:cNvSpPr>
-          <p:nvPr>
-            <p:ph type="body" sz="quarter" idx="3"/>
-          </p:nvPr>
-        </p:nvSpPr>
-        <p:spPr>
-          <a:xfrm>
-            <a:off x="685800" y="4343400"/>
-            <a:ext cx="5486400" cy="4114800"/>
-          </a:xfrm>
-          <a:prstGeom prst="rect">
-            <a:avLst/>
-          </a:prstGeom>
-        </p:spPr>
-        <p:txBody>
-          <a:bodyPr vert="horz" lIns="91440" tIns="45720" rIns="91440" bIns="45720" rtlCol="0"/>
-          <a:lstStyle/>
-          <a:p>
-            <a:pPr lvl="0"/>
-            <a:r>
-              <a:rPr lang="en-US" smtClean="0"/>
-              <a:t>Click to edit Master text styles</a:t>
-            </a:r>
-          </a:p>
-          <a:p>
-            <a:pPr lvl="1"/>
-            <a:r>
-              <a:rPr lang="en-US" smtClean="0"/>
-              <a:t>Second level</a:t>
-            </a:r>
-          </a:p>
-          <a:p>
-            <a:pPr lvl="2"/>
-            <a:r>
-              <a:rPr lang="en-US" smtClean="0"/>
-              <a:t>Third level</a:t>
-            </a:r>
-          </a:p>
-          <a:p>
-            <a:pPr lvl="3"/>
-            <a:r>
-              <a:rPr lang="en-US" smtClean="0"/>
-              <a:t>Fourth level</a:t>
-            </a:r>
-          </a:p>
-          <a:p>
-            <a:pPr lvl="4"/>
-            <a:r>
-              <a:rPr lang="en-US" smtClean="0"/>
-              <a:t>Fifth level</a:t>
-            </a:r>
-            <a:endParaRPr lang="en-US"/>
-          </a:p>
-        </p:txBody>
-      </p:sp>
-      <p:sp>
-        <p:nvSpPr>
-          <p:cNvPr id="6" name="Footer Placeholder 5"/>
-          <p:cNvSpPr>
-            <a:spLocks noGrp="1"/>
-          </p:cNvSpPr>
-          <p:nvPr>
-            <p:ph type="ftr" sz="quarter" idx="4"/>
-          </p:nvPr>
-        </p:nvSpPr>
-        <p:spPr>
-          <a:xfrm>
-            <a:off x="0" y="8685213"/>
-            <a:ext cx="2971800" cy="457200"/>
-          </a:xfrm>
-          <a:prstGeom prst="rect">
-            <a:avLst/>
-          </a:prstGeom>
-        </p:spPr>
-        <p:txBody>
-          <a:bodyPr vert="horz" lIns="91440" tIns="45720" rIns="91440" bIns="45720" rtlCol="0" anchor="b"/>
-          <a:lstStyle>
-            <a:lvl1pPr algn="l">
-              <a:defRPr sz="1200"/>
-            </a:lvl1pPr>
-          </a:lstStyle>
-          <a:p>
-            <a:endParaRPr lang="en-US"/>
-          </a:p>
-        </p:txBody>
-      </p:sp>
-      <p:sp>
-        <p:nvSpPr>
-          <p:cNvPr id="7" name="Slide Number Placeholder 6"/>
-          <p:cNvSpPr>
-            <a:spLocks noGrp="1"/>
-          </p:cNvSpPr>
-          <p:nvPr>
-            <p:ph type="sldNum" sz="quarter" idx="5"/>
-          </p:nvPr>
-        </p:nvSpPr>
-        <p:spPr>
-          <a:xfrm>
-            <a:off x="3884613" y="8685213"/>
-            <a:ext cx="2971800" cy="457200"/>
-          </a:xfrm>
-          <a:prstGeom prst="rect">
-            <a:avLst/>
-          </a:prstGeom>
-        </p:spPr>
-        <p:txBody>
-          <a:bodyPr vert="horz" lIns="91440" tIns="45720" rIns="91440" bIns="45720" rtlCol="0" anchor="b"/>
-          <a:lstStyle>
-            <a:lvl1pPr algn="r">
-              <a:defRPr sz="1200"/>
-            </a:lvl1pPr>
-          </a:lstStyle>
-          <a:p>
-            <a:fld id="{BB5E49A5-4136-284D-997B-48E1D791AD67}" type="slidenum">
-              <a:rPr lang="en-US" smtClean="0"/>
-              <a:t>‹#›</a:t>
-            </a:fld>
-            <a:endParaRPr lang="en-US"/>
-          </a:p>
-        </p:txBody>
-      </p:sp>
     </p:spTree>
     <p:extLst>
       <p:ext uri="{BB962C8B-B14F-4D97-AF65-F5344CB8AC3E}">
-        <p14:creationId xmlns:p14="http://schemas.microsoft.com/office/powerpoint/2010/main" val="2623252185"/>
+        <p14:creationId xmlns:p14="http://schemas.microsoft.com/office/powerpoint/2010/main" val="2516041674"/>
       </p:ext>
     </p:extLst>
   </p:cSld>
   <p:clrMap bg1="lt1" tx1="dk1" bg2="lt2" tx2="dk2" accent1="accent1" accent2="accent2" accent3="accent3" accent4="accent4" accent5="accent5" accent6="accent6" hlink="hlink" folHlink="folHlink"/>
   <p:notesStyle>
-    <a:lvl1pPr marL="0" algn="l" defTabSz="457200" rtl="0" eaLnBrk="1" latinLnBrk="0" hangingPunct="1">
+    <a:lvl1pPr marL="0" algn="l" defTabSz="914400" rtl="0" eaLnBrk="1" latinLnBrk="0" hangingPunct="1">
       <a:defRPr sz="1200" kern="1200">
         <a:solidFill>
           <a:schemeClr val="tx1"/>
@@ -386,7 +180,7 @@
         <a:cs typeface="+mn-cs"/>
       </a:defRPr>
     </a:lvl1pPr>
-    <a:lvl2pPr marL="457200" algn="l" defTabSz="457200" rtl="0" eaLnBrk="1" latinLnBrk="0" hangingPunct="1">
+    <a:lvl2pPr marL="457200" algn="l" defTabSz="914400" rtl="0" eaLnBrk="1" latinLnBrk="0" hangingPunct="1">
       <a:defRPr sz="1200" kern="1200">
         <a:solidFill>
           <a:schemeClr val="tx1"/>
@@ -396,7 +190,7 @@
         <a:cs typeface="+mn-cs"/>
       </a:defRPr>
     </a:lvl2pPr>
-    <a:lvl3pPr marL="914400" algn="l" defTabSz="457200" rtl="0" eaLnBrk="1" latinLnBrk="0" hangingPunct="1">
+    <a:lvl3pPr marL="914400" algn="l" defTabSz="914400" rtl="0" eaLnBrk="1" latinLnBrk="0" hangingPunct="1">
       <a:defRPr sz="1200" kern="1200">
         <a:solidFill>
           <a:schemeClr val="tx1"/>
@@ -406,7 +200,7 @@
         <a:cs typeface="+mn-cs"/>
       </a:defRPr>
     </a:lvl3pPr>
-    <a:lvl4pPr marL="1371600" algn="l" defTabSz="457200" rtl="0" eaLnBrk="1" latinLnBrk="0" hangingPunct="1">
+    <a:lvl4pPr marL="1371600" algn="l" defTabSz="914400" rtl="0" eaLnBrk="1" latinLnBrk="0" hangingPunct="1">
       <a:defRPr sz="1200" kern="1200">
         <a:solidFill>
           <a:schemeClr val="tx1"/>
@@ -416,7 +210,7 @@
         <a:cs typeface="+mn-cs"/>
       </a:defRPr>
     </a:lvl4pPr>
-    <a:lvl5pPr marL="1828800" algn="l" defTabSz="457200" rtl="0" eaLnBrk="1" latinLnBrk="0" hangingPunct="1">
+    <a:lvl5pPr marL="1828800" algn="l" defTabSz="914400" rtl="0" eaLnBrk="1" latinLnBrk="0" hangingPunct="1">
       <a:defRPr sz="1200" kern="1200">
         <a:solidFill>
           <a:schemeClr val="tx1"/>
@@ -426,7 +220,7 @@
         <a:cs typeface="+mn-cs"/>
       </a:defRPr>
     </a:lvl5pPr>
-    <a:lvl6pPr marL="2286000" algn="l" defTabSz="457200" rtl="0" eaLnBrk="1" latinLnBrk="0" hangingPunct="1">
+    <a:lvl6pPr marL="2286000" algn="l" defTabSz="914400" rtl="0" eaLnBrk="1" latinLnBrk="0" hangingPunct="1">
       <a:defRPr sz="1200" kern="1200">
         <a:solidFill>
           <a:schemeClr val="tx1"/>
@@ -436,7 +230,7 @@
         <a:cs typeface="+mn-cs"/>
       </a:defRPr>
     </a:lvl6pPr>
-    <a:lvl7pPr marL="2743200" algn="l" defTabSz="457200" rtl="0" eaLnBrk="1" latinLnBrk="0" hangingPunct="1">
+    <a:lvl7pPr marL="2743200" algn="l" defTabSz="914400" rtl="0" eaLnBrk="1" latinLnBrk="0" hangingPunct="1">
       <a:defRPr sz="1200" kern="1200">
         <a:solidFill>
           <a:schemeClr val="tx1"/>
@@ -446,7 +240,7 @@
         <a:cs typeface="+mn-cs"/>
       </a:defRPr>
     </a:lvl7pPr>
-    <a:lvl8pPr marL="3200400" algn="l" defTabSz="457200" rtl="0" eaLnBrk="1" latinLnBrk="0" hangingPunct="1">
+    <a:lvl8pPr marL="3200400" algn="l" defTabSz="914400" rtl="0" eaLnBrk="1" latinLnBrk="0" hangingPunct="1">
       <a:defRPr sz="1200" kern="1200">
         <a:solidFill>
           <a:schemeClr val="tx1"/>
@@ -456,7 +250,7 @@
         <a:cs typeface="+mn-cs"/>
       </a:defRPr>
     </a:lvl8pPr>
-    <a:lvl9pPr marL="3657600" algn="l" defTabSz="457200" rtl="0" eaLnBrk="1" latinLnBrk="0" hangingPunct="1">
+    <a:lvl9pPr marL="3657600" algn="l" defTabSz="914400" rtl="0" eaLnBrk="1" latinLnBrk="0" hangingPunct="1">
       <a:defRPr sz="1200" kern="1200">
         <a:solidFill>
           <a:schemeClr val="tx1"/>
@@ -471,7 +265,7 @@
 </file>
 
 <file path=ppt/notesSlides/notesSlide1.xml><?xml version="1.0" encoding="utf-8"?>
-<p:notes xmlns:a="http://schemas.openxmlformats.org/drawingml/2006/main" xmlns:p="http://schemas.openxmlformats.org/presentationml/2006/main" xmlns:r="http://schemas.openxmlformats.org/officeDocument/2006/relationships">
+<p:notes xmlns:a="http://schemas.openxmlformats.org/drawingml/2006/main" xmlns:r="http://schemas.openxmlformats.org/officeDocument/2006/relationships" xmlns:p="http://schemas.openxmlformats.org/presentationml/2006/main">
   <p:cSld>
     <p:spTree>
       <p:nvGrpSpPr>
@@ -491,43 +285,43 @@
         <p:nvSpPr>
           <p:cNvPr id="2" name="Slide Image Placeholder 1"/>
           <p:cNvSpPr>
+            <a:spLocks noGrp="1" noRot="1" noChangeAspect="1"/>
+          </p:cNvSpPr>
+          <p:nvPr>
+            <p:ph type="sldImg" idx="2"/>
+          </p:nvPr>
+        </p:nvSpPr>
+        <p:spPr/>
+      </p:sp>
+      <p:sp>
+        <p:nvSpPr>
+          <p:cNvPr id="3" name="Notes Placeholder 2"/>
+          <p:cNvSpPr>
             <a:spLocks noGrp="1"/>
           </p:cNvSpPr>
           <p:nvPr>
-            <p:ph type="sldImg" idx="2"/>
+            <p:ph type="body" sz="quarter" idx="3"/>
           </p:nvPr>
         </p:nvSpPr>
         <p:spPr/>
-      </p:sp>
-      <p:sp>
-        <p:nvSpPr>
-          <p:cNvPr id="3" name="Notes Placeholder 2"/>
+        <p:txBody>
+          <a:bodyPr/>
+          <a:lstStyle/>
+          <a:p>
+            <a:r>
+              <a:t>Buenos días. Les presento un sistema de recuperación de información sobre noticias de la BBC. Partimos de 2,225 noticias en cinco categorías, las limpiamos y construimos seis formas de buscar: conteo, TF-IDF, BM25, SVD, Word2Vec y LDA. Las comparamos con 115 consultas. Veremos qué encontramos, qué método rinde mejor y con qué cautelas deben leerse los resultados, empezando por el problema.</a:t>
+            </a:r>
+          </a:p>
+        </p:txBody>
+      </p:sp>
+      <p:sp>
+        <p:nvSpPr>
+          <p:cNvPr id="4" name="Slide Number Placeholder 3"/>
           <p:cNvSpPr>
             <a:spLocks noGrp="1"/>
           </p:cNvSpPr>
           <p:nvPr>
-            <p:ph type="body" idx="3" sz="quarter"/>
-          </p:nvPr>
-        </p:nvSpPr>
-        <p:spPr/>
-        <p:txBody>
-          <a:bodyPr/>
-          <a:lstStyle/>
-          <a:p>
-            <a:r>
-              <a:t>Buenos días. Les presento un sistema de recuperación de información sobre noticias de la BBC. Partimos de 2,225 noticias en cinco categorías, las limpiamos y construimos seis formas de buscar: conteo, TF-IDF, BM25, SVD, Word2Vec y LDA. Las comparamos con 115 consultas. Veremos qué encontramos, qué método rinde mejor y con qué cautelas deben leerse los resultados, empezando por el problema.</a:t>
-            </a:r>
-          </a:p>
-        </p:txBody>
-      </p:sp>
-      <p:sp>
-        <p:nvSpPr>
-          <p:cNvPr id="4" name="Slide Number Placeholder 3"/>
-          <p:cNvSpPr>
-            <a:spLocks noGrp="1"/>
-          </p:cNvSpPr>
-          <p:nvPr>
-            <p:ph type="sldNum" idx="5" sz="quarter"/>
+            <p:ph type="sldNum" sz="quarter" idx="5"/>
           </p:nvPr>
         </p:nvSpPr>
         <p:spPr/>
@@ -541,7 +335,7 @@
 </file>
 
 <file path=ppt/notesSlides/notesSlide10.xml><?xml version="1.0" encoding="utf-8"?>
-<p:notes xmlns:a="http://schemas.openxmlformats.org/drawingml/2006/main" xmlns:p="http://schemas.openxmlformats.org/presentationml/2006/main" xmlns:r="http://schemas.openxmlformats.org/officeDocument/2006/relationships">
+<p:notes xmlns:a="http://schemas.openxmlformats.org/drawingml/2006/main" xmlns:r="http://schemas.openxmlformats.org/officeDocument/2006/relationships" xmlns:p="http://schemas.openxmlformats.org/presentationml/2006/main">
   <p:cSld>
     <p:spTree>
       <p:nvGrpSpPr>
@@ -561,43 +355,43 @@
         <p:nvSpPr>
           <p:cNvPr id="2" name="Slide Image Placeholder 1"/>
           <p:cNvSpPr>
+            <a:spLocks noGrp="1" noRot="1" noChangeAspect="1"/>
+          </p:cNvSpPr>
+          <p:nvPr>
+            <p:ph type="sldImg" idx="2"/>
+          </p:nvPr>
+        </p:nvSpPr>
+        <p:spPr/>
+      </p:sp>
+      <p:sp>
+        <p:nvSpPr>
+          <p:cNvPr id="3" name="Notes Placeholder 2"/>
+          <p:cNvSpPr>
             <a:spLocks noGrp="1"/>
           </p:cNvSpPr>
           <p:nvPr>
-            <p:ph type="sldImg" idx="2"/>
+            <p:ph type="body" sz="quarter" idx="3"/>
           </p:nvPr>
         </p:nvSpPr>
         <p:spPr/>
-      </p:sp>
-      <p:sp>
-        <p:nvSpPr>
-          <p:cNvPr id="3" name="Notes Placeholder 2"/>
+        <p:txBody>
+          <a:bodyPr/>
+          <a:lstStyle/>
+          <a:p>
+            <a:r>
+              <a:t>Evaluamos con 115 consultas: 100 automáticas y 15 manuales. Como no hay juicios de relevancia, un documento cuenta como relevante si su categoría coincide con la esperada. Con ese supuesto, Word2Vec obtiene 88.17% de MAP@10 y SVD 84.28%. Cuidado: la diferencia de 3.89 puntos tiene un intervalo de confianza de 95% entre -0.38 y 8.22, así que no podemos afirmar que Word2Vec supere a SVD.</a:t>
+            </a:r>
+          </a:p>
+        </p:txBody>
+      </p:sp>
+      <p:sp>
+        <p:nvSpPr>
+          <p:cNvPr id="4" name="Slide Number Placeholder 3"/>
           <p:cNvSpPr>
             <a:spLocks noGrp="1"/>
           </p:cNvSpPr>
           <p:nvPr>
-            <p:ph type="body" idx="3" sz="quarter"/>
-          </p:nvPr>
-        </p:nvSpPr>
-        <p:spPr/>
-        <p:txBody>
-          <a:bodyPr/>
-          <a:lstStyle/>
-          <a:p>
-            <a:r>
-              <a:t>Evaluamos con 115 consultas: 100 automáticas y 15 manuales. Como no hay juicios de relevancia, un documento cuenta como relevante si su categoría coincide con la esperada. Con ese supuesto, Word2Vec obtiene 88.17% de MAP@10 y SVD 84.28%. Cuidado: la diferencia de 3.89 puntos tiene un intervalo de confianza de 95% entre -0.38 y 8.22, así que no podemos afirmar que Word2Vec supere a SVD.</a:t>
-            </a:r>
-          </a:p>
-        </p:txBody>
-      </p:sp>
-      <p:sp>
-        <p:nvSpPr>
-          <p:cNvPr id="4" name="Slide Number Placeholder 3"/>
-          <p:cNvSpPr>
-            <a:spLocks noGrp="1"/>
-          </p:cNvSpPr>
-          <p:nvPr>
-            <p:ph type="sldNum" idx="5" sz="quarter"/>
+            <p:ph type="sldNum" sz="quarter" idx="5"/>
           </p:nvPr>
         </p:nvSpPr>
         <p:spPr/>
@@ -611,7 +405,7 @@
 </file>
 
 <file path=ppt/notesSlides/notesSlide11.xml><?xml version="1.0" encoding="utf-8"?>
-<p:notes xmlns:a="http://schemas.openxmlformats.org/drawingml/2006/main" xmlns:p="http://schemas.openxmlformats.org/presentationml/2006/main" xmlns:r="http://schemas.openxmlformats.org/officeDocument/2006/relationships">
+<p:notes xmlns:a="http://schemas.openxmlformats.org/drawingml/2006/main" xmlns:r="http://schemas.openxmlformats.org/officeDocument/2006/relationships" xmlns:p="http://schemas.openxmlformats.org/presentationml/2006/main">
   <p:cSld>
     <p:spTree>
       <p:nvGrpSpPr>
@@ -631,43 +425,43 @@
         <p:nvSpPr>
           <p:cNvPr id="2" name="Slide Image Placeholder 1"/>
           <p:cNvSpPr>
+            <a:spLocks noGrp="1" noRot="1" noChangeAspect="1"/>
+          </p:cNvSpPr>
+          <p:nvPr>
+            <p:ph type="sldImg" idx="2"/>
+          </p:nvPr>
+        </p:nvSpPr>
+        <p:spPr/>
+      </p:sp>
+      <p:sp>
+        <p:nvSpPr>
+          <p:cNvPr id="3" name="Notes Placeholder 2"/>
+          <p:cNvSpPr>
             <a:spLocks noGrp="1"/>
           </p:cNvSpPr>
           <p:nvPr>
-            <p:ph type="sldImg" idx="2"/>
+            <p:ph type="body" sz="quarter" idx="3"/>
           </p:nvPr>
         </p:nvSpPr>
         <p:spPr/>
-      </p:sp>
-      <p:sp>
-        <p:nvSpPr>
-          <p:cNvPr id="3" name="Notes Placeholder 2"/>
+        <p:txBody>
+          <a:bodyPr/>
+          <a:lstStyle/>
+          <a:p>
+            <a:r>
+              <a:t>Entre los métodos léxicos, BM25 obtiene 74.22% de MAP@10, TF-IDF 72.73% y conteo 68.70%. BM25 supera a TF-IDF por 1.49 puntos, pero el intervalo incluye cero, así que en la práctica son equivalentes; solo la ventaja sobre el conteo es clara, 5.52 puntos. Recordemos que relevante significa misma categoría que la consulta. SVD supera a BM25 por 10.06 puntos, y Word2Vec es además el más rápido, con 2.46 milisegundos.</a:t>
+            </a:r>
+          </a:p>
+        </p:txBody>
+      </p:sp>
+      <p:sp>
+        <p:nvSpPr>
+          <p:cNvPr id="4" name="Slide Number Placeholder 3"/>
           <p:cNvSpPr>
             <a:spLocks noGrp="1"/>
           </p:cNvSpPr>
           <p:nvPr>
-            <p:ph type="body" idx="3" sz="quarter"/>
-          </p:nvPr>
-        </p:nvSpPr>
-        <p:spPr/>
-        <p:txBody>
-          <a:bodyPr/>
-          <a:lstStyle/>
-          <a:p>
-            <a:r>
-              <a:t>Entre los métodos léxicos, BM25 obtiene 74.22% de MAP@10, TF-IDF 72.73% y conteo 68.70%. BM25 supera a TF-IDF por 1.49 puntos, pero el intervalo incluye cero, así que en la práctica son equivalentes; solo la ventaja sobre el conteo es clara, 5.52 puntos. Recordemos que relevante significa misma categoría que la consulta. SVD supera a BM25 por 10.06 puntos, y Word2Vec es además el más rápido, con 2.46 milisegundos.</a:t>
-            </a:r>
-          </a:p>
-        </p:txBody>
-      </p:sp>
-      <p:sp>
-        <p:nvSpPr>
-          <p:cNvPr id="4" name="Slide Number Placeholder 3"/>
-          <p:cNvSpPr>
-            <a:spLocks noGrp="1"/>
-          </p:cNvSpPr>
-          <p:nvPr>
-            <p:ph type="sldNum" idx="5" sz="quarter"/>
+            <p:ph type="sldNum" sz="quarter" idx="5"/>
           </p:nvPr>
         </p:nvSpPr>
         <p:spPr/>
@@ -681,7 +475,7 @@
 </file>
 
 <file path=ppt/notesSlides/notesSlide12.xml><?xml version="1.0" encoding="utf-8"?>
-<p:notes xmlns:a="http://schemas.openxmlformats.org/drawingml/2006/main" xmlns:p="http://schemas.openxmlformats.org/presentationml/2006/main" xmlns:r="http://schemas.openxmlformats.org/officeDocument/2006/relationships">
+<p:notes xmlns:a="http://schemas.openxmlformats.org/drawingml/2006/main" xmlns:r="http://schemas.openxmlformats.org/officeDocument/2006/relationships" xmlns:p="http://schemas.openxmlformats.org/presentationml/2006/main">
   <p:cSld>
     <p:spTree>
       <p:nvGrpSpPr>
@@ -701,43 +495,43 @@
         <p:nvSpPr>
           <p:cNvPr id="2" name="Slide Image Placeholder 1"/>
           <p:cNvSpPr>
+            <a:spLocks noGrp="1" noRot="1" noChangeAspect="1"/>
+          </p:cNvSpPr>
+          <p:nvPr>
+            <p:ph type="sldImg" idx="2"/>
+          </p:nvPr>
+        </p:nvSpPr>
+        <p:spPr/>
+      </p:sp>
+      <p:sp>
+        <p:nvSpPr>
+          <p:cNvPr id="3" name="Notes Placeholder 2"/>
+          <p:cNvSpPr>
             <a:spLocks noGrp="1"/>
           </p:cNvSpPr>
           <p:nvPr>
-            <p:ph type="sldImg" idx="2"/>
+            <p:ph type="body" sz="quarter" idx="3"/>
           </p:nvPr>
         </p:nvSpPr>
         <p:spPr/>
-      </p:sp>
-      <p:sp>
-        <p:nvSpPr>
-          <p:cNvPr id="3" name="Notes Placeholder 2"/>
+        <p:txBody>
+          <a:bodyPr/>
+          <a:lstStyle/>
+          <a:p>
+            <a:r>
+              <a:t>Separamos las consultas por tipo. Con las 15 manuales, de dos a cuatro palabras y muy temáticas, SVD y Word2Vec llegan a 100.00% y el peor, el conteo, a 93.64%: casi no discriminan. Con los 100 titulares de ocho palabras, que mezclan nombres propios y palabras genéricas, Word2Vec logra 86.39% y el conteo 64.96%. Las diferencias aparecen en las consultas difíciles. Y la categoría sigue siendo solo un proxy de relevancia.</a:t>
+            </a:r>
+          </a:p>
+        </p:txBody>
+      </p:sp>
+      <p:sp>
+        <p:nvSpPr>
+          <p:cNvPr id="4" name="Slide Number Placeholder 3"/>
           <p:cNvSpPr>
             <a:spLocks noGrp="1"/>
           </p:cNvSpPr>
           <p:nvPr>
-            <p:ph type="body" idx="3" sz="quarter"/>
-          </p:nvPr>
-        </p:nvSpPr>
-        <p:spPr/>
-        <p:txBody>
-          <a:bodyPr/>
-          <a:lstStyle/>
-          <a:p>
-            <a:r>
-              <a:t>Separamos las consultas por tipo. Con las 15 manuales, de dos a cuatro palabras y muy temáticas, SVD y Word2Vec llegan a 100.00% y el peor, el conteo, a 93.64%: casi no discriminan. Con los 100 titulares de ocho palabras, que mezclan nombres propios y palabras genéricas, Word2Vec logra 86.39% y el conteo 64.96%. Las diferencias aparecen en las consultas difíciles. Y la categoría sigue siendo solo un proxy de relevancia.</a:t>
-            </a:r>
-          </a:p>
-        </p:txBody>
-      </p:sp>
-      <p:sp>
-        <p:nvSpPr>
-          <p:cNvPr id="4" name="Slide Number Placeholder 3"/>
-          <p:cNvSpPr>
-            <a:spLocks noGrp="1"/>
-          </p:cNvSpPr>
-          <p:nvPr>
-            <p:ph type="sldNum" idx="5" sz="quarter"/>
+            <p:ph type="sldNum" sz="quarter" idx="5"/>
           </p:nvPr>
         </p:nvSpPr>
         <p:spPr/>
@@ -751,7 +545,7 @@
 </file>
 
 <file path=ppt/notesSlides/notesSlide13.xml><?xml version="1.0" encoding="utf-8"?>
-<p:notes xmlns:a="http://schemas.openxmlformats.org/drawingml/2006/main" xmlns:p="http://schemas.openxmlformats.org/presentationml/2006/main" xmlns:r="http://schemas.openxmlformats.org/officeDocument/2006/relationships">
+<p:notes xmlns:a="http://schemas.openxmlformats.org/drawingml/2006/main" xmlns:r="http://schemas.openxmlformats.org/officeDocument/2006/relationships" xmlns:p="http://schemas.openxmlformats.org/presentationml/2006/main">
   <p:cSld>
     <p:spTree>
       <p:nvGrpSpPr>
@@ -771,43 +565,43 @@
         <p:nvSpPr>
           <p:cNvPr id="2" name="Slide Image Placeholder 1"/>
           <p:cNvSpPr>
+            <a:spLocks noGrp="1" noRot="1" noChangeAspect="1"/>
+          </p:cNvSpPr>
+          <p:nvPr>
+            <p:ph type="sldImg" idx="2"/>
+          </p:nvPr>
+        </p:nvSpPr>
+        <p:spPr/>
+      </p:sp>
+      <p:sp>
+        <p:nvSpPr>
+          <p:cNvPr id="3" name="Notes Placeholder 2"/>
+          <p:cNvSpPr>
             <a:spLocks noGrp="1"/>
           </p:cNvSpPr>
           <p:nvPr>
-            <p:ph type="sldImg" idx="2"/>
+            <p:ph type="body" sz="quarter" idx="3"/>
           </p:nvPr>
         </p:nvSpPr>
         <p:spPr/>
-      </p:sp>
-      <p:sp>
-        <p:nvSpPr>
-          <p:cNvPr id="3" name="Notes Placeholder 2"/>
+        <p:txBody>
+          <a:bodyPr/>
+          <a:lstStyle/>
+          <a:p>
+            <a:r>
+              <a:t>Un ejemplo real con Word2Vec: la consulta election labour party vote. Los tres primeros resultados son de política, la categoría esperada. Los títulos son los primeros términos de cada nota, por eso se ven recortados. Conviene recordar que acierto de categoría no es lo mismo que satisfacción del usuario: una nota de la categoría correcta puede no tratar exactamente el tema consultado.</a:t>
+            </a:r>
+          </a:p>
+        </p:txBody>
+      </p:sp>
+      <p:sp>
+        <p:nvSpPr>
+          <p:cNvPr id="4" name="Slide Number Placeholder 3"/>
           <p:cNvSpPr>
             <a:spLocks noGrp="1"/>
           </p:cNvSpPr>
           <p:nvPr>
-            <p:ph type="body" idx="3" sz="quarter"/>
-          </p:nvPr>
-        </p:nvSpPr>
-        <p:spPr/>
-        <p:txBody>
-          <a:bodyPr/>
-          <a:lstStyle/>
-          <a:p>
-            <a:r>
-              <a:t>Un ejemplo real con Word2Vec: la consulta election labour party vote. Los tres primeros resultados son de política, la categoría esperada. Los títulos son los primeros términos de cada nota, por eso se ven recortados. Conviene recordar que acierto de categoría no es lo mismo que satisfacción del usuario: una nota de la categoría correcta puede no tratar exactamente el tema consultado.</a:t>
-            </a:r>
-          </a:p>
-        </p:txBody>
-      </p:sp>
-      <p:sp>
-        <p:nvSpPr>
-          <p:cNvPr id="4" name="Slide Number Placeholder 3"/>
-          <p:cNvSpPr>
-            <a:spLocks noGrp="1"/>
-          </p:cNvSpPr>
-          <p:nvPr>
-            <p:ph type="sldNum" idx="5" sz="quarter"/>
+            <p:ph type="sldNum" sz="quarter" idx="5"/>
           </p:nvPr>
         </p:nvSpPr>
         <p:spPr/>
@@ -821,7 +615,7 @@
 </file>
 
 <file path=ppt/notesSlides/notesSlide14.xml><?xml version="1.0" encoding="utf-8"?>
-<p:notes xmlns:a="http://schemas.openxmlformats.org/drawingml/2006/main" xmlns:p="http://schemas.openxmlformats.org/presentationml/2006/main" xmlns:r="http://schemas.openxmlformats.org/officeDocument/2006/relationships">
+<p:notes xmlns:a="http://schemas.openxmlformats.org/drawingml/2006/main" xmlns:r="http://schemas.openxmlformats.org/officeDocument/2006/relationships" xmlns:p="http://schemas.openxmlformats.org/presentationml/2006/main">
   <p:cSld>
     <p:spTree>
       <p:nvGrpSpPr>
@@ -841,43 +635,43 @@
         <p:nvSpPr>
           <p:cNvPr id="2" name="Slide Image Placeholder 1"/>
           <p:cNvSpPr>
+            <a:spLocks noGrp="1" noRot="1" noChangeAspect="1"/>
+          </p:cNvSpPr>
+          <p:nvPr>
+            <p:ph type="sldImg" idx="2"/>
+          </p:nvPr>
+        </p:nvSpPr>
+        <p:spPr/>
+      </p:sp>
+      <p:sp>
+        <p:nvSpPr>
+          <p:cNvPr id="3" name="Notes Placeholder 2"/>
+          <p:cNvSpPr>
             <a:spLocks noGrp="1"/>
           </p:cNvSpPr>
           <p:nvPr>
-            <p:ph type="sldImg" idx="2"/>
+            <p:ph type="body" sz="quarter" idx="3"/>
           </p:nvPr>
         </p:nvSpPr>
         <p:spPr/>
-      </p:sp>
-      <p:sp>
-        <p:nvSpPr>
-          <p:cNvPr id="3" name="Notes Placeholder 2"/>
+        <p:txBody>
+          <a:bodyPr/>
+          <a:lstStyle/>
+          <a:p>
+            <a:r>
+              <a:t>En resumen, Word2Vec y SVD recuperan mejor que los métodos léxicos, pero entre ellos la diferencia no es concluyente con 115 consultas. Recomendamos Word2Vec como método principal, por su precisión y velocidad, SVD como alternativa, y validar con juicios de relevancia reales, porque la categoría es solo un proxy. BM25 sirve como línea base léxica sencilla. Gracias; quedo atento a preguntas.</a:t>
+            </a:r>
+          </a:p>
+        </p:txBody>
+      </p:sp>
+      <p:sp>
+        <p:nvSpPr>
+          <p:cNvPr id="4" name="Slide Number Placeholder 3"/>
           <p:cNvSpPr>
             <a:spLocks noGrp="1"/>
           </p:cNvSpPr>
           <p:nvPr>
-            <p:ph type="body" idx="3" sz="quarter"/>
-          </p:nvPr>
-        </p:nvSpPr>
-        <p:spPr/>
-        <p:txBody>
-          <a:bodyPr/>
-          <a:lstStyle/>
-          <a:p>
-            <a:r>
-              <a:t>En resumen, Word2Vec y SVD recuperan mejor que los métodos léxicos, pero entre ellos la diferencia no es concluyente con 115 consultas. Recomendamos Word2Vec como método principal, por su precisión y velocidad, SVD como alternativa, y validar con juicios de relevancia reales, porque la categoría es solo un proxy. BM25 sirve como línea base léxica sencilla. Gracias; quedo atento a preguntas.</a:t>
-            </a:r>
-          </a:p>
-        </p:txBody>
-      </p:sp>
-      <p:sp>
-        <p:nvSpPr>
-          <p:cNvPr id="4" name="Slide Number Placeholder 3"/>
-          <p:cNvSpPr>
-            <a:spLocks noGrp="1"/>
-          </p:cNvSpPr>
-          <p:nvPr>
-            <p:ph type="sldNum" idx="5" sz="quarter"/>
+            <p:ph type="sldNum" sz="quarter" idx="5"/>
           </p:nvPr>
         </p:nvSpPr>
         <p:spPr/>
@@ -891,7 +685,7 @@
 </file>
 
 <file path=ppt/notesSlides/notesSlide2.xml><?xml version="1.0" encoding="utf-8"?>
-<p:notes xmlns:a="http://schemas.openxmlformats.org/drawingml/2006/main" xmlns:p="http://schemas.openxmlformats.org/presentationml/2006/main" xmlns:r="http://schemas.openxmlformats.org/officeDocument/2006/relationships">
+<p:notes xmlns:a="http://schemas.openxmlformats.org/drawingml/2006/main" xmlns:r="http://schemas.openxmlformats.org/officeDocument/2006/relationships" xmlns:p="http://schemas.openxmlformats.org/presentationml/2006/main">
   <p:cSld>
     <p:spTree>
       <p:nvGrpSpPr>
@@ -911,43 +705,43 @@
         <p:nvSpPr>
           <p:cNvPr id="2" name="Slide Image Placeholder 1"/>
           <p:cNvSpPr>
+            <a:spLocks noGrp="1" noRot="1" noChangeAspect="1"/>
+          </p:cNvSpPr>
+          <p:nvPr>
+            <p:ph type="sldImg" idx="2"/>
+          </p:nvPr>
+        </p:nvSpPr>
+        <p:spPr/>
+      </p:sp>
+      <p:sp>
+        <p:nvSpPr>
+          <p:cNvPr id="3" name="Notes Placeholder 2"/>
+          <p:cNvSpPr>
             <a:spLocks noGrp="1"/>
           </p:cNvSpPr>
           <p:nvPr>
-            <p:ph type="sldImg" idx="2"/>
+            <p:ph type="body" sz="quarter" idx="3"/>
           </p:nvPr>
         </p:nvSpPr>
         <p:spPr/>
-      </p:sp>
-      <p:sp>
-        <p:nvSpPr>
-          <p:cNvPr id="3" name="Notes Placeholder 2"/>
+        <p:txBody>
+          <a:bodyPr/>
+          <a:lstStyle/>
+          <a:p>
+            <a:r>
+              <a:t>El problema es sencillo de enunciar: dada una consulta en lenguaje natural, devolver las noticias más parecidas. Con 2,225 noticias de la BBC repartidas en cinco categorías, leerlas una por una no es práctico. Por eso construimos un buscador y, sobre todo, comparamos seis maneras de representar el texto, porque la elección de esa representación cambia mucho qué documentos aparecen primero.</a:t>
+            </a:r>
+          </a:p>
+        </p:txBody>
+      </p:sp>
+      <p:sp>
+        <p:nvSpPr>
+          <p:cNvPr id="4" name="Slide Number Placeholder 3"/>
           <p:cNvSpPr>
             <a:spLocks noGrp="1"/>
           </p:cNvSpPr>
           <p:nvPr>
-            <p:ph type="body" idx="3" sz="quarter"/>
-          </p:nvPr>
-        </p:nvSpPr>
-        <p:spPr/>
-        <p:txBody>
-          <a:bodyPr/>
-          <a:lstStyle/>
-          <a:p>
-            <a:r>
-              <a:t>El problema es sencillo de enunciar: dada una consulta en lenguaje natural, devolver las noticias más parecidas. Con 2,225 noticias de la BBC repartidas en cinco categorías, leerlas una por una no es práctico. Por eso construimos un buscador y, sobre todo, comparamos seis maneras de representar el texto, porque la elección de esa representación cambia mucho qué documentos aparecen primero.</a:t>
-            </a:r>
-          </a:p>
-        </p:txBody>
-      </p:sp>
-      <p:sp>
-        <p:nvSpPr>
-          <p:cNvPr id="4" name="Slide Number Placeholder 3"/>
-          <p:cNvSpPr>
-            <a:spLocks noGrp="1"/>
-          </p:cNvSpPr>
-          <p:nvPr>
-            <p:ph type="sldNum" idx="5" sz="quarter"/>
+            <p:ph type="sldNum" sz="quarter" idx="5"/>
           </p:nvPr>
         </p:nvSpPr>
         <p:spPr/>
@@ -961,7 +755,7 @@
 </file>
 
 <file path=ppt/notesSlides/notesSlide3.xml><?xml version="1.0" encoding="utf-8"?>
-<p:notes xmlns:a="http://schemas.openxmlformats.org/drawingml/2006/main" xmlns:p="http://schemas.openxmlformats.org/presentationml/2006/main" xmlns:r="http://schemas.openxmlformats.org/officeDocument/2006/relationships">
+<p:notes xmlns:a="http://schemas.openxmlformats.org/drawingml/2006/main" xmlns:r="http://schemas.openxmlformats.org/officeDocument/2006/relationships" xmlns:p="http://schemas.openxmlformats.org/presentationml/2006/main">
   <p:cSld>
     <p:spTree>
       <p:nvGrpSpPr>
@@ -981,43 +775,43 @@
         <p:nvSpPr>
           <p:cNvPr id="2" name="Slide Image Placeholder 1"/>
           <p:cNvSpPr>
+            <a:spLocks noGrp="1" noRot="1" noChangeAspect="1"/>
+          </p:cNvSpPr>
+          <p:nvPr>
+            <p:ph type="sldImg" idx="2"/>
+          </p:nvPr>
+        </p:nvSpPr>
+        <p:spPr/>
+      </p:sp>
+      <p:sp>
+        <p:nvSpPr>
+          <p:cNvPr id="3" name="Notes Placeholder 2"/>
+          <p:cNvSpPr>
             <a:spLocks noGrp="1"/>
           </p:cNvSpPr>
           <p:nvPr>
-            <p:ph type="sldImg" idx="2"/>
+            <p:ph type="body" sz="quarter" idx="3"/>
           </p:nvPr>
         </p:nvSpPr>
         <p:spPr/>
-      </p:sp>
-      <p:sp>
-        <p:nvSpPr>
-          <p:cNvPr id="3" name="Notes Placeholder 2"/>
+        <p:txBody>
+          <a:bodyPr/>
+          <a:lstStyle/>
+          <a:p>
+            <a:r>
+              <a:t>Este es el corpus: cinco categorías, de 386 noticias de entretenimiento a 511 de deporte. Deporte y negocios suman 45.89% de las 2,225 noticias, pero ninguna categoría domina, así que no esperamos un sesgo fuerte hacia un tema. Esto importa porque más adelante usaremos la categoría como criterio de relevancia: un documento es relevante si comparte categoría con la consulta.</a:t>
+            </a:r>
+          </a:p>
+        </p:txBody>
+      </p:sp>
+      <p:sp>
+        <p:nvSpPr>
+          <p:cNvPr id="4" name="Slide Number Placeholder 3"/>
           <p:cNvSpPr>
             <a:spLocks noGrp="1"/>
           </p:cNvSpPr>
           <p:nvPr>
-            <p:ph type="body" idx="3" sz="quarter"/>
-          </p:nvPr>
-        </p:nvSpPr>
-        <p:spPr/>
-        <p:txBody>
-          <a:bodyPr/>
-          <a:lstStyle/>
-          <a:p>
-            <a:r>
-              <a:t>Este es el corpus: cinco categorías, de 386 noticias de entretenimiento a 511 de deporte. Deporte y negocios suman 45.89% de las 2,225 noticias, pero ninguna categoría domina, así que no esperamos un sesgo fuerte hacia un tema. Esto importa porque más adelante usaremos la categoría como criterio de relevancia: un documento es relevante si comparte categoría con la consulta.</a:t>
-            </a:r>
-          </a:p>
-        </p:txBody>
-      </p:sp>
-      <p:sp>
-        <p:nvSpPr>
-          <p:cNvPr id="4" name="Slide Number Placeholder 3"/>
-          <p:cNvSpPr>
-            <a:spLocks noGrp="1"/>
-          </p:cNvSpPr>
-          <p:nvPr>
-            <p:ph type="sldNum" idx="5" sz="quarter"/>
+            <p:ph type="sldNum" sz="quarter" idx="5"/>
           </p:nvPr>
         </p:nvSpPr>
         <p:spPr/>
@@ -1031,7 +825,7 @@
 </file>
 
 <file path=ppt/notesSlides/notesSlide4.xml><?xml version="1.0" encoding="utf-8"?>
-<p:notes xmlns:a="http://schemas.openxmlformats.org/drawingml/2006/main" xmlns:p="http://schemas.openxmlformats.org/presentationml/2006/main" xmlns:r="http://schemas.openxmlformats.org/officeDocument/2006/relationships">
+<p:notes xmlns:a="http://schemas.openxmlformats.org/drawingml/2006/main" xmlns:r="http://schemas.openxmlformats.org/officeDocument/2006/relationships" xmlns:p="http://schemas.openxmlformats.org/presentationml/2006/main">
   <p:cSld>
     <p:spTree>
       <p:nvGrpSpPr>
@@ -1051,43 +845,43 @@
         <p:nvSpPr>
           <p:cNvPr id="2" name="Slide Image Placeholder 1"/>
           <p:cNvSpPr>
+            <a:spLocks noGrp="1" noRot="1" noChangeAspect="1"/>
+          </p:cNvSpPr>
+          <p:nvPr>
+            <p:ph type="sldImg" idx="2"/>
+          </p:nvPr>
+        </p:nvSpPr>
+        <p:spPr/>
+      </p:sp>
+      <p:sp>
+        <p:nvSpPr>
+          <p:cNvPr id="3" name="Notes Placeholder 2"/>
+          <p:cNvSpPr>
             <a:spLocks noGrp="1"/>
           </p:cNvSpPr>
           <p:nvPr>
-            <p:ph type="sldImg" idx="2"/>
+            <p:ph type="body" sz="quarter" idx="3"/>
           </p:nvPr>
         </p:nvSpPr>
         <p:spPr/>
-      </p:sp>
-      <p:sp>
-        <p:nvSpPr>
-          <p:cNvPr id="3" name="Notes Placeholder 2"/>
+        <p:txBody>
+          <a:bodyPr/>
+          <a:lstStyle/>
+          <a:p>
+            <a:r>
+              <a:t>Antes de indexar limpiamos el corpus. Encontramos 99 noticias duplicadas exactas, siempre con la misma categoría, y las eliminamos: quedaron 2,126 documentos. Si se dejaran, un duplicado del documento de origen sería un acierto trivial y las métricas saldrían infladas. Después normalizamos el texto, quitamos stopwords y lematizamos, lo que dejó un vocabulario de 24,971 palabras.</a:t>
+            </a:r>
+          </a:p>
+        </p:txBody>
+      </p:sp>
+      <p:sp>
+        <p:nvSpPr>
+          <p:cNvPr id="4" name="Slide Number Placeholder 3"/>
           <p:cNvSpPr>
             <a:spLocks noGrp="1"/>
           </p:cNvSpPr>
           <p:nvPr>
-            <p:ph type="body" idx="3" sz="quarter"/>
-          </p:nvPr>
-        </p:nvSpPr>
-        <p:spPr/>
-        <p:txBody>
-          <a:bodyPr/>
-          <a:lstStyle/>
-          <a:p>
-            <a:r>
-              <a:t>Antes de indexar limpiamos el corpus. Encontramos 99 noticias duplicadas exactas, siempre con la misma categoría, y las eliminamos: quedaron 2,126 documentos. Si se dejaran, un duplicado del documento de origen sería un acierto trivial y las métricas saldrían infladas. Después normalizamos el texto, quitamos stopwords y lematizamos, lo que dejó un vocabulario de 24,971 palabras.</a:t>
-            </a:r>
-          </a:p>
-        </p:txBody>
-      </p:sp>
-      <p:sp>
-        <p:nvSpPr>
-          <p:cNvPr id="4" name="Slide Number Placeholder 3"/>
-          <p:cNvSpPr>
-            <a:spLocks noGrp="1"/>
-          </p:cNvSpPr>
-          <p:nvPr>
-            <p:ph type="sldNum" idx="5" sz="quarter"/>
+            <p:ph type="sldNum" sz="quarter" idx="5"/>
           </p:nvPr>
         </p:nvSpPr>
         <p:spPr/>
@@ -1101,7 +895,7 @@
 </file>
 
 <file path=ppt/notesSlides/notesSlide5.xml><?xml version="1.0" encoding="utf-8"?>
-<p:notes xmlns:a="http://schemas.openxmlformats.org/drawingml/2006/main" xmlns:p="http://schemas.openxmlformats.org/presentationml/2006/main" xmlns:r="http://schemas.openxmlformats.org/officeDocument/2006/relationships">
+<p:notes xmlns:a="http://schemas.openxmlformats.org/drawingml/2006/main" xmlns:r="http://schemas.openxmlformats.org/officeDocument/2006/relationships" xmlns:p="http://schemas.openxmlformats.org/presentationml/2006/main">
   <p:cSld>
     <p:spTree>
       <p:nvGrpSpPr>
@@ -1121,43 +915,43 @@
         <p:nvSpPr>
           <p:cNvPr id="2" name="Slide Image Placeholder 1"/>
           <p:cNvSpPr>
+            <a:spLocks noGrp="1" noRot="1" noChangeAspect="1"/>
+          </p:cNvSpPr>
+          <p:nvPr>
+            <p:ph type="sldImg" idx="2"/>
+          </p:nvPr>
+        </p:nvSpPr>
+        <p:spPr/>
+      </p:sp>
+      <p:sp>
+        <p:nvSpPr>
+          <p:cNvPr id="3" name="Notes Placeholder 2"/>
+          <p:cNvSpPr>
             <a:spLocks noGrp="1"/>
           </p:cNvSpPr>
           <p:nvPr>
-            <p:ph type="sldImg" idx="2"/>
+            <p:ph type="body" sz="quarter" idx="3"/>
           </p:nvPr>
         </p:nvSpPr>
         <p:spPr/>
-      </p:sp>
-      <p:sp>
-        <p:nvSpPr>
-          <p:cNvPr id="3" name="Notes Placeholder 2"/>
+        <p:txBody>
+          <a:bodyPr/>
+          <a:lstStyle/>
+          <a:p>
+            <a:r>
+              <a:t>La ley de Zipf dice que pocas palabras concentran muchas apariciones. Ajustamos los rangos 1 a 1,000 y obtuvimos un exponente de 0.6088, con R cuadrada de 0.9469. Es más bajo que el uno clásico porque quitamos las stopwords, que son justo las palabras más frecuentes. El mensaje práctico: unas cuantas palabras pesan mucho, y por eso ponderar por rareza tiene sentido.</a:t>
+            </a:r>
+          </a:p>
+        </p:txBody>
+      </p:sp>
+      <p:sp>
+        <p:nvSpPr>
+          <p:cNvPr id="4" name="Slide Number Placeholder 3"/>
           <p:cNvSpPr>
             <a:spLocks noGrp="1"/>
           </p:cNvSpPr>
           <p:nvPr>
-            <p:ph type="body" idx="3" sz="quarter"/>
-          </p:nvPr>
-        </p:nvSpPr>
-        <p:spPr/>
-        <p:txBody>
-          <a:bodyPr/>
-          <a:lstStyle/>
-          <a:p>
-            <a:r>
-              <a:t>La ley de Zipf dice que pocas palabras concentran muchas apariciones. Ajustamos los rangos 1 a 1,000 y obtuvimos un exponente de 0.6088, con R cuadrada de 0.9469. Es más bajo que el uno clásico porque quitamos las stopwords, que son justo las palabras más frecuentes. El mensaje práctico: unas cuantas palabras pesan mucho, y por eso ponderar por rareza tiene sentido.</a:t>
-            </a:r>
-          </a:p>
-        </p:txBody>
-      </p:sp>
-      <p:sp>
-        <p:nvSpPr>
-          <p:cNvPr id="4" name="Slide Number Placeholder 3"/>
-          <p:cNvSpPr>
-            <a:spLocks noGrp="1"/>
-          </p:cNvSpPr>
-          <p:nvPr>
-            <p:ph type="sldNum" idx="5" sz="quarter"/>
+            <p:ph type="sldNum" sz="quarter" idx="5"/>
           </p:nvPr>
         </p:nvSpPr>
         <p:spPr/>
@@ -1171,7 +965,7 @@
 </file>
 
 <file path=ppt/notesSlides/notesSlide6.xml><?xml version="1.0" encoding="utf-8"?>
-<p:notes xmlns:a="http://schemas.openxmlformats.org/drawingml/2006/main" xmlns:p="http://schemas.openxmlformats.org/presentationml/2006/main" xmlns:r="http://schemas.openxmlformats.org/officeDocument/2006/relationships">
+<p:notes xmlns:a="http://schemas.openxmlformats.org/drawingml/2006/main" xmlns:r="http://schemas.openxmlformats.org/officeDocument/2006/relationships" xmlns:p="http://schemas.openxmlformats.org/presentationml/2006/main">
   <p:cSld>
     <p:spTree>
       <p:nvGrpSpPr>
@@ -1191,43 +985,43 @@
         <p:nvSpPr>
           <p:cNvPr id="2" name="Slide Image Placeholder 1"/>
           <p:cNvSpPr>
+            <a:spLocks noGrp="1" noRot="1" noChangeAspect="1"/>
+          </p:cNvSpPr>
+          <p:nvPr>
+            <p:ph type="sldImg" idx="2"/>
+          </p:nvPr>
+        </p:nvSpPr>
+        <p:spPr/>
+      </p:sp>
+      <p:sp>
+        <p:nvSpPr>
+          <p:cNvPr id="3" name="Notes Placeholder 2"/>
+          <p:cNvSpPr>
             <a:spLocks noGrp="1"/>
           </p:cNvSpPr>
           <p:nvPr>
-            <p:ph type="sldImg" idx="2"/>
+            <p:ph type="body" sz="quarter" idx="3"/>
           </p:nvPr>
         </p:nvSpPr>
         <p:spPr/>
-      </p:sp>
-      <p:sp>
-        <p:nvSpPr>
-          <p:cNvPr id="3" name="Notes Placeholder 2"/>
+        <p:txBody>
+          <a:bodyPr/>
+          <a:lstStyle/>
+          <a:p>
+            <a:r>
+              <a:t>La ley de Heaps mide cuánto crece el vocabulario al leer más texto. Con un exponente beta de 0.5387, dentro del rango típico, el vocabulario sigue creciendo sin estabilizarse: terminamos con 24,971 palabras distintas en 385,689 tokens, y 39.97% aparece una sola vez. Eso significa que siempre habrá consultas con palabras que el índice apenas vio, algo a tener presente al evaluar.</a:t>
+            </a:r>
+          </a:p>
+        </p:txBody>
+      </p:sp>
+      <p:sp>
+        <p:nvSpPr>
+          <p:cNvPr id="4" name="Slide Number Placeholder 3"/>
           <p:cNvSpPr>
             <a:spLocks noGrp="1"/>
           </p:cNvSpPr>
           <p:nvPr>
-            <p:ph type="body" idx="3" sz="quarter"/>
-          </p:nvPr>
-        </p:nvSpPr>
-        <p:spPr/>
-        <p:txBody>
-          <a:bodyPr/>
-          <a:lstStyle/>
-          <a:p>
-            <a:r>
-              <a:t>La ley de Heaps mide cuánto crece el vocabulario al leer más texto. Con un exponente beta de 0.5387, dentro del rango típico, el vocabulario sigue creciendo sin estabilizarse: terminamos con 24,971 palabras distintas en 385,689 tokens, y 39.97% aparece una sola vez. Eso significa que siempre habrá consultas con palabras que el índice apenas vio, algo a tener presente al evaluar.</a:t>
-            </a:r>
-          </a:p>
-        </p:txBody>
-      </p:sp>
-      <p:sp>
-        <p:nvSpPr>
-          <p:cNvPr id="4" name="Slide Number Placeholder 3"/>
-          <p:cNvSpPr>
-            <a:spLocks noGrp="1"/>
-          </p:cNvSpPr>
-          <p:nvPr>
-            <p:ph type="sldNum" idx="5" sz="quarter"/>
+            <p:ph type="sldNum" sz="quarter" idx="5"/>
           </p:nvPr>
         </p:nvSpPr>
         <p:spPr/>
@@ -1241,7 +1035,7 @@
 </file>
 
 <file path=ppt/notesSlides/notesSlide7.xml><?xml version="1.0" encoding="utf-8"?>
-<p:notes xmlns:a="http://schemas.openxmlformats.org/drawingml/2006/main" xmlns:p="http://schemas.openxmlformats.org/presentationml/2006/main" xmlns:r="http://schemas.openxmlformats.org/officeDocument/2006/relationships">
+<p:notes xmlns:a="http://schemas.openxmlformats.org/drawingml/2006/main" xmlns:r="http://schemas.openxmlformats.org/officeDocument/2006/relationships" xmlns:p="http://schemas.openxmlformats.org/presentationml/2006/main">
   <p:cSld>
     <p:spTree>
       <p:nvGrpSpPr>
@@ -1261,43 +1055,43 @@
         <p:nvSpPr>
           <p:cNvPr id="2" name="Slide Image Placeholder 1"/>
           <p:cNvSpPr>
+            <a:spLocks noGrp="1" noRot="1" noChangeAspect="1"/>
+          </p:cNvSpPr>
+          <p:nvPr>
+            <p:ph type="sldImg" idx="2"/>
+          </p:nvPr>
+        </p:nvSpPr>
+        <p:spPr/>
+      </p:sp>
+      <p:sp>
+        <p:nvSpPr>
+          <p:cNvPr id="3" name="Notes Placeholder 2"/>
+          <p:cNvSpPr>
             <a:spLocks noGrp="1"/>
           </p:cNvSpPr>
           <p:nvPr>
-            <p:ph type="sldImg" idx="2"/>
+            <p:ph type="body" sz="quarter" idx="3"/>
           </p:nvPr>
         </p:nvSpPr>
         <p:spPr/>
-      </p:sp>
-      <p:sp>
-        <p:nvSpPr>
-          <p:cNvPr id="3" name="Notes Placeholder 2"/>
+        <p:txBody>
+          <a:bodyPr/>
+          <a:lstStyle/>
+          <a:p>
+            <a:r>
+              <a:t>Cada categoría tiene su propio vocabulario. Estas nubes muestran deporte, política y tecnología; el tamaño destaca las palabras frecuentes y propias de cada una, no las genéricas. En deporte aparecen nombres como Roddick o Mourinho, en política Tory y UKIP, en tecnología spam y browser. Esta huella léxica justifica usar la categoría como criterio de relevancia, aunque sea un criterio imperfecto.</a:t>
+            </a:r>
+          </a:p>
+        </p:txBody>
+      </p:sp>
+      <p:sp>
+        <p:nvSpPr>
+          <p:cNvPr id="4" name="Slide Number Placeholder 3"/>
           <p:cNvSpPr>
             <a:spLocks noGrp="1"/>
           </p:cNvSpPr>
           <p:nvPr>
-            <p:ph type="body" idx="3" sz="quarter"/>
-          </p:nvPr>
-        </p:nvSpPr>
-        <p:spPr/>
-        <p:txBody>
-          <a:bodyPr/>
-          <a:lstStyle/>
-          <a:p>
-            <a:r>
-              <a:t>Cada categoría tiene su propio vocabulario. Estas nubes muestran deporte, política y tecnología; el tamaño destaca las palabras frecuentes y propias de cada una, no las genéricas. En deporte aparecen nombres como Roddick o Mourinho, en política Tory y UKIP, en tecnología spam y browser. Esta huella léxica justifica usar la categoría como criterio de relevancia, aunque sea un criterio imperfecto.</a:t>
-            </a:r>
-          </a:p>
-        </p:txBody>
-      </p:sp>
-      <p:sp>
-        <p:nvSpPr>
-          <p:cNvPr id="4" name="Slide Number Placeholder 3"/>
-          <p:cNvSpPr>
-            <a:spLocks noGrp="1"/>
-          </p:cNvSpPr>
-          <p:nvPr>
-            <p:ph type="sldNum" idx="5" sz="quarter"/>
+            <p:ph type="sldNum" sz="quarter" idx="5"/>
           </p:nvPr>
         </p:nvSpPr>
         <p:spPr/>
@@ -1311,7 +1105,7 @@
 </file>
 
 <file path=ppt/notesSlides/notesSlide8.xml><?xml version="1.0" encoding="utf-8"?>
-<p:notes xmlns:a="http://schemas.openxmlformats.org/drawingml/2006/main" xmlns:p="http://schemas.openxmlformats.org/presentationml/2006/main" xmlns:r="http://schemas.openxmlformats.org/officeDocument/2006/relationships">
+<p:notes xmlns:a="http://schemas.openxmlformats.org/drawingml/2006/main" xmlns:r="http://schemas.openxmlformats.org/officeDocument/2006/relationships" xmlns:p="http://schemas.openxmlformats.org/presentationml/2006/main">
   <p:cSld>
     <p:spTree>
       <p:nvGrpSpPr>
@@ -1331,43 +1125,43 @@
         <p:nvSpPr>
           <p:cNvPr id="2" name="Slide Image Placeholder 1"/>
           <p:cNvSpPr>
+            <a:spLocks noGrp="1" noRot="1" noChangeAspect="1"/>
+          </p:cNvSpPr>
+          <p:nvPr>
+            <p:ph type="sldImg" idx="2"/>
+          </p:nvPr>
+        </p:nvSpPr>
+        <p:spPr/>
+      </p:sp>
+      <p:sp>
+        <p:nvSpPr>
+          <p:cNvPr id="3" name="Notes Placeholder 2"/>
+          <p:cNvSpPr>
             <a:spLocks noGrp="1"/>
           </p:cNvSpPr>
           <p:nvPr>
-            <p:ph type="sldImg" idx="2"/>
+            <p:ph type="body" sz="quarter" idx="3"/>
           </p:nvPr>
         </p:nvSpPr>
         <p:spPr/>
-      </p:sp>
-      <p:sp>
-        <p:nvSpPr>
-          <p:cNvPr id="3" name="Notes Placeholder 2"/>
+        <p:txBody>
+          <a:bodyPr/>
+          <a:lstStyle/>
+          <a:p>
+            <a:r>
+              <a:t>Así funciona el buscador. La consulta pasa por la misma limpieza que el corpus, se convierte en un vector según el método elegido y se compara con los 2,126 documentos mediante similitud coseno, o con el puntaje BM25. El resultado es un ranking y nos quedamos con los k más cercanos. Lo que cambia entre métodos es sobre todo cómo se construye ese vector.</a:t>
+            </a:r>
+          </a:p>
+        </p:txBody>
+      </p:sp>
+      <p:sp>
+        <p:nvSpPr>
+          <p:cNvPr id="4" name="Slide Number Placeholder 3"/>
           <p:cNvSpPr>
             <a:spLocks noGrp="1"/>
           </p:cNvSpPr>
           <p:nvPr>
-            <p:ph type="body" idx="3" sz="quarter"/>
-          </p:nvPr>
-        </p:nvSpPr>
-        <p:spPr/>
-        <p:txBody>
-          <a:bodyPr/>
-          <a:lstStyle/>
-          <a:p>
-            <a:r>
-              <a:t>Así funciona el buscador. La consulta pasa por la misma limpieza que el corpus, se convierte en un vector según el método elegido y se compara con los 2,126 documentos mediante similitud coseno, o con el puntaje BM25. El resultado es un ranking y nos quedamos con los k más cercanos. Lo que cambia entre métodos es sobre todo cómo se construye ese vector.</a:t>
-            </a:r>
-          </a:p>
-        </p:txBody>
-      </p:sp>
-      <p:sp>
-        <p:nvSpPr>
-          <p:cNvPr id="4" name="Slide Number Placeholder 3"/>
-          <p:cNvSpPr>
-            <a:spLocks noGrp="1"/>
-          </p:cNvSpPr>
-          <p:nvPr>
-            <p:ph type="sldNum" idx="5" sz="quarter"/>
+            <p:ph type="sldNum" sz="quarter" idx="5"/>
           </p:nvPr>
         </p:nvSpPr>
         <p:spPr/>
@@ -1381,7 +1175,7 @@
 </file>
 
 <file path=ppt/notesSlides/notesSlide9.xml><?xml version="1.0" encoding="utf-8"?>
-<p:notes xmlns:a="http://schemas.openxmlformats.org/drawingml/2006/main" xmlns:p="http://schemas.openxmlformats.org/presentationml/2006/main" xmlns:r="http://schemas.openxmlformats.org/officeDocument/2006/relationships">
+<p:notes xmlns:a="http://schemas.openxmlformats.org/drawingml/2006/main" xmlns:r="http://schemas.openxmlformats.org/officeDocument/2006/relationships" xmlns:p="http://schemas.openxmlformats.org/presentationml/2006/main">
   <p:cSld>
     <p:spTree>
       <p:nvGrpSpPr>
@@ -1401,43 +1195,43 @@
         <p:nvSpPr>
           <p:cNvPr id="2" name="Slide Image Placeholder 1"/>
           <p:cNvSpPr>
+            <a:spLocks noGrp="1" noRot="1" noChangeAspect="1"/>
+          </p:cNvSpPr>
+          <p:nvPr>
+            <p:ph type="sldImg" idx="2"/>
+          </p:nvPr>
+        </p:nvSpPr>
+        <p:spPr/>
+      </p:sp>
+      <p:sp>
+        <p:nvSpPr>
+          <p:cNvPr id="3" name="Notes Placeholder 2"/>
+          <p:cNvSpPr>
             <a:spLocks noGrp="1"/>
           </p:cNvSpPr>
           <p:nvPr>
-            <p:ph type="sldImg" idx="2"/>
+            <p:ph type="body" sz="quarter" idx="3"/>
           </p:nvPr>
         </p:nvSpPr>
         <p:spPr/>
-      </p:sp>
-      <p:sp>
-        <p:nvSpPr>
-          <p:cNvPr id="3" name="Notes Placeholder 2"/>
+        <p:txBody>
+          <a:bodyPr/>
+          <a:lstStyle/>
+          <a:p>
+            <a:r>
+              <a:t>Cuatro de los métodos evaluados. El conteo, que en código es CountVectorizer, cuenta apariciones. TF-IDF pondera por rareza. BM25 añade saturación de frecuencia y normalización por longitud. SVD comprime la matriz en 200 dimensiones latentes. Además evaluamos Word2Vec y LDA con 10 tópicos; Word2Vec aparece en seguida porque obtuvo el mejor MAP@10 de los seis.</a:t>
+            </a:r>
+          </a:p>
+        </p:txBody>
+      </p:sp>
+      <p:sp>
+        <p:nvSpPr>
+          <p:cNvPr id="4" name="Slide Number Placeholder 3"/>
           <p:cNvSpPr>
             <a:spLocks noGrp="1"/>
           </p:cNvSpPr>
           <p:nvPr>
-            <p:ph type="body" idx="3" sz="quarter"/>
-          </p:nvPr>
-        </p:nvSpPr>
-        <p:spPr/>
-        <p:txBody>
-          <a:bodyPr/>
-          <a:lstStyle/>
-          <a:p>
-            <a:r>
-              <a:t>Cuatro de los métodos evaluados. El conteo, que en código es CountVectorizer, cuenta apariciones. TF-IDF pondera por rareza. BM25 añade saturación de frecuencia y normalización por longitud. SVD comprime la matriz en 200 dimensiones latentes. Además evaluamos Word2Vec y LDA con 10 tópicos; Word2Vec aparece en seguida porque obtuvo el mejor MAP@10 de los seis.</a:t>
-            </a:r>
-          </a:p>
-        </p:txBody>
-      </p:sp>
-      <p:sp>
-        <p:nvSpPr>
-          <p:cNvPr id="4" name="Slide Number Placeholder 3"/>
-          <p:cNvSpPr>
-            <a:spLocks noGrp="1"/>
-          </p:cNvSpPr>
-          <p:nvPr>
-            <p:ph type="sldNum" idx="5" sz="quarter"/>
+            <p:ph type="sldNum" sz="quarter" idx="5"/>
           </p:nvPr>
         </p:nvSpPr>
         <p:spPr/>
@@ -1488,10 +1282,9 @@
           <a:lstStyle/>
           <a:p>
             <a:r>
-              <a:rPr lang="en-US" smtClean="0"/>
+              <a:rPr lang="en-US"/>
               <a:t>Click to edit Master title style</a:t>
             </a:r>
-            <a:endParaRPr lang="en-US"/>
           </a:p>
         </p:txBody>
       </p:sp>
@@ -1607,10 +1400,9 @@
           </a:lstStyle>
           <a:p>
             <a:r>
-              <a:rPr lang="en-US" smtClean="0"/>
+              <a:rPr lang="en-US"/>
               <a:t>Click to edit Master subtitle style</a:t>
             </a:r>
-            <a:endParaRPr lang="en-US"/>
           </a:p>
         </p:txBody>
       </p:sp>
@@ -1631,7 +1423,7 @@
           <a:p>
             <a:fld id="{5BCAD085-E8A6-8845-BD4E-CB4CCA059FC4}" type="datetimeFigureOut">
               <a:rPr lang="en-US" smtClean="0"/>
-              <a:t>1/27/13</a:t>
+              <a:t>10/11/26</a:t>
             </a:fld>
             <a:endParaRPr lang="en-US"/>
           </a:p>
@@ -1725,10 +1517,9 @@
           <a:lstStyle/>
           <a:p>
             <a:r>
-              <a:rPr lang="en-US" smtClean="0"/>
+              <a:rPr lang="en-US"/>
               <a:t>Click to edit Master title style</a:t>
             </a:r>
-            <a:endParaRPr lang="en-US"/>
           </a:p>
         </p:txBody>
       </p:sp>
@@ -1749,38 +1540,37 @@
           <a:p>
             <a:pPr lvl="0"/>
             <a:r>
-              <a:rPr lang="en-US" smtClean="0"/>
+              <a:rPr lang="en-US"/>
               <a:t>Click to edit Master text styles</a:t>
             </a:r>
           </a:p>
           <a:p>
             <a:pPr lvl="1"/>
             <a:r>
-              <a:rPr lang="en-US" smtClean="0"/>
+              <a:rPr lang="en-US"/>
               <a:t>Second level</a:t>
             </a:r>
           </a:p>
           <a:p>
             <a:pPr lvl="2"/>
             <a:r>
-              <a:rPr lang="en-US" smtClean="0"/>
+              <a:rPr lang="en-US"/>
               <a:t>Third level</a:t>
             </a:r>
           </a:p>
           <a:p>
             <a:pPr lvl="3"/>
             <a:r>
-              <a:rPr lang="en-US" smtClean="0"/>
+              <a:rPr lang="en-US"/>
               <a:t>Fourth level</a:t>
             </a:r>
           </a:p>
           <a:p>
             <a:pPr lvl="4"/>
             <a:r>
-              <a:rPr lang="en-US" smtClean="0"/>
+              <a:rPr lang="en-US"/>
               <a:t>Fifth level</a:t>
             </a:r>
-            <a:endParaRPr lang="en-US"/>
           </a:p>
         </p:txBody>
       </p:sp>
@@ -1801,7 +1591,7 @@
           <a:p>
             <a:fld id="{5BCAD085-E8A6-8845-BD4E-CB4CCA059FC4}" type="datetimeFigureOut">
               <a:rPr lang="en-US" smtClean="0"/>
-              <a:t>1/27/13</a:t>
+              <a:t>10/11/26</a:t>
             </a:fld>
             <a:endParaRPr lang="en-US"/>
           </a:p>
@@ -1900,10 +1690,9 @@
           <a:lstStyle/>
           <a:p>
             <a:r>
-              <a:rPr lang="en-US" smtClean="0"/>
+              <a:rPr lang="en-US"/>
               <a:t>Click to edit Master title style</a:t>
             </a:r>
-            <a:endParaRPr lang="en-US"/>
           </a:p>
         </p:txBody>
       </p:sp>
@@ -1929,38 +1718,37 @@
           <a:p>
             <a:pPr lvl="0"/>
             <a:r>
-              <a:rPr lang="en-US" smtClean="0"/>
+              <a:rPr lang="en-US"/>
               <a:t>Click to edit Master text styles</a:t>
             </a:r>
           </a:p>
           <a:p>
             <a:pPr lvl="1"/>
             <a:r>
-              <a:rPr lang="en-US" smtClean="0"/>
+              <a:rPr lang="en-US"/>
               <a:t>Second level</a:t>
             </a:r>
           </a:p>
           <a:p>
             <a:pPr lvl="2"/>
             <a:r>
-              <a:rPr lang="en-US" smtClean="0"/>
+              <a:rPr lang="en-US"/>
               <a:t>Third level</a:t>
             </a:r>
           </a:p>
           <a:p>
             <a:pPr lvl="3"/>
             <a:r>
-              <a:rPr lang="en-US" smtClean="0"/>
+              <a:rPr lang="en-US"/>
               <a:t>Fourth level</a:t>
             </a:r>
           </a:p>
           <a:p>
             <a:pPr lvl="4"/>
             <a:r>
-              <a:rPr lang="en-US" smtClean="0"/>
+              <a:rPr lang="en-US"/>
               <a:t>Fifth level</a:t>
             </a:r>
-            <a:endParaRPr lang="en-US"/>
           </a:p>
         </p:txBody>
       </p:sp>
@@ -1981,7 +1769,7 @@
           <a:p>
             <a:fld id="{5BCAD085-E8A6-8845-BD4E-CB4CCA059FC4}" type="datetimeFigureOut">
               <a:rPr lang="en-US" smtClean="0"/>
-              <a:t>1/27/13</a:t>
+              <a:t>10/11/26</a:t>
             </a:fld>
             <a:endParaRPr lang="en-US"/>
           </a:p>
@@ -2075,10 +1863,9 @@
           <a:lstStyle/>
           <a:p>
             <a:r>
-              <a:rPr lang="en-US" smtClean="0"/>
+              <a:rPr lang="en-US"/>
               <a:t>Click to edit Master title style</a:t>
             </a:r>
-            <a:endParaRPr lang="en-US"/>
           </a:p>
         </p:txBody>
       </p:sp>
@@ -2099,38 +1886,37 @@
           <a:p>
             <a:pPr lvl="0"/>
             <a:r>
-              <a:rPr lang="en-US" smtClean="0"/>
+              <a:rPr lang="en-US"/>
               <a:t>Click to edit Master text styles</a:t>
             </a:r>
           </a:p>
           <a:p>
             <a:pPr lvl="1"/>
             <a:r>
-              <a:rPr lang="en-US" smtClean="0"/>
+              <a:rPr lang="en-US"/>
               <a:t>Second level</a:t>
             </a:r>
           </a:p>
           <a:p>
             <a:pPr lvl="2"/>
             <a:r>
-              <a:rPr lang="en-US" smtClean="0"/>
+              <a:rPr lang="en-US"/>
               <a:t>Third level</a:t>
             </a:r>
           </a:p>
           <a:p>
             <a:pPr lvl="3"/>
             <a:r>
-              <a:rPr lang="en-US" smtClean="0"/>
+              <a:rPr lang="en-US"/>
               <a:t>Fourth level</a:t>
             </a:r>
           </a:p>
           <a:p>
             <a:pPr lvl="4"/>
             <a:r>
-              <a:rPr lang="en-US" smtClean="0"/>
+              <a:rPr lang="en-US"/>
               <a:t>Fifth level</a:t>
             </a:r>
-            <a:endParaRPr lang="en-US"/>
           </a:p>
         </p:txBody>
       </p:sp>
@@ -2151,7 +1937,7 @@
           <a:p>
             <a:fld id="{5BCAD085-E8A6-8845-BD4E-CB4CCA059FC4}" type="datetimeFigureOut">
               <a:rPr lang="en-US" smtClean="0"/>
-              <a:t>1/27/13</a:t>
+              <a:t>10/11/26</a:t>
             </a:fld>
             <a:endParaRPr lang="en-US"/>
           </a:p>
@@ -2254,10 +2040,9 @@
           </a:lstStyle>
           <a:p>
             <a:r>
-              <a:rPr lang="en-US" smtClean="0"/>
+              <a:rPr lang="en-US"/>
               <a:t>Click to edit Master title style</a:t>
             </a:r>
-            <a:endParaRPr lang="en-US"/>
           </a:p>
         </p:txBody>
       </p:sp>
@@ -2374,7 +2159,7 @@
           <a:p>
             <a:pPr lvl="0"/>
             <a:r>
-              <a:rPr lang="en-US" smtClean="0"/>
+              <a:rPr lang="en-US"/>
               <a:t>Click to edit Master text styles</a:t>
             </a:r>
           </a:p>
@@ -2397,7 +2182,7 @@
           <a:p>
             <a:fld id="{5BCAD085-E8A6-8845-BD4E-CB4CCA059FC4}" type="datetimeFigureOut">
               <a:rPr lang="en-US" smtClean="0"/>
-              <a:t>1/27/13</a:t>
+              <a:t>10/11/26</a:t>
             </a:fld>
             <a:endParaRPr lang="en-US"/>
           </a:p>
@@ -2491,10 +2276,9 @@
           <a:lstStyle/>
           <a:p>
             <a:r>
-              <a:rPr lang="en-US" smtClean="0"/>
+              <a:rPr lang="en-US"/>
               <a:t>Click to edit Master title style</a:t>
             </a:r>
-            <a:endParaRPr lang="en-US"/>
           </a:p>
         </p:txBody>
       </p:sp>
@@ -2548,38 +2332,37 @@
           <a:p>
             <a:pPr lvl="0"/>
             <a:r>
-              <a:rPr lang="en-US" smtClean="0"/>
+              <a:rPr lang="en-US"/>
               <a:t>Click to edit Master text styles</a:t>
             </a:r>
           </a:p>
           <a:p>
             <a:pPr lvl="1"/>
             <a:r>
-              <a:rPr lang="en-US" smtClean="0"/>
+              <a:rPr lang="en-US"/>
               <a:t>Second level</a:t>
             </a:r>
           </a:p>
           <a:p>
             <a:pPr lvl="2"/>
             <a:r>
-              <a:rPr lang="en-US" smtClean="0"/>
+              <a:rPr lang="en-US"/>
               <a:t>Third level</a:t>
             </a:r>
           </a:p>
           <a:p>
             <a:pPr lvl="3"/>
             <a:r>
-              <a:rPr lang="en-US" smtClean="0"/>
+              <a:rPr lang="en-US"/>
               <a:t>Fourth level</a:t>
             </a:r>
           </a:p>
           <a:p>
             <a:pPr lvl="4"/>
             <a:r>
-              <a:rPr lang="en-US" smtClean="0"/>
+              <a:rPr lang="en-US"/>
               <a:t>Fifth level</a:t>
             </a:r>
-            <a:endParaRPr lang="en-US"/>
           </a:p>
         </p:txBody>
       </p:sp>
@@ -2633,38 +2416,37 @@
           <a:p>
             <a:pPr lvl="0"/>
             <a:r>
-              <a:rPr lang="en-US" smtClean="0"/>
+              <a:rPr lang="en-US"/>
               <a:t>Click to edit Master text styles</a:t>
             </a:r>
           </a:p>
           <a:p>
             <a:pPr lvl="1"/>
             <a:r>
-              <a:rPr lang="en-US" smtClean="0"/>
+              <a:rPr lang="en-US"/>
               <a:t>Second level</a:t>
             </a:r>
           </a:p>
           <a:p>
             <a:pPr lvl="2"/>
             <a:r>
-              <a:rPr lang="en-US" smtClean="0"/>
+              <a:rPr lang="en-US"/>
               <a:t>Third level</a:t>
             </a:r>
           </a:p>
           <a:p>
             <a:pPr lvl="3"/>
             <a:r>
-              <a:rPr lang="en-US" smtClean="0"/>
+              <a:rPr lang="en-US"/>
               <a:t>Fourth level</a:t>
             </a:r>
           </a:p>
           <a:p>
             <a:pPr lvl="4"/>
             <a:r>
-              <a:rPr lang="en-US" smtClean="0"/>
+              <a:rPr lang="en-US"/>
               <a:t>Fifth level</a:t>
             </a:r>
-            <a:endParaRPr lang="en-US"/>
           </a:p>
         </p:txBody>
       </p:sp>
@@ -2685,7 +2467,7 @@
           <a:p>
             <a:fld id="{5BCAD085-E8A6-8845-BD4E-CB4CCA059FC4}" type="datetimeFigureOut">
               <a:rPr lang="en-US" smtClean="0"/>
-              <a:t>1/27/13</a:t>
+              <a:t>10/11/26</a:t>
             </a:fld>
             <a:endParaRPr lang="en-US"/>
           </a:p>
@@ -2783,10 +2565,9 @@
           </a:lstStyle>
           <a:p>
             <a:r>
-              <a:rPr lang="en-US" smtClean="0"/>
+              <a:rPr lang="en-US"/>
               <a:t>Click to edit Master title style</a:t>
             </a:r>
-            <a:endParaRPr lang="en-US"/>
           </a:p>
         </p:txBody>
       </p:sp>
@@ -2849,7 +2630,7 @@
           <a:p>
             <a:pPr lvl="0"/>
             <a:r>
-              <a:rPr lang="en-US" smtClean="0"/>
+              <a:rPr lang="en-US"/>
               <a:t>Click to edit Master text styles</a:t>
             </a:r>
           </a:p>
@@ -2905,38 +2686,37 @@
           <a:p>
             <a:pPr lvl="0"/>
             <a:r>
-              <a:rPr lang="en-US" smtClean="0"/>
+              <a:rPr lang="en-US"/>
               <a:t>Click to edit Master text styles</a:t>
             </a:r>
           </a:p>
           <a:p>
             <a:pPr lvl="1"/>
             <a:r>
-              <a:rPr lang="en-US" smtClean="0"/>
+              <a:rPr lang="en-US"/>
               <a:t>Second level</a:t>
             </a:r>
           </a:p>
           <a:p>
             <a:pPr lvl="2"/>
             <a:r>
-              <a:rPr lang="en-US" smtClean="0"/>
+              <a:rPr lang="en-US"/>
               <a:t>Third level</a:t>
             </a:r>
           </a:p>
           <a:p>
             <a:pPr lvl="3"/>
             <a:r>
-              <a:rPr lang="en-US" smtClean="0"/>
+              <a:rPr lang="en-US"/>
               <a:t>Fourth level</a:t>
             </a:r>
           </a:p>
           <a:p>
             <a:pPr lvl="4"/>
             <a:r>
-              <a:rPr lang="en-US" smtClean="0"/>
+              <a:rPr lang="en-US"/>
               <a:t>Fifth level</a:t>
             </a:r>
-            <a:endParaRPr lang="en-US"/>
           </a:p>
         </p:txBody>
       </p:sp>
@@ -2999,7 +2779,7 @@
           <a:p>
             <a:pPr lvl="0"/>
             <a:r>
-              <a:rPr lang="en-US" smtClean="0"/>
+              <a:rPr lang="en-US"/>
               <a:t>Click to edit Master text styles</a:t>
             </a:r>
           </a:p>
@@ -3055,38 +2835,37 @@
           <a:p>
             <a:pPr lvl="0"/>
             <a:r>
-              <a:rPr lang="en-US" smtClean="0"/>
+              <a:rPr lang="en-US"/>
               <a:t>Click to edit Master text styles</a:t>
             </a:r>
           </a:p>
           <a:p>
             <a:pPr lvl="1"/>
             <a:r>
-              <a:rPr lang="en-US" smtClean="0"/>
+              <a:rPr lang="en-US"/>
               <a:t>Second level</a:t>
             </a:r>
           </a:p>
           <a:p>
             <a:pPr lvl="2"/>
             <a:r>
-              <a:rPr lang="en-US" smtClean="0"/>
+              <a:rPr lang="en-US"/>
               <a:t>Third level</a:t>
             </a:r>
           </a:p>
           <a:p>
             <a:pPr lvl="3"/>
             <a:r>
-              <a:rPr lang="en-US" smtClean="0"/>
+              <a:rPr lang="en-US"/>
               <a:t>Fourth level</a:t>
             </a:r>
           </a:p>
           <a:p>
             <a:pPr lvl="4"/>
             <a:r>
-              <a:rPr lang="en-US" smtClean="0"/>
+              <a:rPr lang="en-US"/>
               <a:t>Fifth level</a:t>
             </a:r>
-            <a:endParaRPr lang="en-US"/>
           </a:p>
         </p:txBody>
       </p:sp>
@@ -3107,7 +2886,7 @@
           <a:p>
             <a:fld id="{5BCAD085-E8A6-8845-BD4E-CB4CCA059FC4}" type="datetimeFigureOut">
               <a:rPr lang="en-US" smtClean="0"/>
-              <a:t>1/27/13</a:t>
+              <a:t>10/11/26</a:t>
             </a:fld>
             <a:endParaRPr lang="en-US"/>
           </a:p>
@@ -3201,10 +2980,9 @@
           <a:lstStyle/>
           <a:p>
             <a:r>
-              <a:rPr lang="en-US" smtClean="0"/>
+              <a:rPr lang="en-US"/>
               <a:t>Click to edit Master title style</a:t>
             </a:r>
-            <a:endParaRPr lang="en-US"/>
           </a:p>
         </p:txBody>
       </p:sp>
@@ -3225,7 +3003,7 @@
           <a:p>
             <a:fld id="{5BCAD085-E8A6-8845-BD4E-CB4CCA059FC4}" type="datetimeFigureOut">
               <a:rPr lang="en-US" smtClean="0"/>
-              <a:t>1/27/13</a:t>
+              <a:t>10/11/26</a:t>
             </a:fld>
             <a:endParaRPr lang="en-US"/>
           </a:p>
@@ -3320,7 +3098,7 @@
           <a:p>
             <a:fld id="{5BCAD085-E8A6-8845-BD4E-CB4CCA059FC4}" type="datetimeFigureOut">
               <a:rPr lang="en-US" smtClean="0"/>
-              <a:t>1/27/13</a:t>
+              <a:t>10/11/26</a:t>
             </a:fld>
             <a:endParaRPr lang="en-US"/>
           </a:p>
@@ -3423,10 +3201,9 @@
           </a:lstStyle>
           <a:p>
             <a:r>
-              <a:rPr lang="en-US" smtClean="0"/>
+              <a:rPr lang="en-US"/>
               <a:t>Click to edit Master title style</a:t>
             </a:r>
-            <a:endParaRPr lang="en-US"/>
           </a:p>
         </p:txBody>
       </p:sp>
@@ -3480,38 +3257,37 @@
           <a:p>
             <a:pPr lvl="0"/>
             <a:r>
-              <a:rPr lang="en-US" smtClean="0"/>
+              <a:rPr lang="en-US"/>
               <a:t>Click to edit Master text styles</a:t>
             </a:r>
           </a:p>
           <a:p>
             <a:pPr lvl="1"/>
             <a:r>
-              <a:rPr lang="en-US" smtClean="0"/>
+              <a:rPr lang="en-US"/>
               <a:t>Second level</a:t>
             </a:r>
           </a:p>
           <a:p>
             <a:pPr lvl="2"/>
             <a:r>
-              <a:rPr lang="en-US" smtClean="0"/>
+              <a:rPr lang="en-US"/>
               <a:t>Third level</a:t>
             </a:r>
           </a:p>
           <a:p>
             <a:pPr lvl="3"/>
             <a:r>
-              <a:rPr lang="en-US" smtClean="0"/>
+              <a:rPr lang="en-US"/>
               <a:t>Fourth level</a:t>
             </a:r>
           </a:p>
           <a:p>
             <a:pPr lvl="4"/>
             <a:r>
-              <a:rPr lang="en-US" smtClean="0"/>
+              <a:rPr lang="en-US"/>
               <a:t>Fifth level</a:t>
             </a:r>
-            <a:endParaRPr lang="en-US"/>
           </a:p>
         </p:txBody>
       </p:sp>
@@ -3574,7 +3350,7 @@
           <a:p>
             <a:pPr lvl="0"/>
             <a:r>
-              <a:rPr lang="en-US" smtClean="0"/>
+              <a:rPr lang="en-US"/>
               <a:t>Click to edit Master text styles</a:t>
             </a:r>
           </a:p>
@@ -3597,7 +3373,7 @@
           <a:p>
             <a:fld id="{5BCAD085-E8A6-8845-BD4E-CB4CCA059FC4}" type="datetimeFigureOut">
               <a:rPr lang="en-US" smtClean="0"/>
-              <a:t>1/27/13</a:t>
+              <a:t>10/11/26</a:t>
             </a:fld>
             <a:endParaRPr lang="en-US"/>
           </a:p>
@@ -3700,10 +3476,9 @@
           </a:lstStyle>
           <a:p>
             <a:r>
-              <a:rPr lang="en-US" smtClean="0"/>
+              <a:rPr lang="en-US"/>
               <a:t>Click to edit Master title style</a:t>
             </a:r>
-            <a:endParaRPr lang="en-US"/>
           </a:p>
         </p:txBody>
       </p:sp>
@@ -3827,7 +3602,7 @@
           <a:p>
             <a:pPr lvl="0"/>
             <a:r>
-              <a:rPr lang="en-US" smtClean="0"/>
+              <a:rPr lang="en-US"/>
               <a:t>Click to edit Master text styles</a:t>
             </a:r>
           </a:p>
@@ -3850,7 +3625,7 @@
           <a:p>
             <a:fld id="{5BCAD085-E8A6-8845-BD4E-CB4CCA059FC4}" type="datetimeFigureOut">
               <a:rPr lang="en-US" smtClean="0"/>
-              <a:t>1/27/13</a:t>
+              <a:t>10/11/26</a:t>
             </a:fld>
             <a:endParaRPr lang="en-US"/>
           </a:p>
@@ -3959,10 +3734,9 @@
           <a:lstStyle/>
           <a:p>
             <a:r>
-              <a:rPr lang="en-US" smtClean="0"/>
+              <a:rPr lang="en-US"/>
               <a:t>Click to edit Master title style</a:t>
             </a:r>
-            <a:endParaRPr lang="en-US"/>
           </a:p>
         </p:txBody>
       </p:sp>
@@ -3993,38 +3767,37 @@
           <a:p>
             <a:pPr lvl="0"/>
             <a:r>
-              <a:rPr lang="en-US" smtClean="0"/>
+              <a:rPr lang="en-US"/>
               <a:t>Click to edit Master text styles</a:t>
             </a:r>
           </a:p>
           <a:p>
             <a:pPr lvl="1"/>
             <a:r>
-              <a:rPr lang="en-US" smtClean="0"/>
+              <a:rPr lang="en-US"/>
               <a:t>Second level</a:t>
             </a:r>
           </a:p>
           <a:p>
             <a:pPr lvl="2"/>
             <a:r>
-              <a:rPr lang="en-US" smtClean="0"/>
+              <a:rPr lang="en-US"/>
               <a:t>Third level</a:t>
             </a:r>
           </a:p>
           <a:p>
             <a:pPr lvl="3"/>
             <a:r>
-              <a:rPr lang="en-US" smtClean="0"/>
+              <a:rPr lang="en-US"/>
               <a:t>Fourth level</a:t>
             </a:r>
           </a:p>
           <a:p>
             <a:pPr lvl="4"/>
             <a:r>
-              <a:rPr lang="en-US" smtClean="0"/>
+              <a:rPr lang="en-US"/>
               <a:t>Fifth level</a:t>
             </a:r>
-            <a:endParaRPr lang="en-US"/>
           </a:p>
         </p:txBody>
       </p:sp>
@@ -4063,7 +3836,7 @@
           <a:p>
             <a:fld id="{5BCAD085-E8A6-8845-BD4E-CB4CCA059FC4}" type="datetimeFigureOut">
               <a:rPr lang="en-US" smtClean="0"/>
-              <a:t>1/27/13</a:t>
+              <a:t>10/11/26</a:t>
             </a:fld>
             <a:endParaRPr lang="en-US"/>
           </a:p>
@@ -4422,7 +4195,7 @@
 </file>
 
 <file path=ppt/slides/slide1.xml><?xml version="1.0" encoding="utf-8"?>
-<p:sld xmlns:a="http://schemas.openxmlformats.org/drawingml/2006/main" xmlns:p="http://schemas.openxmlformats.org/presentationml/2006/main" xmlns:r="http://schemas.openxmlformats.org/officeDocument/2006/relationships">
+<p:sld xmlns:a="http://schemas.openxmlformats.org/drawingml/2006/main" xmlns:r="http://schemas.openxmlformats.org/officeDocument/2006/relationships" xmlns:p="http://schemas.openxmlformats.org/presentationml/2006/main">
   <p:cSld>
     <p:bg>
       <p:bgPr>
@@ -4438,7 +4211,14 @@
         <p:cNvGrpSpPr/>
         <p:nvPr/>
       </p:nvGrpSpPr>
-      <p:grpSpPr/>
+      <p:grpSpPr>
+        <a:xfrm>
+          <a:off x="0" y="0"/>
+          <a:ext cx="0" cy="0"/>
+          <a:chOff x="0" y="0"/>
+          <a:chExt cx="0" cy="0"/>
+        </a:xfrm>
+      </p:grpSpPr>
       <p:sp>
         <p:nvSpPr>
           <p:cNvPr id="2" name="Titulo"/>
@@ -4447,8 +4227,8 @@
         </p:nvSpPr>
         <p:spPr>
           <a:xfrm>
-            <a:off x="548640" y="1371600"/>
-            <a:ext cx="8275091" cy="1524000"/>
+            <a:off x="548641" y="1795345"/>
+            <a:ext cx="5547360" cy="2103121"/>
           </a:xfrm>
           <a:prstGeom prst="rect">
             <a:avLst/>
@@ -4463,16 +4243,61 @@
           <a:p>
             <a:pPr algn="l"/>
             <a:r>
-              <a:rPr sz="4400" b="1">
+              <a:rPr sz="4400" b="1" dirty="0" err="1">
                 <a:solidFill>
                   <a:srgbClr val="F6F4EF"/>
                 </a:solidFill>
                 <a:latin typeface="Georgia"/>
               </a:rPr>
-              <a:t>Recuperación de información en </a:t>
-            </a:r>
-            <a:r>
-              <a:rPr sz="4400" b="1">
+              <a:t>Recuperación</a:t>
+            </a:r>
+            <a:r>
+              <a:rPr sz="4400" b="1" dirty="0">
+                <a:solidFill>
+                  <a:srgbClr val="F6F4EF"/>
+                </a:solidFill>
+                <a:latin typeface="Georgia"/>
+              </a:rPr>
+              <a:t> de </a:t>
+            </a:r>
+            <a:r>
+              <a:rPr sz="4400" b="1" dirty="0" err="1">
+                <a:solidFill>
+                  <a:srgbClr val="F6F4EF"/>
+                </a:solidFill>
+                <a:latin typeface="Georgia"/>
+              </a:rPr>
+              <a:t>información</a:t>
+            </a:r>
+            <a:r>
+              <a:rPr sz="4400" b="1" dirty="0">
+                <a:solidFill>
+                  <a:srgbClr val="F6F4EF"/>
+                </a:solidFill>
+                <a:latin typeface="Georgia"/>
+              </a:rPr>
+              <a:t> </a:t>
+            </a:r>
+            <a:r>
+              <a:rPr sz="4400" b="1" dirty="0" err="1">
+                <a:solidFill>
+                  <a:srgbClr val="F6F4EF"/>
+                </a:solidFill>
+                <a:latin typeface="Georgia"/>
+              </a:rPr>
+              <a:t>en</a:t>
+            </a:r>
+            <a:r>
+              <a:rPr sz="4400" b="1" dirty="0">
+                <a:solidFill>
+                  <a:srgbClr val="F6F4EF"/>
+                </a:solidFill>
+                <a:latin typeface="Georgia"/>
+              </a:rPr>
+              <a:t> </a:t>
+            </a:r>
+            <a:r>
+              <a:rPr sz="4400" b="1" dirty="0">
                 <a:solidFill>
                   <a:srgbClr val="E07A1F"/>
                 </a:solidFill>
@@ -4491,7 +4316,7 @@
         </p:nvSpPr>
         <p:spPr>
           <a:xfrm>
-            <a:off x="548640" y="3032760"/>
+            <a:off x="548640" y="3898467"/>
             <a:ext cx="8275091" cy="487680"/>
           </a:xfrm>
           <a:prstGeom prst="rect">
@@ -4507,70 +4332,78 @@
           <a:p>
             <a:pPr algn="l"/>
             <a:r>
-              <a:rPr sz="2000" b="0">
+              <a:rPr sz="2000" b="0" dirty="0">
                 <a:solidFill>
                   <a:srgbClr val="C9CCD1"/>
                 </a:solidFill>
                 <a:latin typeface="Calibri"/>
               </a:rPr>
-              <a:t>Seis buscadores, 2,126 noticias, 115 consultas</a:t>
-            </a:r>
-          </a:p>
-        </p:txBody>
-      </p:sp>
-      <p:sp>
-        <p:nvSpPr>
-          <p:cNvPr id="4" name="Marcador icono"/>
-          <p:cNvSpPr/>
-          <p:nvPr/>
-        </p:nvSpPr>
-        <p:spPr>
-          <a:xfrm>
-            <a:off x="9006611" y="1463040"/>
-            <a:ext cx="2636444" cy="2636444"/>
-          </a:xfrm>
-          <a:prstGeom prst="roundRect">
-            <a:avLst>
-              <a:gd name="adj" fmla="val 5202"/>
-            </a:avLst>
-          </a:prstGeom>
-          <a:noFill/>
-          <a:ln w="22225">
-            <a:solidFill>
-              <a:srgbClr val="E07A1F"/>
-            </a:solidFill>
-            <a:prstDash val="dash"/>
-          </a:ln>
-        </p:spPr>
-        <p:txBody>
-          <a:bodyPr rtlCol="0" anchor="ctr" wrap="square" tIns="91440" bIns="91440">
-            <a:noAutofit/>
-          </a:bodyPr>
-          <a:lstStyle/>
-          <a:p>
-            <a:pPr algn="ctr"/>
-            <a:r>
-              <a:rPr sz="1200" b="0">
+              <a:t>Seis </a:t>
+            </a:r>
+            <a:r>
+              <a:rPr sz="2000" b="0" dirty="0" err="1">
                 <a:solidFill>
                   <a:srgbClr val="C9CCD1"/>
                 </a:solidFill>
                 <a:latin typeface="Calibri"/>
               </a:rPr>
-              <a:t>ICONO: lupa sobre un periódico</a:t>
-            </a:r>
-          </a:p>
-        </p:txBody>
-      </p:sp>
-      <p:sp>
-        <p:nvSpPr>
-          <p:cNvPr id="5" name="Equipo"/>
+              <a:t>buscadores</a:t>
+            </a:r>
+            <a:r>
+              <a:rPr sz="2000" b="0" dirty="0">
+                <a:solidFill>
+                  <a:srgbClr val="C9CCD1"/>
+                </a:solidFill>
+                <a:latin typeface="Calibri"/>
+              </a:rPr>
+              <a:t>, 2,126 </a:t>
+            </a:r>
+            <a:r>
+              <a:rPr sz="2000" b="0" dirty="0" err="1">
+                <a:solidFill>
+                  <a:srgbClr val="C9CCD1"/>
+                </a:solidFill>
+                <a:latin typeface="Calibri"/>
+              </a:rPr>
+              <a:t>noticias</a:t>
+            </a:r>
+            <a:r>
+              <a:rPr sz="2000" b="0" dirty="0">
+                <a:solidFill>
+                  <a:srgbClr val="C9CCD1"/>
+                </a:solidFill>
+                <a:latin typeface="Calibri"/>
+              </a:rPr>
+              <a:t>, 115 </a:t>
+            </a:r>
+            <a:r>
+              <a:rPr sz="2000" b="0" dirty="0" err="1">
+                <a:solidFill>
+                  <a:srgbClr val="C9CCD1"/>
+                </a:solidFill>
+                <a:latin typeface="Calibri"/>
+              </a:rPr>
+              <a:t>consultas</a:t>
+            </a:r>
+            <a:endParaRPr sz="2000" b="0" dirty="0">
+              <a:solidFill>
+                <a:srgbClr val="C9CCD1"/>
+              </a:solidFill>
+              <a:latin typeface="Calibri"/>
+            </a:endParaRPr>
+          </a:p>
+        </p:txBody>
+      </p:sp>
+      <p:sp>
+        <p:nvSpPr>
+          <p:cNvPr id="6" name="Materia"/>
           <p:cNvSpPr txBox="1"/>
           <p:nvPr/>
         </p:nvSpPr>
         <p:spPr>
           <a:xfrm>
-            <a:off x="548640" y="5852160"/>
-            <a:ext cx="2636444" cy="548640"/>
+            <a:off x="548640" y="5941369"/>
+            <a:ext cx="4515993" cy="548640"/>
           </a:xfrm>
           <a:prstGeom prst="rect">
             <a:avLst/>
@@ -4585,27 +4418,91 @@
           <a:p>
             <a:pPr algn="l"/>
             <a:r>
-              <a:rPr sz="1200" b="0">
+              <a:rPr sz="1200" b="0" dirty="0" err="1">
                 <a:solidFill>
                   <a:srgbClr val="C9CCD1"/>
                 </a:solidFill>
                 <a:latin typeface="Calibri"/>
               </a:rPr>
-              <a:t>Datisa</a:t>
-            </a:r>
-          </a:p>
-        </p:txBody>
-      </p:sp>
-      <p:sp>
-        <p:nvSpPr>
-          <p:cNvPr id="6" name="Materia"/>
+              <a:t>Minería</a:t>
+            </a:r>
+            <a:r>
+              <a:rPr sz="1200" b="0" dirty="0">
+                <a:solidFill>
+                  <a:srgbClr val="C9CCD1"/>
+                </a:solidFill>
+                <a:latin typeface="Calibri"/>
+              </a:rPr>
+              <a:t> de </a:t>
+            </a:r>
+            <a:r>
+              <a:rPr sz="1200" b="0" dirty="0" err="1">
+                <a:solidFill>
+                  <a:srgbClr val="C9CCD1"/>
+                </a:solidFill>
+                <a:latin typeface="Calibri"/>
+              </a:rPr>
+              <a:t>Textos</a:t>
+            </a:r>
+            <a:r>
+              <a:rPr sz="1200" b="0" dirty="0">
+                <a:solidFill>
+                  <a:srgbClr val="C9CCD1"/>
+                </a:solidFill>
+                <a:latin typeface="Calibri"/>
+              </a:rPr>
+              <a:t> · Ciencia de Datos</a:t>
+            </a:r>
+          </a:p>
+        </p:txBody>
+      </p:sp>
+      <p:pic>
+        <p:nvPicPr>
+          <p:cNvPr id="9" name="Picture 8">
+            <a:extLst>
+              <a:ext uri="{FF2B5EF4-FFF2-40B4-BE49-F238E27FC236}">
+                <a16:creationId xmlns:a16="http://schemas.microsoft.com/office/drawing/2014/main" id="{BCAF7093-F88A-6E3D-D647-01402FC9856B}"/>
+              </a:ext>
+            </a:extLst>
+          </p:cNvPr>
+          <p:cNvPicPr>
+            <a:picLocks noChangeAspect="1"/>
+          </p:cNvPicPr>
+          <p:nvPr/>
+        </p:nvPicPr>
+        <p:blipFill>
+          <a:blip r:embed="rId3"/>
+          <a:srcRect b="15547"/>
+          <a:stretch>
+            <a:fillRect/>
+          </a:stretch>
+        </p:blipFill>
+        <p:spPr>
+          <a:xfrm>
+            <a:off x="5679201" y="0"/>
+            <a:ext cx="6654819" cy="5620215"/>
+          </a:xfrm>
+          <a:prstGeom prst="rect">
+            <a:avLst/>
+          </a:prstGeom>
+        </p:spPr>
+      </p:pic>
+      <p:sp>
+        <p:nvSpPr>
+          <p:cNvPr id="10" name="Materia">
+            <a:extLst>
+              <a:ext uri="{FF2B5EF4-FFF2-40B4-BE49-F238E27FC236}">
+                <a16:creationId xmlns:a16="http://schemas.microsoft.com/office/drawing/2014/main" id="{BAA7ECFE-6A41-AFF4-1A60-56D05E674358}"/>
+              </a:ext>
+            </a:extLst>
+          </p:cNvPr>
           <p:cNvSpPr txBox="1"/>
           <p:nvPr/>
         </p:nvSpPr>
         <p:spPr>
           <a:xfrm>
-            <a:off x="3367964" y="5852160"/>
-            <a:ext cx="4515993" cy="548640"/>
+            <a:off x="548639" y="4626640"/>
+            <a:ext cx="4515993" cy="1225891"/>
           </a:xfrm>
           <a:prstGeom prst="rect">
             <a:avLst/>
@@ -4618,50 +4515,86 @@
           </a:bodyPr>
           <a:lstStyle/>
           <a:p>
+            <a:r>
+              <a:rPr lang="es-419" sz="1200" dirty="0">
+                <a:solidFill>
+                  <a:srgbClr val="C9CCD1"/>
+                </a:solidFill>
+              </a:rPr>
+              <a:t>Carpio Angeles Leo Yahir</a:t>
+            </a:r>
+          </a:p>
+          <a:p>
+            <a:r>
+              <a:rPr lang="es-419" sz="1200" dirty="0">
+                <a:solidFill>
+                  <a:srgbClr val="C9CCD1"/>
+                </a:solidFill>
+              </a:rPr>
+              <a:t>Jaramillo Salmerón Arturo</a:t>
+            </a:r>
+            <a:endParaRPr lang="es-419" sz="1200" b="0" dirty="0">
+              <a:solidFill>
+                <a:srgbClr val="C9CCD1"/>
+              </a:solidFill>
+              <a:latin typeface="Calibri"/>
+            </a:endParaRPr>
+          </a:p>
+          <a:p>
             <a:pPr algn="l"/>
             <a:r>
-              <a:rPr sz="1200" b="0">
+              <a:rPr lang="es-419" sz="1200" b="0" dirty="0">
                 <a:solidFill>
                   <a:srgbClr val="C9CCD1"/>
                 </a:solidFill>
                 <a:latin typeface="Calibri"/>
               </a:rPr>
-              <a:t>Minería de Textos · Ciencia de Datos</a:t>
-            </a:r>
-          </a:p>
-        </p:txBody>
-      </p:sp>
-      <p:sp>
-        <p:nvSpPr>
-          <p:cNvPr id="7" name="Fecha"/>
-          <p:cNvSpPr txBox="1"/>
-          <p:nvPr/>
-        </p:nvSpPr>
-        <p:spPr>
-          <a:xfrm>
-            <a:off x="8066837" y="5852160"/>
-            <a:ext cx="3576218" cy="548640"/>
-          </a:xfrm>
-          <a:prstGeom prst="rect">
-            <a:avLst/>
-          </a:prstGeom>
-          <a:noFill/>
-        </p:spPr>
-        <p:txBody>
-          <a:bodyPr wrap="square" tIns="91440" bIns="91440" anchor="b">
-            <a:noAutofit/>
-          </a:bodyPr>
-          <a:lstStyle/>
-          <a:p>
-            <a:pPr algn="r"/>
-            <a:r>
-              <a:rPr sz="1200" b="0">
+              <a:t>Mera Montiel Gonzalo Sebastián</a:t>
+            </a:r>
+          </a:p>
+          <a:p>
+            <a:pPr algn="l"/>
+            <a:r>
+              <a:rPr lang="es-419" sz="1200" dirty="0">
                 <a:solidFill>
                   <a:srgbClr val="C9CCD1"/>
                 </a:solidFill>
                 <a:latin typeface="Calibri"/>
               </a:rPr>
-              <a:t>11 de octubre de 2026</a:t>
+              <a:t>Moctezuma Ramírez Diego Rafael</a:t>
+            </a:r>
+          </a:p>
+          <a:p>
+            <a:pPr algn="l"/>
+            <a:r>
+              <a:rPr lang="es-419" sz="1200" b="0" dirty="0">
+                <a:solidFill>
+                  <a:srgbClr val="C9CCD1"/>
+                </a:solidFill>
+                <a:latin typeface="Calibri"/>
+              </a:rPr>
+              <a:t>Ramí</a:t>
+            </a:r>
+            <a:r>
+              <a:rPr lang="es-419" sz="1200" dirty="0">
+                <a:solidFill>
+                  <a:srgbClr val="C9CCD1"/>
+                </a:solidFill>
+                <a:latin typeface="Calibri"/>
+              </a:rPr>
+              <a:t>rez Maza Luis Alfredo</a:t>
+            </a:r>
+          </a:p>
+          <a:p>
+            <a:pPr algn="l"/>
+            <a:r>
+              <a:rPr lang="es-419" sz="1200" b="0" dirty="0">
+                <a:solidFill>
+                  <a:srgbClr val="C9CCD1"/>
+                </a:solidFill>
+                <a:latin typeface="Calibri"/>
+              </a:rPr>
+              <a:t>Ruiz Juárez Bruno</a:t>
             </a:r>
           </a:p>
         </p:txBody>
@@ -4675,7 +4608,7 @@
 </file>
 
 <file path=ppt/slides/slide10.xml><?xml version="1.0" encoding="utf-8"?>
-<p:sld xmlns:a="http://schemas.openxmlformats.org/drawingml/2006/main" xmlns:p="http://schemas.openxmlformats.org/presentationml/2006/main" xmlns:r="http://schemas.openxmlformats.org/officeDocument/2006/relationships">
+<p:sld xmlns:a="http://schemas.openxmlformats.org/drawingml/2006/main" xmlns:r="http://schemas.openxmlformats.org/officeDocument/2006/relationships" xmlns:p="http://schemas.openxmlformats.org/presentationml/2006/main">
   <p:cSld>
     <p:bg>
       <p:bgPr>
@@ -4691,7 +4624,14 @@
         <p:cNvGrpSpPr/>
         <p:nvPr/>
       </p:nvGrpSpPr>
-      <p:grpSpPr/>
+      <p:grpSpPr>
+        <a:xfrm>
+          <a:off x="0" y="0"/>
+          <a:ext cx="0" cy="0"/>
+          <a:chOff x="0" y="0"/>
+          <a:chExt cx="0" cy="0"/>
+        </a:xfrm>
+      </p:grpSpPr>
       <p:sp>
         <p:nvSpPr>
           <p:cNvPr id="2" name="Titulo"/>
@@ -4749,9 +4689,9 @@
           </a:bodyPr>
           <a:lstStyle/>
           <a:p>
-            <a:pPr algn="l"/>
-            <a:r>
-              <a:rPr sz="11000" b="1">
+            <a:pPr algn="ctr"/>
+            <a:r>
+              <a:rPr sz="11000" b="1" dirty="0">
                 <a:solidFill>
                   <a:srgbClr val="B05400"/>
                 </a:solidFill>
@@ -4784,7 +4724,7 @@
           </a:bodyPr>
           <a:lstStyle/>
           <a:p>
-            <a:pPr algn="l"/>
+            <a:pPr algn="ctr"/>
             <a:r>
               <a:rPr sz="1200" b="0">
                 <a:solidFill>
@@ -4911,7 +4851,7 @@
 </file>
 
 <file path=ppt/slides/slide11.xml><?xml version="1.0" encoding="utf-8"?>
-<p:sld xmlns:a="http://schemas.openxmlformats.org/drawingml/2006/main" xmlns:p="http://schemas.openxmlformats.org/presentationml/2006/main" xmlns:r="http://schemas.openxmlformats.org/officeDocument/2006/relationships">
+<p:sld xmlns:a="http://schemas.openxmlformats.org/drawingml/2006/main" xmlns:r="http://schemas.openxmlformats.org/officeDocument/2006/relationships" xmlns:p="http://schemas.openxmlformats.org/presentationml/2006/main">
   <p:cSld>
     <p:bg>
       <p:bgPr>
@@ -4927,7 +4867,14 @@
         <p:cNvGrpSpPr/>
         <p:nvPr/>
       </p:nvGrpSpPr>
-      <p:grpSpPr/>
+      <p:grpSpPr>
+        <a:xfrm>
+          <a:off x="0" y="0"/>
+          <a:ext cx="0" cy="0"/>
+          <a:chOff x="0" y="0"/>
+          <a:chExt cx="0" cy="0"/>
+        </a:xfrm>
+      </p:grpSpPr>
       <p:sp>
         <p:nvSpPr>
           <p:cNvPr id="2" name="Titulo"/>
@@ -4972,15 +4919,15 @@
           <p:nvPr/>
         </p:nvPicPr>
         <p:blipFill>
-          <a:blip r:embed="rId2"/>
+          <a:blip r:embed="rId3"/>
           <a:stretch>
             <a:fillRect/>
           </a:stretch>
         </p:blipFill>
         <p:spPr>
           <a:xfrm>
-            <a:off x="548640" y="1783080"/>
-            <a:ext cx="7335317" cy="3667658"/>
+            <a:off x="0" y="1783080"/>
+            <a:ext cx="8321041" cy="4160520"/>
           </a:xfrm>
           <a:prstGeom prst="rect">
             <a:avLst/>
@@ -4995,7 +4942,7 @@
         </p:nvSpPr>
         <p:spPr>
           <a:xfrm>
-            <a:off x="8066837" y="1783080"/>
+            <a:off x="8158277" y="3162300"/>
             <a:ext cx="3576218" cy="1402080"/>
           </a:xfrm>
           <a:prstGeom prst="rect">
@@ -5011,48 +4958,139 @@
           <a:p>
             <a:pPr algn="l"/>
             <a:r>
-              <a:rPr sz="2000" b="0">
+              <a:rPr sz="2000" b="0" dirty="0">
                 <a:solidFill>
                   <a:srgbClr val="1B1F24"/>
                 </a:solidFill>
                 <a:latin typeface="Calibri"/>
               </a:rPr>
-              <a:t>BM25 supera a TF-IDF por 1.49 puntos, pero el IC 95% [-0.15, 3.21] incluye 0: en la práctica empatan.</a:t>
-            </a:r>
-          </a:p>
-        </p:txBody>
-      </p:sp>
-      <p:sp>
-        <p:nvSpPr>
-          <p:cNvPr id="5" name="Pie de fuente"/>
-          <p:cNvSpPr txBox="1"/>
-          <p:nvPr/>
-        </p:nvSpPr>
-        <p:spPr>
-          <a:xfrm>
-            <a:off x="8066837" y="5394960"/>
-            <a:ext cx="3576218" cy="548640"/>
-          </a:xfrm>
-          <a:prstGeom prst="rect">
-            <a:avLst/>
-          </a:prstGeom>
-          <a:noFill/>
-        </p:spPr>
-        <p:txBody>
-          <a:bodyPr wrap="square" tIns="91440" bIns="91440" anchor="b">
-            <a:noAutofit/>
-          </a:bodyPr>
-          <a:lstStyle/>
-          <a:p>
-            <a:pPr algn="l"/>
-            <a:r>
-              <a:rPr sz="1200" b="0">
-                <a:solidFill>
-                  <a:srgbClr val="5C6370"/>
-                </a:solidFill>
-                <a:latin typeface="Calibri"/>
-              </a:rPr>
-              <a:t>Relevante: misma categoría que la consulta. Fuente: reports/metricas.csv</a:t>
+              <a:t>BM25 </a:t>
+            </a:r>
+            <a:r>
+              <a:rPr sz="2000" b="0" dirty="0" err="1">
+                <a:solidFill>
+                  <a:srgbClr val="1B1F24"/>
+                </a:solidFill>
+                <a:latin typeface="Calibri"/>
+              </a:rPr>
+              <a:t>supera</a:t>
+            </a:r>
+            <a:r>
+              <a:rPr sz="2000" b="0" dirty="0">
+                <a:solidFill>
+                  <a:srgbClr val="1B1F24"/>
+                </a:solidFill>
+                <a:latin typeface="Calibri"/>
+              </a:rPr>
+              <a:t> a TF-IDF </a:t>
+            </a:r>
+            <a:r>
+              <a:rPr sz="2000" b="0" dirty="0" err="1">
+                <a:solidFill>
+                  <a:srgbClr val="1B1F24"/>
+                </a:solidFill>
+                <a:latin typeface="Calibri"/>
+              </a:rPr>
+              <a:t>por</a:t>
+            </a:r>
+            <a:r>
+              <a:rPr sz="2000" b="0" dirty="0">
+                <a:solidFill>
+                  <a:srgbClr val="1B1F24"/>
+                </a:solidFill>
+                <a:latin typeface="Calibri"/>
+              </a:rPr>
+              <a:t> 1.49 puntos, </a:t>
+            </a:r>
+            <a:r>
+              <a:rPr sz="2000" b="0" dirty="0" err="1">
+                <a:solidFill>
+                  <a:srgbClr val="1B1F24"/>
+                </a:solidFill>
+                <a:latin typeface="Calibri"/>
+              </a:rPr>
+              <a:t>pero</a:t>
+            </a:r>
+            <a:r>
+              <a:rPr sz="2000" b="0" dirty="0">
+                <a:solidFill>
+                  <a:srgbClr val="1B1F24"/>
+                </a:solidFill>
+                <a:latin typeface="Calibri"/>
+              </a:rPr>
+              <a:t> el IC 95% [-0.15, 3.21] </a:t>
+            </a:r>
+            <a:r>
+              <a:rPr sz="2000" b="0" dirty="0" err="1">
+                <a:solidFill>
+                  <a:srgbClr val="1B1F24"/>
+                </a:solidFill>
+                <a:latin typeface="Calibri"/>
+              </a:rPr>
+              <a:t>incluye</a:t>
+            </a:r>
+            <a:r>
+              <a:rPr sz="2000" b="0" dirty="0">
+                <a:solidFill>
+                  <a:srgbClr val="1B1F24"/>
+                </a:solidFill>
+                <a:latin typeface="Calibri"/>
+              </a:rPr>
+              <a:t> 0: </a:t>
+            </a:r>
+            <a:r>
+              <a:rPr sz="2000" b="0" dirty="0" err="1">
+                <a:solidFill>
+                  <a:srgbClr val="1B1F24"/>
+                </a:solidFill>
+                <a:latin typeface="Calibri"/>
+              </a:rPr>
+              <a:t>en</a:t>
+            </a:r>
+            <a:r>
+              <a:rPr sz="2000" b="0" dirty="0">
+                <a:solidFill>
+                  <a:srgbClr val="1B1F24"/>
+                </a:solidFill>
+                <a:latin typeface="Calibri"/>
+              </a:rPr>
+              <a:t> la </a:t>
+            </a:r>
+            <a:r>
+              <a:rPr sz="2000" b="0" dirty="0" err="1">
+                <a:solidFill>
+                  <a:srgbClr val="1B1F24"/>
+                </a:solidFill>
+                <a:latin typeface="Calibri"/>
+              </a:rPr>
+              <a:t>práctica</a:t>
+            </a:r>
+            <a:r>
+              <a:rPr sz="2000" b="0" dirty="0">
+                <a:solidFill>
+                  <a:srgbClr val="1B1F24"/>
+                </a:solidFill>
+                <a:latin typeface="Calibri"/>
+              </a:rPr>
+              <a:t> </a:t>
+            </a:r>
+            <a:r>
+              <a:rPr sz="2000" b="0" dirty="0" err="1">
+                <a:solidFill>
+                  <a:srgbClr val="1B1F24"/>
+                </a:solidFill>
+                <a:latin typeface="Calibri"/>
+              </a:rPr>
+              <a:t>empatan</a:t>
+            </a:r>
+            <a:r>
+              <a:rPr sz="2000" b="0" dirty="0">
+                <a:solidFill>
+                  <a:srgbClr val="1B1F24"/>
+                </a:solidFill>
+                <a:latin typeface="Calibri"/>
+              </a:rPr>
+              <a:t>.</a:t>
             </a:r>
           </a:p>
         </p:txBody>
@@ -5136,7 +5174,7 @@
 </file>
 
 <file path=ppt/slides/slide12.xml><?xml version="1.0" encoding="utf-8"?>
-<p:sld xmlns:a="http://schemas.openxmlformats.org/drawingml/2006/main" xmlns:p="http://schemas.openxmlformats.org/presentationml/2006/main" xmlns:r="http://schemas.openxmlformats.org/officeDocument/2006/relationships">
+<p:sld xmlns:a="http://schemas.openxmlformats.org/drawingml/2006/main" xmlns:r="http://schemas.openxmlformats.org/officeDocument/2006/relationships" xmlns:p="http://schemas.openxmlformats.org/presentationml/2006/main">
   <p:cSld>
     <p:bg>
       <p:bgPr>
@@ -5152,7 +5190,14 @@
         <p:cNvGrpSpPr/>
         <p:nvPr/>
       </p:nvGrpSpPr>
-      <p:grpSpPr/>
+      <p:grpSpPr>
+        <a:xfrm>
+          <a:off x="0" y="0"/>
+          <a:ext cx="0" cy="0"/>
+          <a:chOff x="0" y="0"/>
+          <a:chExt cx="0" cy="0"/>
+        </a:xfrm>
+      </p:grpSpPr>
       <p:sp>
         <p:nvSpPr>
           <p:cNvPr id="2" name="Titulo"/>
@@ -5197,56 +5242,21 @@
           <p:nvPr/>
         </p:nvPicPr>
         <p:blipFill>
-          <a:blip r:embed="rId2"/>
+          <a:blip r:embed="rId3"/>
           <a:stretch>
             <a:fillRect/>
           </a:stretch>
         </p:blipFill>
         <p:spPr>
           <a:xfrm>
-            <a:off x="548640" y="2240280"/>
-            <a:ext cx="11094415" cy="3209128"/>
+            <a:off x="307282" y="2304496"/>
+            <a:ext cx="11884718" cy="3437728"/>
           </a:xfrm>
           <a:prstGeom prst="rect">
             <a:avLst/>
           </a:prstGeom>
         </p:spPr>
       </p:pic>
-      <p:sp>
-        <p:nvSpPr>
-          <p:cNvPr id="4" name="Pie de fuente"/>
-          <p:cNvSpPr txBox="1"/>
-          <p:nvPr/>
-        </p:nvSpPr>
-        <p:spPr>
-          <a:xfrm>
-            <a:off x="548640" y="5577840"/>
-            <a:ext cx="11094415" cy="365760"/>
-          </a:xfrm>
-          <a:prstGeom prst="rect">
-            <a:avLst/>
-          </a:prstGeom>
-          <a:noFill/>
-        </p:spPr>
-        <p:txBody>
-          <a:bodyPr wrap="square" tIns="91440" bIns="91440" anchor="t">
-            <a:noAutofit/>
-          </a:bodyPr>
-          <a:lstStyle/>
-          <a:p>
-            <a:pPr algn="l"/>
-            <a:r>
-              <a:rPr sz="1200" b="0">
-                <a:solidFill>
-                  <a:srgbClr val="5C6370"/>
-                </a:solidFill>
-                <a:latin typeface="Calibri"/>
-              </a:rPr>
-              <a:t>MAP@10 por tipo de consulta (15 manuales, 100 automáticas). Relevante: misma categoría que la consulta.</a:t>
-            </a:r>
-          </a:p>
-        </p:txBody>
-      </p:sp>
       <p:sp>
         <p:nvSpPr>
           <p:cNvPr id="5" name="Pie proyecto"/>
@@ -5326,7 +5336,7 @@
 </file>
 
 <file path=ppt/slides/slide13.xml><?xml version="1.0" encoding="utf-8"?>
-<p:sld xmlns:a="http://schemas.openxmlformats.org/drawingml/2006/main" xmlns:p="http://schemas.openxmlformats.org/presentationml/2006/main" xmlns:r="http://schemas.openxmlformats.org/officeDocument/2006/relationships">
+<p:sld xmlns:a="http://schemas.openxmlformats.org/drawingml/2006/main" xmlns:r="http://schemas.openxmlformats.org/officeDocument/2006/relationships" xmlns:p="http://schemas.openxmlformats.org/presentationml/2006/main">
   <p:cSld>
     <p:bg>
       <p:bgPr>
@@ -5342,7 +5352,14 @@
         <p:cNvGrpSpPr/>
         <p:nvPr/>
       </p:nvGrpSpPr>
-      <p:grpSpPr/>
+      <p:grpSpPr>
+        <a:xfrm>
+          <a:off x="0" y="0"/>
+          <a:ext cx="0" cy="0"/>
+          <a:chOff x="0" y="0"/>
+          <a:chExt cx="0" cy="0"/>
+        </a:xfrm>
+      </p:grpSpPr>
       <p:sp>
         <p:nvSpPr>
           <p:cNvPr id="2" name="Titulo"/>
@@ -5408,6 +5425,7 @@
           <a:lstStyle/>
           <a:p>
             <a:pPr algn="ctr"/>
+            <a:endParaRPr/>
           </a:p>
         </p:txBody>
       </p:sp>
@@ -5476,6 +5494,7 @@
           <a:lstStyle/>
           <a:p>
             <a:pPr algn="ctr"/>
+            <a:endParaRPr/>
           </a:p>
         </p:txBody>
       </p:sp>
@@ -5540,6 +5559,7 @@
           <a:lstStyle/>
           <a:p>
             <a:pPr algn="ctr"/>
+            <a:endParaRPr/>
           </a:p>
         </p:txBody>
       </p:sp>
@@ -5643,6 +5663,7 @@
           <a:lstStyle/>
           <a:p>
             <a:pPr algn="ctr"/>
+            <a:endParaRPr/>
           </a:p>
         </p:txBody>
       </p:sp>
@@ -5707,6 +5728,7 @@
           <a:lstStyle/>
           <a:p>
             <a:pPr algn="ctr"/>
+            <a:endParaRPr/>
           </a:p>
         </p:txBody>
       </p:sp>
@@ -5810,6 +5832,7 @@
           <a:lstStyle/>
           <a:p>
             <a:pPr algn="ctr"/>
+            <a:endParaRPr/>
           </a:p>
         </p:txBody>
       </p:sp>
@@ -5874,6 +5897,7 @@
           <a:lstStyle/>
           <a:p>
             <a:pPr algn="ctr"/>
+            <a:endParaRPr/>
           </a:p>
         </p:txBody>
       </p:sp>
@@ -6026,7 +6050,7 @@
 </file>
 
 <file path=ppt/slides/slide14.xml><?xml version="1.0" encoding="utf-8"?>
-<p:sld xmlns:a="http://schemas.openxmlformats.org/drawingml/2006/main" xmlns:p="http://schemas.openxmlformats.org/presentationml/2006/main" xmlns:r="http://schemas.openxmlformats.org/officeDocument/2006/relationships">
+<p:sld xmlns:a="http://schemas.openxmlformats.org/drawingml/2006/main" xmlns:r="http://schemas.openxmlformats.org/officeDocument/2006/relationships" xmlns:p="http://schemas.openxmlformats.org/presentationml/2006/main">
   <p:cSld>
     <p:bg>
       <p:bgPr>
@@ -6042,7 +6066,14 @@
         <p:cNvGrpSpPr/>
         <p:nvPr/>
       </p:nvGrpSpPr>
-      <p:grpSpPr/>
+      <p:grpSpPr>
+        <a:xfrm>
+          <a:off x="0" y="0"/>
+          <a:ext cx="0" cy="0"/>
+          <a:chOff x="0" y="0"/>
+          <a:chExt cx="0" cy="0"/>
+        </a:xfrm>
+      </p:grpSpPr>
       <p:sp>
         <p:nvSpPr>
           <p:cNvPr id="2" name="Conclusion"/>
@@ -6157,7 +6188,7 @@
 </file>
 
 <file path=ppt/slides/slide2.xml><?xml version="1.0" encoding="utf-8"?>
-<p:sld xmlns:a="http://schemas.openxmlformats.org/drawingml/2006/main" xmlns:p="http://schemas.openxmlformats.org/presentationml/2006/main" xmlns:r="http://schemas.openxmlformats.org/officeDocument/2006/relationships">
+<p:sld xmlns:a="http://schemas.openxmlformats.org/drawingml/2006/main" xmlns:r="http://schemas.openxmlformats.org/officeDocument/2006/relationships" xmlns:p="http://schemas.openxmlformats.org/presentationml/2006/main">
   <p:cSld>
     <p:bg>
       <p:bgPr>
@@ -6173,7 +6204,14 @@
         <p:cNvGrpSpPr/>
         <p:nvPr/>
       </p:nvGrpSpPr>
-      <p:grpSpPr/>
+      <p:grpSpPr>
+        <a:xfrm>
+          <a:off x="0" y="0"/>
+          <a:ext cx="0" cy="0"/>
+          <a:chOff x="0" y="0"/>
+          <a:chExt cx="0" cy="0"/>
+        </a:xfrm>
+      </p:grpSpPr>
       <p:sp>
         <p:nvSpPr>
           <p:cNvPr id="2" name="Titulo"/>
@@ -6231,9 +6269,9 @@
           </a:bodyPr>
           <a:lstStyle/>
           <a:p>
-            <a:pPr algn="l"/>
-            <a:r>
-              <a:rPr sz="11000" b="1">
+            <a:pPr algn="ctr"/>
+            <a:r>
+              <a:rPr sz="11000" b="1" dirty="0">
                 <a:solidFill>
                   <a:srgbClr val="B05400"/>
                 </a:solidFill>
@@ -6266,15 +6304,42 @@
           </a:bodyPr>
           <a:lstStyle/>
           <a:p>
-            <a:pPr algn="l"/>
-            <a:r>
-              <a:rPr sz="1200" b="0">
+            <a:pPr algn="ctr"/>
+            <a:r>
+              <a:rPr lang="en-US" sz="1200" b="0" dirty="0">
                 <a:solidFill>
                   <a:srgbClr val="5C6370"/>
                 </a:solidFill>
                 <a:latin typeface="Calibri"/>
               </a:rPr>
-              <a:t>noticias de la BBC</a:t>
+              <a:t>N</a:t>
+            </a:r>
+            <a:r>
+              <a:rPr sz="1200" b="0" dirty="0">
+                <a:solidFill>
+                  <a:srgbClr val="5C6370"/>
+                </a:solidFill>
+                <a:latin typeface="Calibri"/>
+              </a:rPr>
+              <a:t>oticias</a:t>
+            </a:r>
+            <a:r>
+              <a:rPr lang="es-419" sz="1200" b="0" dirty="0">
+                <a:solidFill>
+                  <a:srgbClr val="5C6370"/>
+                </a:solidFill>
+                <a:latin typeface="Calibri"/>
+              </a:rPr>
+              <a:t> </a:t>
+            </a:r>
+            <a:r>
+              <a:rPr sz="1200" b="0" dirty="0">
+                <a:solidFill>
+                  <a:srgbClr val="5C6370"/>
+                </a:solidFill>
+                <a:latin typeface="Calibri"/>
+              </a:rPr>
+              <a:t>de la BBC</a:t>
             </a:r>
           </a:p>
         </p:txBody>
@@ -6393,7 +6458,7 @@
 </file>
 
 <file path=ppt/slides/slide3.xml><?xml version="1.0" encoding="utf-8"?>
-<p:sld xmlns:a="http://schemas.openxmlformats.org/drawingml/2006/main" xmlns:p="http://schemas.openxmlformats.org/presentationml/2006/main" xmlns:r="http://schemas.openxmlformats.org/officeDocument/2006/relationships">
+<p:sld xmlns:a="http://schemas.openxmlformats.org/drawingml/2006/main" xmlns:r="http://schemas.openxmlformats.org/officeDocument/2006/relationships" xmlns:p="http://schemas.openxmlformats.org/presentationml/2006/main">
   <p:cSld>
     <p:bg>
       <p:bgPr>
@@ -6409,7 +6474,14 @@
         <p:cNvGrpSpPr/>
         <p:nvPr/>
       </p:nvGrpSpPr>
-      <p:grpSpPr/>
+      <p:grpSpPr>
+        <a:xfrm>
+          <a:off x="0" y="0"/>
+          <a:ext cx="0" cy="0"/>
+          <a:chOff x="0" y="0"/>
+          <a:chExt cx="0" cy="0"/>
+        </a:xfrm>
+      </p:grpSpPr>
       <p:sp>
         <p:nvSpPr>
           <p:cNvPr id="2" name="Titulo"/>
@@ -6454,15 +6526,15 @@
           <p:nvPr/>
         </p:nvPicPr>
         <p:blipFill>
-          <a:blip r:embed="rId2"/>
+          <a:blip r:embed="rId3"/>
           <a:stretch>
             <a:fillRect/>
           </a:stretch>
         </p:blipFill>
         <p:spPr>
           <a:xfrm>
-            <a:off x="548640" y="1325880"/>
-            <a:ext cx="7335317" cy="3667658"/>
+            <a:off x="221908" y="1674891"/>
+            <a:ext cx="7805899" cy="3902949"/>
           </a:xfrm>
           <a:prstGeom prst="rect">
             <a:avLst/>
@@ -6477,7 +6549,7 @@
         </p:nvSpPr>
         <p:spPr>
           <a:xfrm>
-            <a:off x="8066837" y="1325880"/>
+            <a:off x="8312164" y="3221587"/>
             <a:ext cx="3576218" cy="1097280"/>
           </a:xfrm>
           <a:prstGeom prst="rect">
@@ -6493,48 +6565,130 @@
           <a:p>
             <a:pPr algn="l"/>
             <a:r>
-              <a:rPr sz="2000" b="0">
+              <a:rPr sz="2000" b="0" dirty="0" err="1">
                 <a:solidFill>
                   <a:srgbClr val="1B1F24"/>
                 </a:solidFill>
                 <a:latin typeface="Calibri"/>
               </a:rPr>
-              <a:t>Ninguna categoría domina: cada una tiene entre 386 y 511 noticias.</a:t>
-            </a:r>
-          </a:p>
-        </p:txBody>
-      </p:sp>
-      <p:sp>
-        <p:nvSpPr>
-          <p:cNvPr id="5" name="Pie de fuente"/>
-          <p:cNvSpPr txBox="1"/>
-          <p:nvPr/>
-        </p:nvSpPr>
-        <p:spPr>
-          <a:xfrm>
-            <a:off x="8066837" y="5577840"/>
-            <a:ext cx="3576218" cy="365760"/>
-          </a:xfrm>
-          <a:prstGeom prst="rect">
-            <a:avLst/>
-          </a:prstGeom>
-          <a:noFill/>
-        </p:spPr>
-        <p:txBody>
-          <a:bodyPr wrap="square" tIns="91440" bIns="91440" anchor="b">
-            <a:noAutofit/>
-          </a:bodyPr>
-          <a:lstStyle/>
-          <a:p>
-            <a:pPr algn="l"/>
-            <a:r>
-              <a:rPr sz="1200" b="0">
-                <a:solidFill>
-                  <a:srgbClr val="5C6370"/>
-                </a:solidFill>
-                <a:latin typeface="Calibri"/>
-              </a:rPr>
-              <a:t>Fuente: reports/eda_raw.json</a:t>
+              <a:t>Ninguna</a:t>
+            </a:r>
+            <a:r>
+              <a:rPr sz="2000" b="0" dirty="0">
+                <a:solidFill>
+                  <a:srgbClr val="1B1F24"/>
+                </a:solidFill>
+                <a:latin typeface="Calibri"/>
+              </a:rPr>
+              <a:t> </a:t>
+            </a:r>
+            <a:r>
+              <a:rPr sz="2000" b="0" dirty="0" err="1">
+                <a:solidFill>
+                  <a:srgbClr val="1B1F24"/>
+                </a:solidFill>
+                <a:latin typeface="Calibri"/>
+              </a:rPr>
+              <a:t>categoría</a:t>
+            </a:r>
+            <a:r>
+              <a:rPr sz="2000" b="0" dirty="0">
+                <a:solidFill>
+                  <a:srgbClr val="1B1F24"/>
+                </a:solidFill>
+                <a:latin typeface="Calibri"/>
+              </a:rPr>
+              <a:t> </a:t>
+            </a:r>
+            <a:r>
+              <a:rPr sz="2000" b="0" dirty="0" err="1">
+                <a:solidFill>
+                  <a:srgbClr val="1B1F24"/>
+                </a:solidFill>
+                <a:latin typeface="Calibri"/>
+              </a:rPr>
+              <a:t>domina</a:t>
+            </a:r>
+            <a:r>
+              <a:rPr sz="2000" b="0" dirty="0">
+                <a:solidFill>
+                  <a:srgbClr val="1B1F24"/>
+                </a:solidFill>
+                <a:latin typeface="Calibri"/>
+              </a:rPr>
+              <a:t>: </a:t>
+            </a:r>
+            <a:r>
+              <a:rPr sz="2000" b="0" dirty="0" err="1">
+                <a:solidFill>
+                  <a:srgbClr val="1B1F24"/>
+                </a:solidFill>
+                <a:latin typeface="Calibri"/>
+              </a:rPr>
+              <a:t>cada</a:t>
+            </a:r>
+            <a:r>
+              <a:rPr sz="2000" b="0" dirty="0">
+                <a:solidFill>
+                  <a:srgbClr val="1B1F24"/>
+                </a:solidFill>
+                <a:latin typeface="Calibri"/>
+              </a:rPr>
+              <a:t> </a:t>
+            </a:r>
+            <a:r>
+              <a:rPr sz="2000" b="0" dirty="0" err="1">
+                <a:solidFill>
+                  <a:srgbClr val="1B1F24"/>
+                </a:solidFill>
+                <a:latin typeface="Calibri"/>
+              </a:rPr>
+              <a:t>una</a:t>
+            </a:r>
+            <a:r>
+              <a:rPr sz="2000" b="0" dirty="0">
+                <a:solidFill>
+                  <a:srgbClr val="1B1F24"/>
+                </a:solidFill>
+                <a:latin typeface="Calibri"/>
+              </a:rPr>
+              <a:t> </a:t>
+            </a:r>
+            <a:r>
+              <a:rPr sz="2000" b="0" dirty="0" err="1">
+                <a:solidFill>
+                  <a:srgbClr val="1B1F24"/>
+                </a:solidFill>
+                <a:latin typeface="Calibri"/>
+              </a:rPr>
+              <a:t>tiene</a:t>
+            </a:r>
+            <a:r>
+              <a:rPr sz="2000" b="0" dirty="0">
+                <a:solidFill>
+                  <a:srgbClr val="1B1F24"/>
+                </a:solidFill>
+                <a:latin typeface="Calibri"/>
+              </a:rPr>
+              <a:t> entre 386 y 511 </a:t>
+            </a:r>
+            <a:r>
+              <a:rPr sz="2000" b="0" dirty="0" err="1">
+                <a:solidFill>
+                  <a:srgbClr val="1B1F24"/>
+                </a:solidFill>
+                <a:latin typeface="Calibri"/>
+              </a:rPr>
+              <a:t>noticias</a:t>
+            </a:r>
+            <a:r>
+              <a:rPr sz="2000" b="0" dirty="0">
+                <a:solidFill>
+                  <a:srgbClr val="1B1F24"/>
+                </a:solidFill>
+                <a:latin typeface="Calibri"/>
+              </a:rPr>
+              <a:t>.</a:t>
             </a:r>
           </a:p>
         </p:txBody>
@@ -6618,7 +6772,7 @@
 </file>
 
 <file path=ppt/slides/slide4.xml><?xml version="1.0" encoding="utf-8"?>
-<p:sld xmlns:a="http://schemas.openxmlformats.org/drawingml/2006/main" xmlns:p="http://schemas.openxmlformats.org/presentationml/2006/main" xmlns:r="http://schemas.openxmlformats.org/officeDocument/2006/relationships">
+<p:sld xmlns:a="http://schemas.openxmlformats.org/drawingml/2006/main" xmlns:r="http://schemas.openxmlformats.org/officeDocument/2006/relationships" xmlns:p="http://schemas.openxmlformats.org/presentationml/2006/main">
   <p:cSld>
     <p:bg>
       <p:bgPr>
@@ -6634,7 +6788,14 @@
         <p:cNvGrpSpPr/>
         <p:nvPr/>
       </p:nvGrpSpPr>
-      <p:grpSpPr/>
+      <p:grpSpPr>
+        <a:xfrm>
+          <a:off x="0" y="0"/>
+          <a:ext cx="0" cy="0"/>
+          <a:chOff x="0" y="0"/>
+          <a:chExt cx="0" cy="0"/>
+        </a:xfrm>
+      </p:grpSpPr>
       <p:sp>
         <p:nvSpPr>
           <p:cNvPr id="2" name="Titulo"/>
@@ -6692,9 +6853,9 @@
           </a:bodyPr>
           <a:lstStyle/>
           <a:p>
-            <a:pPr algn="l"/>
-            <a:r>
-              <a:rPr sz="11000" b="1">
+            <a:pPr algn="ctr"/>
+            <a:r>
+              <a:rPr sz="11000" b="1" dirty="0">
                 <a:solidFill>
                   <a:srgbClr val="B05400"/>
                 </a:solidFill>
@@ -6727,7 +6888,7 @@
           </a:bodyPr>
           <a:lstStyle/>
           <a:p>
-            <a:pPr algn="l"/>
+            <a:pPr algn="ctr"/>
             <a:r>
               <a:rPr sz="1200" b="0">
                 <a:solidFill>
@@ -6854,7 +7015,7 @@
 </file>
 
 <file path=ppt/slides/slide5.xml><?xml version="1.0" encoding="utf-8"?>
-<p:sld xmlns:a="http://schemas.openxmlformats.org/drawingml/2006/main" xmlns:p="http://schemas.openxmlformats.org/presentationml/2006/main" xmlns:r="http://schemas.openxmlformats.org/officeDocument/2006/relationships">
+<p:sld xmlns:a="http://schemas.openxmlformats.org/drawingml/2006/main" xmlns:r="http://schemas.openxmlformats.org/officeDocument/2006/relationships" xmlns:p="http://schemas.openxmlformats.org/presentationml/2006/main">
   <p:cSld>
     <p:bg>
       <p:bgPr>
@@ -6870,7 +7031,14 @@
         <p:cNvGrpSpPr/>
         <p:nvPr/>
       </p:nvGrpSpPr>
-      <p:grpSpPr/>
+      <p:grpSpPr>
+        <a:xfrm>
+          <a:off x="0" y="0"/>
+          <a:ext cx="0" cy="0"/>
+          <a:chOff x="0" y="0"/>
+          <a:chExt cx="0" cy="0"/>
+        </a:xfrm>
+      </p:grpSpPr>
       <p:sp>
         <p:nvSpPr>
           <p:cNvPr id="2" name="Titulo"/>
@@ -6915,15 +7083,15 @@
           <p:nvPr/>
         </p:nvPicPr>
         <p:blipFill>
-          <a:blip r:embed="rId2"/>
+          <a:blip r:embed="rId3"/>
           <a:stretch>
             <a:fillRect/>
           </a:stretch>
         </p:blipFill>
         <p:spPr>
           <a:xfrm>
-            <a:off x="548640" y="1783080"/>
-            <a:ext cx="7335317" cy="3667658"/>
+            <a:off x="182879" y="1921355"/>
+            <a:ext cx="7883957" cy="3941978"/>
           </a:xfrm>
           <a:prstGeom prst="rect">
             <a:avLst/>
@@ -6938,8 +7106,8 @@
         </p:nvSpPr>
         <p:spPr>
           <a:xfrm>
-            <a:off x="8066837" y="1783080"/>
-            <a:ext cx="3576218" cy="1706880"/>
+            <a:off x="7761249" y="2829808"/>
+            <a:ext cx="4247872" cy="1706880"/>
           </a:xfrm>
           <a:prstGeom prst="rect">
             <a:avLst/>
@@ -6954,48 +7122,157 @@
           <a:p>
             <a:pPr algn="l"/>
             <a:r>
-              <a:rPr sz="2000" b="0">
+              <a:rPr sz="2000" b="0" dirty="0">
                 <a:solidFill>
                   <a:srgbClr val="1B1F24"/>
                 </a:solidFill>
                 <a:latin typeface="Calibri"/>
               </a:rPr>
-              <a:t>El exponente es bajo porque se quitaron las stopwords. El ajuste cubre los rangos 1 a 1,000 (R² = 0.9469).</a:t>
-            </a:r>
-          </a:p>
-        </p:txBody>
-      </p:sp>
-      <p:sp>
-        <p:nvSpPr>
-          <p:cNvPr id="5" name="Pie de fuente"/>
-          <p:cNvSpPr txBox="1"/>
-          <p:nvPr/>
-        </p:nvSpPr>
-        <p:spPr>
-          <a:xfrm>
-            <a:off x="8066837" y="5577840"/>
-            <a:ext cx="3576218" cy="365760"/>
-          </a:xfrm>
-          <a:prstGeom prst="rect">
-            <a:avLst/>
-          </a:prstGeom>
-          <a:noFill/>
-        </p:spPr>
-        <p:txBody>
-          <a:bodyPr wrap="square" tIns="91440" bIns="91440" anchor="b">
-            <a:noAutofit/>
-          </a:bodyPr>
-          <a:lstStyle/>
-          <a:p>
-            <a:pPr algn="l"/>
-            <a:r>
-              <a:rPr sz="1200" b="0">
-                <a:solidFill>
-                  <a:srgbClr val="5C6370"/>
-                </a:solidFill>
-                <a:latin typeface="Calibri"/>
-              </a:rPr>
-              <a:t>Fuente: reports/eda_corpus.json</a:t>
+              <a:t>El </a:t>
+            </a:r>
+            <a:r>
+              <a:rPr sz="2000" b="0" dirty="0" err="1">
+                <a:solidFill>
+                  <a:srgbClr val="1B1F24"/>
+                </a:solidFill>
+                <a:latin typeface="Calibri"/>
+              </a:rPr>
+              <a:t>exponente</a:t>
+            </a:r>
+            <a:r>
+              <a:rPr sz="2000" b="0" dirty="0">
+                <a:solidFill>
+                  <a:srgbClr val="1B1F24"/>
+                </a:solidFill>
+                <a:latin typeface="Calibri"/>
+              </a:rPr>
+              <a:t> es bajo </a:t>
+            </a:r>
+            <a:r>
+              <a:rPr sz="2000" b="0" dirty="0" err="1">
+                <a:solidFill>
+                  <a:srgbClr val="1B1F24"/>
+                </a:solidFill>
+                <a:latin typeface="Calibri"/>
+              </a:rPr>
+              <a:t>porque</a:t>
+            </a:r>
+            <a:r>
+              <a:rPr sz="2000" b="0" dirty="0">
+                <a:solidFill>
+                  <a:srgbClr val="1B1F24"/>
+                </a:solidFill>
+                <a:latin typeface="Calibri"/>
+              </a:rPr>
+              <a:t> se </a:t>
+            </a:r>
+            <a:r>
+              <a:rPr sz="2000" b="0" dirty="0" err="1">
+                <a:solidFill>
+                  <a:srgbClr val="1B1F24"/>
+                </a:solidFill>
+                <a:latin typeface="Calibri"/>
+              </a:rPr>
+              <a:t>quitaron</a:t>
+            </a:r>
+            <a:r>
+              <a:rPr sz="2000" b="0" dirty="0">
+                <a:solidFill>
+                  <a:srgbClr val="1B1F24"/>
+                </a:solidFill>
+                <a:latin typeface="Calibri"/>
+              </a:rPr>
+              <a:t> las </a:t>
+            </a:r>
+            <a:r>
+              <a:rPr sz="2000" b="0" dirty="0" err="1">
+                <a:solidFill>
+                  <a:srgbClr val="1B1F24"/>
+                </a:solidFill>
+                <a:latin typeface="Calibri"/>
+              </a:rPr>
+              <a:t>stopwords</a:t>
+            </a:r>
+            <a:r>
+              <a:rPr sz="2000" b="0" dirty="0">
+                <a:solidFill>
+                  <a:srgbClr val="1B1F24"/>
+                </a:solidFill>
+                <a:latin typeface="Calibri"/>
+              </a:rPr>
+              <a:t>. El </a:t>
+            </a:r>
+            <a:r>
+              <a:rPr sz="2000" b="0" dirty="0" err="1">
+                <a:solidFill>
+                  <a:srgbClr val="1B1F24"/>
+                </a:solidFill>
+                <a:latin typeface="Calibri"/>
+              </a:rPr>
+              <a:t>ajuste</a:t>
+            </a:r>
+            <a:r>
+              <a:rPr sz="2000" b="0" dirty="0">
+                <a:solidFill>
+                  <a:srgbClr val="1B1F24"/>
+                </a:solidFill>
+                <a:latin typeface="Calibri"/>
+              </a:rPr>
+              <a:t> </a:t>
+            </a:r>
+            <a:r>
+              <a:rPr sz="2000" b="0" dirty="0" err="1">
+                <a:solidFill>
+                  <a:srgbClr val="1B1F24"/>
+                </a:solidFill>
+                <a:latin typeface="Calibri"/>
+              </a:rPr>
+              <a:t>cubre</a:t>
+            </a:r>
+            <a:r>
+              <a:rPr sz="2000" b="0" dirty="0">
+                <a:solidFill>
+                  <a:srgbClr val="1B1F24"/>
+                </a:solidFill>
+                <a:latin typeface="Calibri"/>
+              </a:rPr>
+              <a:t> </a:t>
+            </a:r>
+            <a:r>
+              <a:rPr sz="2000" b="0" dirty="0" err="1">
+                <a:solidFill>
+                  <a:srgbClr val="1B1F24"/>
+                </a:solidFill>
+                <a:latin typeface="Calibri"/>
+              </a:rPr>
+              <a:t>los</a:t>
+            </a:r>
+            <a:r>
+              <a:rPr sz="2000" b="0" dirty="0">
+                <a:solidFill>
+                  <a:srgbClr val="1B1F24"/>
+                </a:solidFill>
+                <a:latin typeface="Calibri"/>
+              </a:rPr>
+              <a:t> </a:t>
+            </a:r>
+            <a:r>
+              <a:rPr sz="2000" b="0" dirty="0" err="1">
+                <a:solidFill>
+                  <a:srgbClr val="1B1F24"/>
+                </a:solidFill>
+                <a:latin typeface="Calibri"/>
+              </a:rPr>
+              <a:t>rangos</a:t>
+            </a:r>
+            <a:r>
+              <a:rPr sz="2000" b="0" dirty="0">
+                <a:solidFill>
+                  <a:srgbClr val="1B1F24"/>
+                </a:solidFill>
+                <a:latin typeface="Calibri"/>
+              </a:rPr>
+              <a:t> 1 a 1,000 (R² = 0.9469).</a:t>
             </a:r>
           </a:p>
         </p:txBody>
@@ -7079,7 +7356,7 @@
 </file>
 
 <file path=ppt/slides/slide6.xml><?xml version="1.0" encoding="utf-8"?>
-<p:sld xmlns:a="http://schemas.openxmlformats.org/drawingml/2006/main" xmlns:p="http://schemas.openxmlformats.org/presentationml/2006/main" xmlns:r="http://schemas.openxmlformats.org/officeDocument/2006/relationships">
+<p:sld xmlns:a="http://schemas.openxmlformats.org/drawingml/2006/main" xmlns:r="http://schemas.openxmlformats.org/officeDocument/2006/relationships" xmlns:p="http://schemas.openxmlformats.org/presentationml/2006/main">
   <p:cSld>
     <p:bg>
       <p:bgPr>
@@ -7095,7 +7372,14 @@
         <p:cNvGrpSpPr/>
         <p:nvPr/>
       </p:nvGrpSpPr>
-      <p:grpSpPr/>
+      <p:grpSpPr>
+        <a:xfrm>
+          <a:off x="0" y="0"/>
+          <a:ext cx="0" cy="0"/>
+          <a:chOff x="0" y="0"/>
+          <a:chExt cx="0" cy="0"/>
+        </a:xfrm>
+      </p:grpSpPr>
       <p:sp>
         <p:nvSpPr>
           <p:cNvPr id="2" name="Titulo"/>
@@ -7140,15 +7424,15 @@
           <p:nvPr/>
         </p:nvPicPr>
         <p:blipFill>
-          <a:blip r:embed="rId2"/>
+          <a:blip r:embed="rId3"/>
           <a:stretch>
             <a:fillRect/>
           </a:stretch>
         </p:blipFill>
         <p:spPr>
           <a:xfrm>
-            <a:off x="548640" y="1325880"/>
-            <a:ext cx="7335317" cy="3667658"/>
+            <a:off x="187385" y="1689410"/>
+            <a:ext cx="8142621" cy="4071310"/>
           </a:xfrm>
           <a:prstGeom prst="rect">
             <a:avLst/>
@@ -7163,7 +7447,7 @@
         </p:nvSpPr>
         <p:spPr>
           <a:xfrm>
-            <a:off x="8066837" y="1325880"/>
+            <a:off x="8428397" y="3429000"/>
             <a:ext cx="3576218" cy="1402080"/>
           </a:xfrm>
           <a:prstGeom prst="rect">
@@ -7179,48 +7463,103 @@
           <a:p>
             <a:pPr algn="l"/>
             <a:r>
-              <a:rPr sz="2000" b="0">
+              <a:rPr sz="2000" b="0" dirty="0">
                 <a:solidFill>
                   <a:srgbClr val="1B1F24"/>
                 </a:solidFill>
                 <a:latin typeface="Calibri"/>
               </a:rPr>
-              <a:t>Hay 24,971 palabras distintas en 385,689 tokens, y 39.97% aparece una sola vez.</a:t>
-            </a:r>
-          </a:p>
-        </p:txBody>
-      </p:sp>
-      <p:sp>
-        <p:nvSpPr>
-          <p:cNvPr id="5" name="Pie de fuente"/>
-          <p:cNvSpPr txBox="1"/>
-          <p:nvPr/>
-        </p:nvSpPr>
-        <p:spPr>
-          <a:xfrm>
-            <a:off x="8066837" y="5577840"/>
-            <a:ext cx="3576218" cy="365760"/>
-          </a:xfrm>
-          <a:prstGeom prst="rect">
-            <a:avLst/>
-          </a:prstGeom>
-          <a:noFill/>
-        </p:spPr>
-        <p:txBody>
-          <a:bodyPr wrap="square" tIns="91440" bIns="91440" anchor="b">
-            <a:noAutofit/>
-          </a:bodyPr>
-          <a:lstStyle/>
-          <a:p>
-            <a:pPr algn="l"/>
-            <a:r>
-              <a:rPr sz="1200" b="0">
-                <a:solidFill>
-                  <a:srgbClr val="5C6370"/>
-                </a:solidFill>
-                <a:latin typeface="Calibri"/>
-              </a:rPr>
-              <a:t>Fuente: reports/eda_corpus.json</a:t>
+              <a:t>Hay 24,971 palabras </a:t>
+            </a:r>
+            <a:r>
+              <a:rPr sz="2000" b="0" dirty="0" err="1">
+                <a:solidFill>
+                  <a:srgbClr val="1B1F24"/>
+                </a:solidFill>
+                <a:latin typeface="Calibri"/>
+              </a:rPr>
+              <a:t>distintas</a:t>
+            </a:r>
+            <a:r>
+              <a:rPr sz="2000" b="0" dirty="0">
+                <a:solidFill>
+                  <a:srgbClr val="1B1F24"/>
+                </a:solidFill>
+                <a:latin typeface="Calibri"/>
+              </a:rPr>
+              <a:t> </a:t>
+            </a:r>
+            <a:r>
+              <a:rPr sz="2000" b="0" dirty="0" err="1">
+                <a:solidFill>
+                  <a:srgbClr val="1B1F24"/>
+                </a:solidFill>
+                <a:latin typeface="Calibri"/>
+              </a:rPr>
+              <a:t>en</a:t>
+            </a:r>
+            <a:r>
+              <a:rPr sz="2000" b="0" dirty="0">
+                <a:solidFill>
+                  <a:srgbClr val="1B1F24"/>
+                </a:solidFill>
+                <a:latin typeface="Calibri"/>
+              </a:rPr>
+              <a:t> 385,689 tokens, y 39.97% </a:t>
+            </a:r>
+            <a:r>
+              <a:rPr sz="2000" b="0" dirty="0" err="1">
+                <a:solidFill>
+                  <a:srgbClr val="1B1F24"/>
+                </a:solidFill>
+                <a:latin typeface="Calibri"/>
+              </a:rPr>
+              <a:t>aparece</a:t>
+            </a:r>
+            <a:r>
+              <a:rPr sz="2000" b="0" dirty="0">
+                <a:solidFill>
+                  <a:srgbClr val="1B1F24"/>
+                </a:solidFill>
+                <a:latin typeface="Calibri"/>
+              </a:rPr>
+              <a:t> </a:t>
+            </a:r>
+            <a:r>
+              <a:rPr sz="2000" b="0" dirty="0" err="1">
+                <a:solidFill>
+                  <a:srgbClr val="1B1F24"/>
+                </a:solidFill>
+                <a:latin typeface="Calibri"/>
+              </a:rPr>
+              <a:t>una</a:t>
+            </a:r>
+            <a:r>
+              <a:rPr sz="2000" b="0" dirty="0">
+                <a:solidFill>
+                  <a:srgbClr val="1B1F24"/>
+                </a:solidFill>
+                <a:latin typeface="Calibri"/>
+              </a:rPr>
+              <a:t> sola </a:t>
+            </a:r>
+            <a:r>
+              <a:rPr sz="2000" b="0" dirty="0" err="1">
+                <a:solidFill>
+                  <a:srgbClr val="1B1F24"/>
+                </a:solidFill>
+                <a:latin typeface="Calibri"/>
+              </a:rPr>
+              <a:t>vez</a:t>
+            </a:r>
+            <a:r>
+              <a:rPr sz="2000" b="0" dirty="0">
+                <a:solidFill>
+                  <a:srgbClr val="1B1F24"/>
+                </a:solidFill>
+                <a:latin typeface="Calibri"/>
+              </a:rPr>
+              <a:t>.</a:t>
             </a:r>
           </a:p>
         </p:txBody>
@@ -7304,7 +7643,7 @@
 </file>
 
 <file path=ppt/slides/slide7.xml><?xml version="1.0" encoding="utf-8"?>
-<p:sld xmlns:a="http://schemas.openxmlformats.org/drawingml/2006/main" xmlns:p="http://schemas.openxmlformats.org/presentationml/2006/main" xmlns:r="http://schemas.openxmlformats.org/officeDocument/2006/relationships">
+<p:sld xmlns:a="http://schemas.openxmlformats.org/drawingml/2006/main" xmlns:r="http://schemas.openxmlformats.org/officeDocument/2006/relationships" xmlns:p="http://schemas.openxmlformats.org/presentationml/2006/main">
   <p:cSld>
     <p:bg>
       <p:bgPr>
@@ -7320,7 +7659,14 @@
         <p:cNvGrpSpPr/>
         <p:nvPr/>
       </p:nvGrpSpPr>
-      <p:grpSpPr/>
+      <p:grpSpPr>
+        <a:xfrm>
+          <a:off x="0" y="0"/>
+          <a:ext cx="0" cy="0"/>
+          <a:chOff x="0" y="0"/>
+          <a:chExt cx="0" cy="0"/>
+        </a:xfrm>
+      </p:grpSpPr>
       <p:sp>
         <p:nvSpPr>
           <p:cNvPr id="2" name="Titulo"/>
@@ -7359,100 +7705,6 @@
       <p:pic>
         <p:nvPicPr>
           <p:cNvPr id="3" name="Imagen wordcloud_sport" descr="Nube de palabras de deporte"/>
-          <p:cNvPicPr>
-            <a:picLocks noChangeAspect="1"/>
-          </p:cNvPicPr>
-          <p:nvPr/>
-        </p:nvPicPr>
-        <p:blipFill>
-          <a:blip r:embed="rId2"/>
-          <a:stretch>
-            <a:fillRect/>
-          </a:stretch>
-        </p:blipFill>
-        <p:spPr>
-          <a:xfrm>
-            <a:off x="640080" y="1562100"/>
-            <a:ext cx="3393338" cy="2001200"/>
-          </a:xfrm>
-          <a:prstGeom prst="rect">
-            <a:avLst/>
-          </a:prstGeom>
-        </p:spPr>
-      </p:pic>
-      <p:sp>
-        <p:nvSpPr>
-          <p:cNvPr id="4" name="Bloque 1 nombre"/>
-          <p:cNvSpPr txBox="1"/>
-          <p:nvPr/>
-        </p:nvSpPr>
-        <p:spPr>
-          <a:xfrm>
-            <a:off x="548640" y="3756660"/>
-            <a:ext cx="3576218" cy="487680"/>
-          </a:xfrm>
-          <a:prstGeom prst="rect">
-            <a:avLst/>
-          </a:prstGeom>
-          <a:noFill/>
-        </p:spPr>
-        <p:txBody>
-          <a:bodyPr wrap="square" tIns="91440" bIns="91440" anchor="t">
-            <a:noAutofit/>
-          </a:bodyPr>
-          <a:lstStyle/>
-          <a:p>
-            <a:pPr algn="l"/>
-            <a:r>
-              <a:rPr sz="2000" b="1">
-                <a:solidFill>
-                  <a:srgbClr val="1B1F24"/>
-                </a:solidFill>
-                <a:latin typeface="Calibri"/>
-              </a:rPr>
-              <a:t>Deporte</a:t>
-            </a:r>
-          </a:p>
-        </p:txBody>
-      </p:sp>
-      <p:sp>
-        <p:nvSpPr>
-          <p:cNvPr id="5" name="Bloque 1 frase"/>
-          <p:cNvSpPr txBox="1"/>
-          <p:nvPr/>
-        </p:nvSpPr>
-        <p:spPr>
-          <a:xfrm>
-            <a:off x="548640" y="4244340"/>
-            <a:ext cx="3576218" cy="1097280"/>
-          </a:xfrm>
-          <a:prstGeom prst="rect">
-            <a:avLst/>
-          </a:prstGeom>
-          <a:noFill/>
-        </p:spPr>
-        <p:txBody>
-          <a:bodyPr wrap="square" tIns="91440" bIns="91440" anchor="t">
-            <a:noAutofit/>
-          </a:bodyPr>
-          <a:lstStyle/>
-          <a:p>
-            <a:pPr algn="l"/>
-            <a:r>
-              <a:rPr sz="2000" b="0">
-                <a:solidFill>
-                  <a:srgbClr val="1B1F24"/>
-                </a:solidFill>
-                <a:latin typeface="Calibri"/>
-              </a:rPr>
-              <a:t>Tenistas y técnicos: roddick, nadal, mourinho, wenger.</a:t>
-            </a:r>
-          </a:p>
-        </p:txBody>
-      </p:sp>
-      <p:pic>
-        <p:nvPicPr>
-          <p:cNvPr id="6" name="Imagen wordcloud_politics" descr="Nube de palabras de política"/>
           <p:cNvPicPr>
             <a:picLocks noChangeAspect="1"/>
           </p:cNvPicPr>
@@ -7466,7 +7718,7 @@
         </p:blipFill>
         <p:spPr>
           <a:xfrm>
-            <a:off x="4399178" y="1562100"/>
+            <a:off x="640080" y="1562100"/>
             <a:ext cx="3393338" cy="2001200"/>
           </a:xfrm>
           <a:prstGeom prst="rect">
@@ -7476,13 +7728,13 @@
       </p:pic>
       <p:sp>
         <p:nvSpPr>
-          <p:cNvPr id="7" name="Bloque 2 nombre"/>
+          <p:cNvPr id="4" name="Bloque 1 nombre"/>
           <p:cNvSpPr txBox="1"/>
           <p:nvPr/>
         </p:nvSpPr>
         <p:spPr>
           <a:xfrm>
-            <a:off x="4307738" y="3756660"/>
+            <a:off x="548640" y="3756660"/>
             <a:ext cx="3576218" cy="487680"/>
           </a:xfrm>
           <a:prstGeom prst="rect">
@@ -7504,20 +7756,20 @@
                 </a:solidFill>
                 <a:latin typeface="Calibri"/>
               </a:rPr>
-              <a:t>Política</a:t>
-            </a:r>
-          </a:p>
-        </p:txBody>
-      </p:sp>
-      <p:sp>
-        <p:nvSpPr>
-          <p:cNvPr id="8" name="Bloque 2 frase"/>
+              <a:t>Deporte</a:t>
+            </a:r>
+          </a:p>
+        </p:txBody>
+      </p:sp>
+      <p:sp>
+        <p:nvSpPr>
+          <p:cNvPr id="5" name="Bloque 1 frase"/>
           <p:cNvSpPr txBox="1"/>
           <p:nvPr/>
         </p:nvSpPr>
         <p:spPr>
           <a:xfrm>
-            <a:off x="4307738" y="4244340"/>
+            <a:off x="548640" y="4244340"/>
             <a:ext cx="3576218" cy="1097280"/>
           </a:xfrm>
           <a:prstGeom prst="rect">
@@ -7539,14 +7791,14 @@
                 </a:solidFill>
                 <a:latin typeface="Calibri"/>
               </a:rPr>
-              <a:t>Partidos y casos: tory, ukip, blunkett, asylum.</a:t>
+              <a:t>Tenistas y técnicos: roddick, nadal, mourinho, wenger.</a:t>
             </a:r>
           </a:p>
         </p:txBody>
       </p:sp>
       <p:pic>
         <p:nvPicPr>
-          <p:cNvPr id="9" name="Imagen wordcloud_tech" descr="Nube de palabras de tecnología"/>
+          <p:cNvPr id="6" name="Imagen wordcloud_politics" descr="Nube de palabras de política"/>
           <p:cNvPicPr>
             <a:picLocks noChangeAspect="1"/>
           </p:cNvPicPr>
@@ -7560,6 +7812,100 @@
         </p:blipFill>
         <p:spPr>
           <a:xfrm>
+            <a:off x="4399178" y="1562100"/>
+            <a:ext cx="3393338" cy="2001200"/>
+          </a:xfrm>
+          <a:prstGeom prst="rect">
+            <a:avLst/>
+          </a:prstGeom>
+        </p:spPr>
+      </p:pic>
+      <p:sp>
+        <p:nvSpPr>
+          <p:cNvPr id="7" name="Bloque 2 nombre"/>
+          <p:cNvSpPr txBox="1"/>
+          <p:nvPr/>
+        </p:nvSpPr>
+        <p:spPr>
+          <a:xfrm>
+            <a:off x="4307738" y="3756660"/>
+            <a:ext cx="3576218" cy="487680"/>
+          </a:xfrm>
+          <a:prstGeom prst="rect">
+            <a:avLst/>
+          </a:prstGeom>
+          <a:noFill/>
+        </p:spPr>
+        <p:txBody>
+          <a:bodyPr wrap="square" tIns="91440" bIns="91440" anchor="t">
+            <a:noAutofit/>
+          </a:bodyPr>
+          <a:lstStyle/>
+          <a:p>
+            <a:pPr algn="l"/>
+            <a:r>
+              <a:rPr sz="2000" b="1">
+                <a:solidFill>
+                  <a:srgbClr val="1B1F24"/>
+                </a:solidFill>
+                <a:latin typeface="Calibri"/>
+              </a:rPr>
+              <a:t>Política</a:t>
+            </a:r>
+          </a:p>
+        </p:txBody>
+      </p:sp>
+      <p:sp>
+        <p:nvSpPr>
+          <p:cNvPr id="8" name="Bloque 2 frase"/>
+          <p:cNvSpPr txBox="1"/>
+          <p:nvPr/>
+        </p:nvSpPr>
+        <p:spPr>
+          <a:xfrm>
+            <a:off x="4307738" y="4244340"/>
+            <a:ext cx="3576218" cy="1097280"/>
+          </a:xfrm>
+          <a:prstGeom prst="rect">
+            <a:avLst/>
+          </a:prstGeom>
+          <a:noFill/>
+        </p:spPr>
+        <p:txBody>
+          <a:bodyPr wrap="square" tIns="91440" bIns="91440" anchor="t">
+            <a:noAutofit/>
+          </a:bodyPr>
+          <a:lstStyle/>
+          <a:p>
+            <a:pPr algn="l"/>
+            <a:r>
+              <a:rPr sz="2000" b="0">
+                <a:solidFill>
+                  <a:srgbClr val="1B1F24"/>
+                </a:solidFill>
+                <a:latin typeface="Calibri"/>
+              </a:rPr>
+              <a:t>Partidos y casos: tory, ukip, blunkett, asylum.</a:t>
+            </a:r>
+          </a:p>
+        </p:txBody>
+      </p:sp>
+      <p:pic>
+        <p:nvPicPr>
+          <p:cNvPr id="9" name="Imagen wordcloud_tech" descr="Nube de palabras de tecnología"/>
+          <p:cNvPicPr>
+            <a:picLocks noChangeAspect="1"/>
+          </p:cNvPicPr>
+          <p:nvPr/>
+        </p:nvPicPr>
+        <p:blipFill>
+          <a:blip r:embed="rId5"/>
+          <a:stretch>
+            <a:fillRect/>
+          </a:stretch>
+        </p:blipFill>
+        <p:spPr>
+          <a:xfrm>
             <a:off x="8158277" y="1562100"/>
             <a:ext cx="3393338" cy="2001200"/>
           </a:xfrm>
@@ -7634,41 +7980,6 @@
                 <a:latin typeface="Calibri"/>
               </a:rPr>
               <a:t>Internet y consolas: spam, browser, wifi, psp.</a:t>
-            </a:r>
-          </a:p>
-        </p:txBody>
-      </p:sp>
-      <p:sp>
-        <p:nvSpPr>
-          <p:cNvPr id="12" name="Pie de fuente"/>
-          <p:cNvSpPr txBox="1"/>
-          <p:nvPr/>
-        </p:nvSpPr>
-        <p:spPr>
-          <a:xfrm>
-            <a:off x="548640" y="5577840"/>
-            <a:ext cx="11094415" cy="365760"/>
-          </a:xfrm>
-          <a:prstGeom prst="rect">
-            <a:avLst/>
-          </a:prstGeom>
-          <a:noFill/>
-        </p:spPr>
-        <p:txBody>
-          <a:bodyPr wrap="square" tIns="91440" bIns="91440" anchor="t">
-            <a:noAutofit/>
-          </a:bodyPr>
-          <a:lstStyle/>
-          <a:p>
-            <a:pPr algn="l"/>
-            <a:r>
-              <a:rPr sz="1200" b="0">
-                <a:solidFill>
-                  <a:srgbClr val="5C6370"/>
-                </a:solidFill>
-                <a:latin typeface="Calibri"/>
-              </a:rPr>
-              <a:t>Tamaño: palabras frecuentes y propias de cada categoría.</a:t>
             </a:r>
           </a:p>
         </p:txBody>
@@ -7752,7 +8063,7 @@
 </file>
 
 <file path=ppt/slides/slide8.xml><?xml version="1.0" encoding="utf-8"?>
-<p:sld xmlns:a="http://schemas.openxmlformats.org/drawingml/2006/main" xmlns:p="http://schemas.openxmlformats.org/presentationml/2006/main" xmlns:r="http://schemas.openxmlformats.org/officeDocument/2006/relationships">
+<p:sld xmlns:a="http://schemas.openxmlformats.org/drawingml/2006/main" xmlns:r="http://schemas.openxmlformats.org/officeDocument/2006/relationships" xmlns:p="http://schemas.openxmlformats.org/presentationml/2006/main">
   <p:cSld>
     <p:bg>
       <p:bgPr>
@@ -7768,7 +8079,14 @@
         <p:cNvGrpSpPr/>
         <p:nvPr/>
       </p:nvGrpSpPr>
-      <p:grpSpPr/>
+      <p:grpSpPr>
+        <a:xfrm>
+          <a:off x="0" y="0"/>
+          <a:ext cx="0" cy="0"/>
+          <a:chOff x="0" y="0"/>
+          <a:chExt cx="0" cy="0"/>
+        </a:xfrm>
+      </p:grpSpPr>
       <p:sp>
         <p:nvSpPr>
           <p:cNvPr id="2" name="Titulo"/>
@@ -7806,57 +8124,14 @@
       </p:sp>
       <p:sp>
         <p:nvSpPr>
-          <p:cNvPr id="3" name="Marcador icono"/>
-          <p:cNvSpPr/>
-          <p:nvPr/>
-        </p:nvSpPr>
-        <p:spPr>
-          <a:xfrm>
-            <a:off x="652242" y="2545080"/>
-            <a:ext cx="1645920" cy="1645920"/>
-          </a:xfrm>
-          <a:prstGeom prst="roundRect">
-            <a:avLst>
-              <a:gd name="adj" fmla="val 8333"/>
-            </a:avLst>
-          </a:prstGeom>
-          <a:noFill/>
-          <a:ln w="22225">
-            <a:solidFill>
-              <a:srgbClr val="E07A1F"/>
-            </a:solidFill>
-            <a:prstDash val="dash"/>
-          </a:ln>
-        </p:spPr>
-        <p:txBody>
-          <a:bodyPr rtlCol="0" anchor="ctr" wrap="square" tIns="91440" bIns="91440">
-            <a:noAutofit/>
-          </a:bodyPr>
-          <a:lstStyle/>
-          <a:p>
-            <a:pPr algn="ctr"/>
-            <a:r>
-              <a:rPr sz="1200" b="0">
-                <a:solidFill>
-                  <a:srgbClr val="5C6370"/>
-                </a:solidFill>
-                <a:latin typeface="Calibri"/>
-              </a:rPr>
-              <a:t>ICONO: teclado</a:t>
-            </a:r>
-          </a:p>
-        </p:txBody>
-      </p:sp>
-      <p:sp>
-        <p:nvSpPr>
-          <p:cNvPr id="4" name="Paso 1 etiqueta"/>
+          <p:cNvPr id="22" name="Pie proyecto"/>
           <p:cNvSpPr txBox="1"/>
           <p:nvPr/>
         </p:nvSpPr>
         <p:spPr>
           <a:xfrm>
-            <a:off x="548640" y="4328160"/>
-            <a:ext cx="1853123" cy="487680"/>
+            <a:off x="548640" y="6035040"/>
+            <a:ext cx="3576218" cy="365760"/>
           </a:xfrm>
           <a:prstGeom prst="rect">
             <a:avLst/>
@@ -7869,29 +8144,29 @@
           </a:bodyPr>
           <a:lstStyle/>
           <a:p>
-            <a:pPr algn="ctr"/>
-            <a:r>
-              <a:rPr sz="2000" b="1">
-                <a:solidFill>
-                  <a:srgbClr val="1B1F24"/>
-                </a:solidFill>
-                <a:latin typeface="Calibri"/>
-              </a:rPr>
-              <a:t>Consulta</a:t>
-            </a:r>
-          </a:p>
-        </p:txBody>
-      </p:sp>
-      <p:sp>
-        <p:nvSpPr>
-          <p:cNvPr id="5" name="Paso 1 detalle"/>
+            <a:pPr algn="l"/>
+            <a:r>
+              <a:rPr sz="1200" b="0">
+                <a:solidFill>
+                  <a:srgbClr val="5C6370"/>
+                </a:solidFill>
+                <a:latin typeface="Calibri"/>
+              </a:rPr>
+              <a:t>BBC News IR</a:t>
+            </a:r>
+          </a:p>
+        </p:txBody>
+      </p:sp>
+      <p:sp>
+        <p:nvSpPr>
+          <p:cNvPr id="23" name="Numero de diapositiva"/>
           <p:cNvSpPr txBox="1"/>
           <p:nvPr/>
         </p:nvSpPr>
         <p:spPr>
           <a:xfrm>
-            <a:off x="548640" y="4815840"/>
-            <a:ext cx="1853123" cy="365760"/>
+            <a:off x="9946386" y="6035040"/>
+            <a:ext cx="1696669" cy="365760"/>
           </a:xfrm>
           <a:prstGeom prst="rect">
             <a:avLst/>
@@ -7904,7 +8179,7 @@
           </a:bodyPr>
           <a:lstStyle/>
           <a:p>
-            <a:pPr algn="ctr"/>
+            <a:pPr algn="r"/>
             <a:r>
               <a:rPr sz="1200" b="0">
                 <a:solidFill>
@@ -7912,651 +8187,42 @@
                 </a:solidFill>
                 <a:latin typeface="Calibri"/>
               </a:rPr>
-              <a:t>texto libre</a:t>
-            </a:r>
-          </a:p>
-        </p:txBody>
-      </p:sp>
-      <p:sp>
-        <p:nvSpPr>
-          <p:cNvPr id="6" name="Flecha"/>
-          <p:cNvSpPr/>
+              <a:t>8</a:t>
+            </a:r>
+          </a:p>
+        </p:txBody>
+      </p:sp>
+      <p:pic>
+        <p:nvPicPr>
+          <p:cNvPr id="25" name="Picture 24">
+            <a:extLst>
+              <a:ext uri="{FF2B5EF4-FFF2-40B4-BE49-F238E27FC236}">
+                <a16:creationId xmlns:a16="http://schemas.microsoft.com/office/drawing/2014/main" id="{2C5C4569-A709-0F89-9D45-52B298565B55}"/>
+              </a:ext>
+            </a:extLst>
+          </p:cNvPr>
+          <p:cNvPicPr>
+            <a:picLocks noChangeAspect="1"/>
+          </p:cNvPicPr>
           <p:nvPr/>
-        </p:nvSpPr>
-        <p:spPr>
-          <a:xfrm>
-            <a:off x="2438339" y="3203448"/>
-            <a:ext cx="384048" cy="329184"/>
-          </a:xfrm>
-          <a:prstGeom prst="rightArrow">
-            <a:avLst/>
-          </a:prstGeom>
-          <a:solidFill>
-            <a:srgbClr val="C9CCD1"/>
-          </a:solidFill>
-          <a:ln>
-            <a:noFill/>
-          </a:ln>
-        </p:spPr>
-        <p:txBody>
-          <a:bodyPr rtlCol="0" anchor="ctr"/>
-          <a:lstStyle/>
-          <a:p>
-            <a:pPr algn="ctr"/>
-          </a:p>
-        </p:txBody>
-      </p:sp>
-      <p:sp>
-        <p:nvSpPr>
-          <p:cNvPr id="7" name="Marcador icono"/>
-          <p:cNvSpPr/>
-          <p:nvPr/>
-        </p:nvSpPr>
-        <p:spPr>
-          <a:xfrm>
-            <a:off x="2962565" y="2545080"/>
-            <a:ext cx="1645920" cy="1645920"/>
-          </a:xfrm>
-          <a:prstGeom prst="roundRect">
-            <a:avLst>
-              <a:gd name="adj" fmla="val 8333"/>
-            </a:avLst>
-          </a:prstGeom>
-          <a:noFill/>
-          <a:ln w="22225">
-            <a:solidFill>
-              <a:srgbClr val="E07A1F"/>
-            </a:solidFill>
-            <a:prstDash val="dash"/>
-          </a:ln>
-        </p:spPr>
-        <p:txBody>
-          <a:bodyPr rtlCol="0" anchor="ctr" wrap="square" tIns="91440" bIns="91440">
-            <a:noAutofit/>
-          </a:bodyPr>
-          <a:lstStyle/>
-          <a:p>
-            <a:pPr algn="ctr"/>
-            <a:r>
-              <a:rPr sz="1200" b="0">
-                <a:solidFill>
-                  <a:srgbClr val="5C6370"/>
-                </a:solidFill>
-                <a:latin typeface="Calibri"/>
-              </a:rPr>
-              <a:t>ICONO: escoba</a:t>
-            </a:r>
-          </a:p>
-        </p:txBody>
-      </p:sp>
-      <p:sp>
-        <p:nvSpPr>
-          <p:cNvPr id="8" name="Paso 2 etiqueta"/>
-          <p:cNvSpPr txBox="1"/>
-          <p:nvPr/>
-        </p:nvSpPr>
-        <p:spPr>
-          <a:xfrm>
-            <a:off x="2858963" y="4328160"/>
-            <a:ext cx="1853123" cy="487680"/>
+        </p:nvPicPr>
+        <p:blipFill>
+          <a:blip r:embed="rId3"/>
+          <a:srcRect l="1668" r="1788"/>
+          <a:stretch>
+            <a:fillRect/>
+          </a:stretch>
+        </p:blipFill>
+        <p:spPr>
+          <a:xfrm>
+            <a:off x="174549" y="1554480"/>
+            <a:ext cx="11842595" cy="4088782"/>
           </a:xfrm>
           <a:prstGeom prst="rect">
             <a:avLst/>
           </a:prstGeom>
-          <a:noFill/>
-        </p:spPr>
-        <p:txBody>
-          <a:bodyPr wrap="square" tIns="91440" bIns="91440" anchor="t">
-            <a:noAutofit/>
-          </a:bodyPr>
-          <a:lstStyle/>
-          <a:p>
-            <a:pPr algn="ctr"/>
-            <a:r>
-              <a:rPr sz="2000" b="1">
-                <a:solidFill>
-                  <a:srgbClr val="1B1F24"/>
-                </a:solidFill>
-                <a:latin typeface="Calibri"/>
-              </a:rPr>
-              <a:t>Limpieza</a:t>
-            </a:r>
-          </a:p>
-        </p:txBody>
-      </p:sp>
-      <p:sp>
-        <p:nvSpPr>
-          <p:cNvPr id="9" name="Paso 2 detalle"/>
-          <p:cNvSpPr txBox="1"/>
-          <p:nvPr/>
-        </p:nvSpPr>
-        <p:spPr>
-          <a:xfrm>
-            <a:off x="2858963" y="4815840"/>
-            <a:ext cx="1853123" cy="365760"/>
-          </a:xfrm>
-          <a:prstGeom prst="rect">
-            <a:avLst/>
-          </a:prstGeom>
-          <a:noFill/>
-        </p:spPr>
-        <p:txBody>
-          <a:bodyPr wrap="square" tIns="91440" bIns="91440" anchor="t">
-            <a:noAutofit/>
-          </a:bodyPr>
-          <a:lstStyle/>
-          <a:p>
-            <a:pPr algn="ctr"/>
-            <a:r>
-              <a:rPr sz="1200" b="0">
-                <a:solidFill>
-                  <a:srgbClr val="5C6370"/>
-                </a:solidFill>
-                <a:latin typeface="Calibri"/>
-              </a:rPr>
-              <a:t>igual que el corpus</a:t>
-            </a:r>
-          </a:p>
-        </p:txBody>
-      </p:sp>
-      <p:sp>
-        <p:nvSpPr>
-          <p:cNvPr id="10" name="Flecha"/>
-          <p:cNvSpPr/>
-          <p:nvPr/>
-        </p:nvSpPr>
-        <p:spPr>
-          <a:xfrm>
-            <a:off x="4748662" y="3203448"/>
-            <a:ext cx="384048" cy="329184"/>
-          </a:xfrm>
-          <a:prstGeom prst="rightArrow">
-            <a:avLst/>
-          </a:prstGeom>
-          <a:solidFill>
-            <a:srgbClr val="C9CCD1"/>
-          </a:solidFill>
-          <a:ln>
-            <a:noFill/>
-          </a:ln>
-        </p:spPr>
-        <p:txBody>
-          <a:bodyPr rtlCol="0" anchor="ctr"/>
-          <a:lstStyle/>
-          <a:p>
-            <a:pPr algn="ctr"/>
-          </a:p>
-        </p:txBody>
-      </p:sp>
-      <p:sp>
-        <p:nvSpPr>
-          <p:cNvPr id="11" name="Marcador icono"/>
-          <p:cNvSpPr/>
-          <p:nvPr/>
-        </p:nvSpPr>
-        <p:spPr>
-          <a:xfrm>
-            <a:off x="5272888" y="2545080"/>
-            <a:ext cx="1645920" cy="1645920"/>
-          </a:xfrm>
-          <a:prstGeom prst="roundRect">
-            <a:avLst>
-              <a:gd name="adj" fmla="val 8333"/>
-            </a:avLst>
-          </a:prstGeom>
-          <a:solidFill>
-            <a:srgbClr val="FBE9D7"/>
-          </a:solidFill>
-          <a:ln w="22225">
-            <a:solidFill>
-              <a:srgbClr val="E07A1F"/>
-            </a:solidFill>
-            <a:prstDash val="dash"/>
-          </a:ln>
-        </p:spPr>
-        <p:txBody>
-          <a:bodyPr rtlCol="0" anchor="ctr" wrap="square" tIns="91440" bIns="91440">
-            <a:noAutofit/>
-          </a:bodyPr>
-          <a:lstStyle/>
-          <a:p>
-            <a:pPr algn="ctr"/>
-            <a:r>
-              <a:rPr sz="1200" b="0">
-                <a:solidFill>
-                  <a:srgbClr val="5C6370"/>
-                </a:solidFill>
-                <a:latin typeface="Calibri"/>
-              </a:rPr>
-              <a:t>ICONO: tabla numérica</a:t>
-            </a:r>
-          </a:p>
-        </p:txBody>
-      </p:sp>
-      <p:sp>
-        <p:nvSpPr>
-          <p:cNvPr id="12" name="Paso 3 etiqueta"/>
-          <p:cNvSpPr txBox="1"/>
-          <p:nvPr/>
-        </p:nvSpPr>
-        <p:spPr>
-          <a:xfrm>
-            <a:off x="5169286" y="4328160"/>
-            <a:ext cx="1853123" cy="487680"/>
-          </a:xfrm>
-          <a:prstGeom prst="rect">
-            <a:avLst/>
-          </a:prstGeom>
-          <a:noFill/>
-        </p:spPr>
-        <p:txBody>
-          <a:bodyPr wrap="square" tIns="91440" bIns="91440" anchor="t">
-            <a:noAutofit/>
-          </a:bodyPr>
-          <a:lstStyle/>
-          <a:p>
-            <a:pPr algn="ctr"/>
-            <a:r>
-              <a:rPr sz="2000" b="1">
-                <a:solidFill>
-                  <a:srgbClr val="B05400"/>
-                </a:solidFill>
-                <a:latin typeface="Calibri"/>
-              </a:rPr>
-              <a:t>Vectores</a:t>
-            </a:r>
-          </a:p>
-        </p:txBody>
-      </p:sp>
-      <p:sp>
-        <p:nvSpPr>
-          <p:cNvPr id="13" name="Paso 3 detalle"/>
-          <p:cNvSpPr txBox="1"/>
-          <p:nvPr/>
-        </p:nvSpPr>
-        <p:spPr>
-          <a:xfrm>
-            <a:off x="5169286" y="4815840"/>
-            <a:ext cx="1853123" cy="365760"/>
-          </a:xfrm>
-          <a:prstGeom prst="rect">
-            <a:avLst/>
-          </a:prstGeom>
-          <a:noFill/>
-        </p:spPr>
-        <p:txBody>
-          <a:bodyPr wrap="square" tIns="91440" bIns="91440" anchor="t">
-            <a:noAutofit/>
-          </a:bodyPr>
-          <a:lstStyle/>
-          <a:p>
-            <a:pPr algn="ctr"/>
-            <a:r>
-              <a:rPr sz="1200" b="0">
-                <a:solidFill>
-                  <a:srgbClr val="5C6370"/>
-                </a:solidFill>
-                <a:latin typeface="Calibri"/>
-              </a:rPr>
-              <a:t>según el método</a:t>
-            </a:r>
-          </a:p>
-        </p:txBody>
-      </p:sp>
-      <p:sp>
-        <p:nvSpPr>
-          <p:cNvPr id="14" name="Flecha"/>
-          <p:cNvSpPr/>
-          <p:nvPr/>
-        </p:nvSpPr>
-        <p:spPr>
-          <a:xfrm>
-            <a:off x="7058985" y="3203448"/>
-            <a:ext cx="384048" cy="329184"/>
-          </a:xfrm>
-          <a:prstGeom prst="rightArrow">
-            <a:avLst/>
-          </a:prstGeom>
-          <a:solidFill>
-            <a:srgbClr val="C9CCD1"/>
-          </a:solidFill>
-          <a:ln>
-            <a:noFill/>
-          </a:ln>
-        </p:spPr>
-        <p:txBody>
-          <a:bodyPr rtlCol="0" anchor="ctr"/>
-          <a:lstStyle/>
-          <a:p>
-            <a:pPr algn="ctr"/>
-          </a:p>
-        </p:txBody>
-      </p:sp>
-      <p:sp>
-        <p:nvSpPr>
-          <p:cNvPr id="15" name="Marcador icono"/>
-          <p:cNvSpPr/>
-          <p:nvPr/>
-        </p:nvSpPr>
-        <p:spPr>
-          <a:xfrm>
-            <a:off x="7583211" y="2545080"/>
-            <a:ext cx="1645920" cy="1645920"/>
-          </a:xfrm>
-          <a:prstGeom prst="roundRect">
-            <a:avLst>
-              <a:gd name="adj" fmla="val 8333"/>
-            </a:avLst>
-          </a:prstGeom>
-          <a:noFill/>
-          <a:ln w="22225">
-            <a:solidFill>
-              <a:srgbClr val="E07A1F"/>
-            </a:solidFill>
-            <a:prstDash val="dash"/>
-          </a:ln>
-        </p:spPr>
-        <p:txBody>
-          <a:bodyPr rtlCol="0" anchor="ctr" wrap="square" tIns="91440" bIns="91440">
-            <a:noAutofit/>
-          </a:bodyPr>
-          <a:lstStyle/>
-          <a:p>
-            <a:pPr algn="ctr"/>
-            <a:r>
-              <a:rPr sz="1200" b="0">
-                <a:solidFill>
-                  <a:srgbClr val="5C6370"/>
-                </a:solidFill>
-                <a:latin typeface="Calibri"/>
-              </a:rPr>
-              <a:t>ICONO: ángulo</a:t>
-            </a:r>
-          </a:p>
-        </p:txBody>
-      </p:sp>
-      <p:sp>
-        <p:nvSpPr>
-          <p:cNvPr id="16" name="Paso 4 etiqueta"/>
-          <p:cNvSpPr txBox="1"/>
-          <p:nvPr/>
-        </p:nvSpPr>
-        <p:spPr>
-          <a:xfrm>
-            <a:off x="7479609" y="4328160"/>
-            <a:ext cx="1853123" cy="487680"/>
-          </a:xfrm>
-          <a:prstGeom prst="rect">
-            <a:avLst/>
-          </a:prstGeom>
-          <a:noFill/>
-        </p:spPr>
-        <p:txBody>
-          <a:bodyPr wrap="square" tIns="91440" bIns="91440" anchor="t">
-            <a:noAutofit/>
-          </a:bodyPr>
-          <a:lstStyle/>
-          <a:p>
-            <a:pPr algn="ctr"/>
-            <a:r>
-              <a:rPr sz="2000" b="1">
-                <a:solidFill>
-                  <a:srgbClr val="1B1F24"/>
-                </a:solidFill>
-                <a:latin typeface="Calibri"/>
-              </a:rPr>
-              <a:t>Similitud</a:t>
-            </a:r>
-          </a:p>
-        </p:txBody>
-      </p:sp>
-      <p:sp>
-        <p:nvSpPr>
-          <p:cNvPr id="17" name="Paso 4 detalle"/>
-          <p:cNvSpPr txBox="1"/>
-          <p:nvPr/>
-        </p:nvSpPr>
-        <p:spPr>
-          <a:xfrm>
-            <a:off x="7479609" y="4815840"/>
-            <a:ext cx="1853123" cy="365760"/>
-          </a:xfrm>
-          <a:prstGeom prst="rect">
-            <a:avLst/>
-          </a:prstGeom>
-          <a:noFill/>
-        </p:spPr>
-        <p:txBody>
-          <a:bodyPr wrap="square" tIns="91440" bIns="91440" anchor="t">
-            <a:noAutofit/>
-          </a:bodyPr>
-          <a:lstStyle/>
-          <a:p>
-            <a:pPr algn="ctr"/>
-            <a:r>
-              <a:rPr sz="1200" b="0">
-                <a:solidFill>
-                  <a:srgbClr val="5C6370"/>
-                </a:solidFill>
-                <a:latin typeface="Calibri"/>
-              </a:rPr>
-              <a:t>coseno o BM25</a:t>
-            </a:r>
-          </a:p>
-        </p:txBody>
-      </p:sp>
-      <p:sp>
-        <p:nvSpPr>
-          <p:cNvPr id="18" name="Flecha"/>
-          <p:cNvSpPr/>
-          <p:nvPr/>
-        </p:nvSpPr>
-        <p:spPr>
-          <a:xfrm>
-            <a:off x="9369308" y="3203448"/>
-            <a:ext cx="384048" cy="329184"/>
-          </a:xfrm>
-          <a:prstGeom prst="rightArrow">
-            <a:avLst/>
-          </a:prstGeom>
-          <a:solidFill>
-            <a:srgbClr val="C9CCD1"/>
-          </a:solidFill>
-          <a:ln>
-            <a:noFill/>
-          </a:ln>
-        </p:spPr>
-        <p:txBody>
-          <a:bodyPr rtlCol="0" anchor="ctr"/>
-          <a:lstStyle/>
-          <a:p>
-            <a:pPr algn="ctr"/>
-          </a:p>
-        </p:txBody>
-      </p:sp>
-      <p:sp>
-        <p:nvSpPr>
-          <p:cNvPr id="19" name="Marcador icono"/>
-          <p:cNvSpPr/>
-          <p:nvPr/>
-        </p:nvSpPr>
-        <p:spPr>
-          <a:xfrm>
-            <a:off x="9893534" y="2545080"/>
-            <a:ext cx="1645920" cy="1645920"/>
-          </a:xfrm>
-          <a:prstGeom prst="roundRect">
-            <a:avLst>
-              <a:gd name="adj" fmla="val 8333"/>
-            </a:avLst>
-          </a:prstGeom>
-          <a:noFill/>
-          <a:ln w="22225">
-            <a:solidFill>
-              <a:srgbClr val="E07A1F"/>
-            </a:solidFill>
-            <a:prstDash val="dash"/>
-          </a:ln>
-        </p:spPr>
-        <p:txBody>
-          <a:bodyPr rtlCol="0" anchor="ctr" wrap="square" tIns="91440" bIns="91440">
-            <a:noAutofit/>
-          </a:bodyPr>
-          <a:lstStyle/>
-          <a:p>
-            <a:pPr algn="ctr"/>
-            <a:r>
-              <a:rPr sz="1200" b="0">
-                <a:solidFill>
-                  <a:srgbClr val="5C6370"/>
-                </a:solidFill>
-                <a:latin typeface="Calibri"/>
-              </a:rPr>
-              <a:t>ICONO: podio</a:t>
-            </a:r>
-          </a:p>
-        </p:txBody>
-      </p:sp>
-      <p:sp>
-        <p:nvSpPr>
-          <p:cNvPr id="20" name="Paso 5 etiqueta"/>
-          <p:cNvSpPr txBox="1"/>
-          <p:nvPr/>
-        </p:nvSpPr>
-        <p:spPr>
-          <a:xfrm>
-            <a:off x="9789932" y="4328160"/>
-            <a:ext cx="1853123" cy="487680"/>
-          </a:xfrm>
-          <a:prstGeom prst="rect">
-            <a:avLst/>
-          </a:prstGeom>
-          <a:noFill/>
-        </p:spPr>
-        <p:txBody>
-          <a:bodyPr wrap="square" tIns="91440" bIns="91440" anchor="t">
-            <a:noAutofit/>
-          </a:bodyPr>
-          <a:lstStyle/>
-          <a:p>
-            <a:pPr algn="ctr"/>
-            <a:r>
-              <a:rPr sz="2000" b="1">
-                <a:solidFill>
-                  <a:srgbClr val="1B1F24"/>
-                </a:solidFill>
-                <a:latin typeface="Calibri"/>
-              </a:rPr>
-              <a:t>Ranking</a:t>
-            </a:r>
-          </a:p>
-        </p:txBody>
-      </p:sp>
-      <p:sp>
-        <p:nvSpPr>
-          <p:cNvPr id="21" name="Paso 5 detalle"/>
-          <p:cNvSpPr txBox="1"/>
-          <p:nvPr/>
-        </p:nvSpPr>
-        <p:spPr>
-          <a:xfrm>
-            <a:off x="9789932" y="4815840"/>
-            <a:ext cx="1853123" cy="365760"/>
-          </a:xfrm>
-          <a:prstGeom prst="rect">
-            <a:avLst/>
-          </a:prstGeom>
-          <a:noFill/>
-        </p:spPr>
-        <p:txBody>
-          <a:bodyPr wrap="square" tIns="91440" bIns="91440" anchor="t">
-            <a:noAutofit/>
-          </a:bodyPr>
-          <a:lstStyle/>
-          <a:p>
-            <a:pPr algn="ctr"/>
-            <a:r>
-              <a:rPr sz="1200" b="0">
-                <a:solidFill>
-                  <a:srgbClr val="5C6370"/>
-                </a:solidFill>
-                <a:latin typeface="Calibri"/>
-              </a:rPr>
-              <a:t>los k más cercanos</a:t>
-            </a:r>
-          </a:p>
-        </p:txBody>
-      </p:sp>
-      <p:sp>
-        <p:nvSpPr>
-          <p:cNvPr id="22" name="Pie proyecto"/>
-          <p:cNvSpPr txBox="1"/>
-          <p:nvPr/>
-        </p:nvSpPr>
-        <p:spPr>
-          <a:xfrm>
-            <a:off x="548640" y="6035040"/>
-            <a:ext cx="3576218" cy="365760"/>
-          </a:xfrm>
-          <a:prstGeom prst="rect">
-            <a:avLst/>
-          </a:prstGeom>
-          <a:noFill/>
-        </p:spPr>
-        <p:txBody>
-          <a:bodyPr wrap="square" tIns="91440" bIns="91440" anchor="t">
-            <a:noAutofit/>
-          </a:bodyPr>
-          <a:lstStyle/>
-          <a:p>
-            <a:pPr algn="l"/>
-            <a:r>
-              <a:rPr sz="1200" b="0">
-                <a:solidFill>
-                  <a:srgbClr val="5C6370"/>
-                </a:solidFill>
-                <a:latin typeface="Calibri"/>
-              </a:rPr>
-              <a:t>BBC News IR</a:t>
-            </a:r>
-          </a:p>
-        </p:txBody>
-      </p:sp>
-      <p:sp>
-        <p:nvSpPr>
-          <p:cNvPr id="23" name="Numero de diapositiva"/>
-          <p:cNvSpPr txBox="1"/>
-          <p:nvPr/>
-        </p:nvSpPr>
-        <p:spPr>
-          <a:xfrm>
-            <a:off x="9946386" y="6035040"/>
-            <a:ext cx="1696669" cy="365760"/>
-          </a:xfrm>
-          <a:prstGeom prst="rect">
-            <a:avLst/>
-          </a:prstGeom>
-          <a:noFill/>
-        </p:spPr>
-        <p:txBody>
-          <a:bodyPr wrap="square" tIns="91440" bIns="91440" anchor="t">
-            <a:noAutofit/>
-          </a:bodyPr>
-          <a:lstStyle/>
-          <a:p>
-            <a:pPr algn="r"/>
-            <a:r>
-              <a:rPr sz="1200" b="0">
-                <a:solidFill>
-                  <a:srgbClr val="5C6370"/>
-                </a:solidFill>
-                <a:latin typeface="Calibri"/>
-              </a:rPr>
-              <a:t>8</a:t>
-            </a:r>
-          </a:p>
-        </p:txBody>
-      </p:sp>
+        </p:spPr>
+      </p:pic>
     </p:spTree>
   </p:cSld>
   <p:clrMapOvr>
@@ -8566,7 +8232,7 @@
 </file>
 
 <file path=ppt/slides/slide9.xml><?xml version="1.0" encoding="utf-8"?>
-<p:sld xmlns:a="http://schemas.openxmlformats.org/drawingml/2006/main" xmlns:p="http://schemas.openxmlformats.org/presentationml/2006/main" xmlns:r="http://schemas.openxmlformats.org/officeDocument/2006/relationships">
+<p:sld xmlns:a="http://schemas.openxmlformats.org/drawingml/2006/main" xmlns:r="http://schemas.openxmlformats.org/officeDocument/2006/relationships" xmlns:p="http://schemas.openxmlformats.org/presentationml/2006/main">
   <p:cSld>
     <p:bg>
       <p:bgPr>
@@ -8582,7 +8248,14 @@
         <p:cNvGrpSpPr/>
         <p:nvPr/>
       </p:nvGrpSpPr>
-      <p:grpSpPr/>
+      <p:grpSpPr>
+        <a:xfrm>
+          <a:off x="0" y="0"/>
+          <a:ext cx="0" cy="0"/>
+          <a:chOff x="0" y="0"/>
+          <a:chExt cx="0" cy="0"/>
+        </a:xfrm>
+      </p:grpSpPr>
       <p:sp>
         <p:nvSpPr>
           <p:cNvPr id="2" name="Titulo"/>
@@ -8620,57 +8293,14 @@
       </p:sp>
       <p:sp>
         <p:nvSpPr>
-          <p:cNvPr id="3" name="Marcador icono"/>
-          <p:cNvSpPr/>
-          <p:nvPr/>
-        </p:nvSpPr>
-        <p:spPr>
-          <a:xfrm>
-            <a:off x="640080" y="1866900"/>
-            <a:ext cx="1554480" cy="1554480"/>
-          </a:xfrm>
-          <a:prstGeom prst="roundRect">
-            <a:avLst>
-              <a:gd name="adj" fmla="val 8823"/>
-            </a:avLst>
-          </a:prstGeom>
-          <a:noFill/>
-          <a:ln w="22225">
-            <a:solidFill>
-              <a:srgbClr val="E07A1F"/>
-            </a:solidFill>
-            <a:prstDash val="dash"/>
-          </a:ln>
-        </p:spPr>
-        <p:txBody>
-          <a:bodyPr rtlCol="0" anchor="ctr" wrap="square" tIns="91440" bIns="91440">
-            <a:noAutofit/>
-          </a:bodyPr>
-          <a:lstStyle/>
-          <a:p>
-            <a:pPr algn="ctr"/>
-            <a:r>
-              <a:rPr sz="1200" b="0">
-                <a:solidFill>
-                  <a:srgbClr val="5C6370"/>
-                </a:solidFill>
-                <a:latin typeface="Calibri"/>
-              </a:rPr>
-              <a:t>ICONO: contador</a:t>
-            </a:r>
-          </a:p>
-        </p:txBody>
-      </p:sp>
-      <p:sp>
-        <p:nvSpPr>
-          <p:cNvPr id="4" name="Bloque 1 nombre"/>
+          <p:cNvPr id="15" name="Pie proyecto"/>
           <p:cNvSpPr txBox="1"/>
           <p:nvPr/>
         </p:nvSpPr>
         <p:spPr>
           <a:xfrm>
-            <a:off x="548640" y="3512820"/>
-            <a:ext cx="2636444" cy="487680"/>
+            <a:off x="548640" y="6035040"/>
+            <a:ext cx="3576218" cy="365760"/>
           </a:xfrm>
           <a:prstGeom prst="rect">
             <a:avLst/>
@@ -8685,27 +8315,27 @@
           <a:p>
             <a:pPr algn="l"/>
             <a:r>
-              <a:rPr sz="2000" b="1">
-                <a:solidFill>
-                  <a:srgbClr val="1B1F24"/>
-                </a:solidFill>
-                <a:latin typeface="Calibri"/>
-              </a:rPr>
-              <a:t>Conteo</a:t>
-            </a:r>
-          </a:p>
-        </p:txBody>
-      </p:sp>
-      <p:sp>
-        <p:nvSpPr>
-          <p:cNvPr id="5" name="Bloque 1 frase"/>
+              <a:rPr sz="1200" b="0">
+                <a:solidFill>
+                  <a:srgbClr val="5C6370"/>
+                </a:solidFill>
+                <a:latin typeface="Calibri"/>
+              </a:rPr>
+              <a:t>BBC News IR</a:t>
+            </a:r>
+          </a:p>
+        </p:txBody>
+      </p:sp>
+      <p:sp>
+        <p:nvSpPr>
+          <p:cNvPr id="16" name="Numero de diapositiva"/>
           <p:cNvSpPr txBox="1"/>
           <p:nvPr/>
         </p:nvSpPr>
         <p:spPr>
           <a:xfrm>
-            <a:off x="548640" y="4000500"/>
-            <a:ext cx="2636444" cy="1402080"/>
+            <a:off x="9946386" y="6035040"/>
+            <a:ext cx="1696669" cy="365760"/>
           </a:xfrm>
           <a:prstGeom prst="rect">
             <a:avLst/>
@@ -8718,428 +8348,50 @@
           </a:bodyPr>
           <a:lstStyle/>
           <a:p>
-            <a:pPr algn="l"/>
-            <a:r>
-              <a:rPr sz="2000" b="0">
-                <a:solidFill>
-                  <a:srgbClr val="1B1F24"/>
-                </a:solidFill>
-                <a:latin typeface="Calibri"/>
-              </a:rPr>
-              <a:t>Cuenta cuántas veces aparece cada palabra.</a:t>
-            </a:r>
-          </a:p>
-        </p:txBody>
-      </p:sp>
-      <p:sp>
-        <p:nvSpPr>
-          <p:cNvPr id="6" name="Marcador icono"/>
-          <p:cNvSpPr/>
+            <a:pPr algn="r"/>
+            <a:r>
+              <a:rPr sz="1200" b="0">
+                <a:solidFill>
+                  <a:srgbClr val="5C6370"/>
+                </a:solidFill>
+                <a:latin typeface="Calibri"/>
+              </a:rPr>
+              <a:t>9</a:t>
+            </a:r>
+          </a:p>
+        </p:txBody>
+      </p:sp>
+      <p:pic>
+        <p:nvPicPr>
+          <p:cNvPr id="17" name="Picture 16">
+            <a:extLst>
+              <a:ext uri="{FF2B5EF4-FFF2-40B4-BE49-F238E27FC236}">
+                <a16:creationId xmlns:a16="http://schemas.microsoft.com/office/drawing/2014/main" id="{F8401283-B8E3-812F-3141-0EE988CFD38E}"/>
+              </a:ext>
+            </a:extLst>
+          </p:cNvPr>
+          <p:cNvPicPr>
+            <a:picLocks noChangeAspect="1"/>
+          </p:cNvPicPr>
           <p:nvPr/>
-        </p:nvSpPr>
-        <p:spPr>
-          <a:xfrm>
-            <a:off x="3459404" y="1866900"/>
-            <a:ext cx="1554480" cy="1554480"/>
-          </a:xfrm>
-          <a:prstGeom prst="roundRect">
-            <a:avLst>
-              <a:gd name="adj" fmla="val 8823"/>
-            </a:avLst>
-          </a:prstGeom>
-          <a:noFill/>
-          <a:ln w="22225">
-            <a:solidFill>
-              <a:srgbClr val="E07A1F"/>
-            </a:solidFill>
-            <a:prstDash val="dash"/>
-          </a:ln>
-        </p:spPr>
-        <p:txBody>
-          <a:bodyPr rtlCol="0" anchor="ctr" wrap="square" tIns="91440" bIns="91440">
-            <a:noAutofit/>
-          </a:bodyPr>
-          <a:lstStyle/>
-          <a:p>
-            <a:pPr algn="ctr"/>
-            <a:r>
-              <a:rPr sz="1200" b="0">
-                <a:solidFill>
-                  <a:srgbClr val="5C6370"/>
-                </a:solidFill>
-                <a:latin typeface="Calibri"/>
-              </a:rPr>
-              <a:t>ICONO: balanza</a:t>
-            </a:r>
-          </a:p>
-        </p:txBody>
-      </p:sp>
-      <p:sp>
-        <p:nvSpPr>
-          <p:cNvPr id="7" name="Bloque 2 nombre"/>
-          <p:cNvSpPr txBox="1"/>
-          <p:nvPr/>
-        </p:nvSpPr>
-        <p:spPr>
-          <a:xfrm>
-            <a:off x="3367964" y="3512820"/>
-            <a:ext cx="2636444" cy="487680"/>
+        </p:nvPicPr>
+        <p:blipFill>
+          <a:blip r:embed="rId3"/>
+          <a:srcRect l="3369" r="2177"/>
+          <a:stretch>
+            <a:fillRect/>
+          </a:stretch>
+        </p:blipFill>
+        <p:spPr>
+          <a:xfrm>
+            <a:off x="208003" y="1488316"/>
+            <a:ext cx="11775688" cy="4155687"/>
           </a:xfrm>
           <a:prstGeom prst="rect">
             <a:avLst/>
           </a:prstGeom>
-          <a:noFill/>
-        </p:spPr>
-        <p:txBody>
-          <a:bodyPr wrap="square" tIns="91440" bIns="91440" anchor="t">
-            <a:noAutofit/>
-          </a:bodyPr>
-          <a:lstStyle/>
-          <a:p>
-            <a:pPr algn="l"/>
-            <a:r>
-              <a:rPr sz="2000" b="1">
-                <a:solidFill>
-                  <a:srgbClr val="1B1F24"/>
-                </a:solidFill>
-                <a:latin typeface="Calibri"/>
-              </a:rPr>
-              <a:t>TF-IDF</a:t>
-            </a:r>
-          </a:p>
-        </p:txBody>
-      </p:sp>
-      <p:sp>
-        <p:nvSpPr>
-          <p:cNvPr id="8" name="Bloque 2 frase"/>
-          <p:cNvSpPr txBox="1"/>
-          <p:nvPr/>
-        </p:nvSpPr>
-        <p:spPr>
-          <a:xfrm>
-            <a:off x="3367964" y="4000500"/>
-            <a:ext cx="2636444" cy="1402080"/>
-          </a:xfrm>
-          <a:prstGeom prst="rect">
-            <a:avLst/>
-          </a:prstGeom>
-          <a:noFill/>
-        </p:spPr>
-        <p:txBody>
-          <a:bodyPr wrap="square" tIns="91440" bIns="91440" anchor="t">
-            <a:noAutofit/>
-          </a:bodyPr>
-          <a:lstStyle/>
-          <a:p>
-            <a:pPr algn="l"/>
-            <a:r>
-              <a:rPr sz="2000" b="0">
-                <a:solidFill>
-                  <a:srgbClr val="1B1F24"/>
-                </a:solidFill>
-                <a:latin typeface="Calibri"/>
-              </a:rPr>
-              <a:t>Premia las palabras raras y castiga las comunes.</a:t>
-            </a:r>
-          </a:p>
-        </p:txBody>
-      </p:sp>
-      <p:sp>
-        <p:nvSpPr>
-          <p:cNvPr id="9" name="Marcador icono"/>
-          <p:cNvSpPr/>
-          <p:nvPr/>
-        </p:nvSpPr>
-        <p:spPr>
-          <a:xfrm>
-            <a:off x="6278728" y="1866900"/>
-            <a:ext cx="1554480" cy="1554480"/>
-          </a:xfrm>
-          <a:prstGeom prst="roundRect">
-            <a:avLst>
-              <a:gd name="adj" fmla="val 8823"/>
-            </a:avLst>
-          </a:prstGeom>
-          <a:noFill/>
-          <a:ln w="22225">
-            <a:solidFill>
-              <a:srgbClr val="E07A1F"/>
-            </a:solidFill>
-            <a:prstDash val="dash"/>
-          </a:ln>
-        </p:spPr>
-        <p:txBody>
-          <a:bodyPr rtlCol="0" anchor="ctr" wrap="square" tIns="91440" bIns="91440">
-            <a:noAutofit/>
-          </a:bodyPr>
-          <a:lstStyle/>
-          <a:p>
-            <a:pPr algn="ctr"/>
-            <a:r>
-              <a:rPr sz="1200" b="0">
-                <a:solidFill>
-                  <a:srgbClr val="5C6370"/>
-                </a:solidFill>
-                <a:latin typeface="Calibri"/>
-              </a:rPr>
-              <a:t>ICONO: curva</a:t>
-            </a:r>
-          </a:p>
-        </p:txBody>
-      </p:sp>
-      <p:sp>
-        <p:nvSpPr>
-          <p:cNvPr id="10" name="Bloque 3 nombre"/>
-          <p:cNvSpPr txBox="1"/>
-          <p:nvPr/>
-        </p:nvSpPr>
-        <p:spPr>
-          <a:xfrm>
-            <a:off x="6187288" y="3512820"/>
-            <a:ext cx="2636444" cy="487680"/>
-          </a:xfrm>
-          <a:prstGeom prst="rect">
-            <a:avLst/>
-          </a:prstGeom>
-          <a:noFill/>
-        </p:spPr>
-        <p:txBody>
-          <a:bodyPr wrap="square" tIns="91440" bIns="91440" anchor="t">
-            <a:noAutofit/>
-          </a:bodyPr>
-          <a:lstStyle/>
-          <a:p>
-            <a:pPr algn="l"/>
-            <a:r>
-              <a:rPr sz="2000" b="1">
-                <a:solidFill>
-                  <a:srgbClr val="1B1F24"/>
-                </a:solidFill>
-                <a:latin typeface="Calibri"/>
-              </a:rPr>
-              <a:t>BM25</a:t>
-            </a:r>
-          </a:p>
-        </p:txBody>
-      </p:sp>
-      <p:sp>
-        <p:nvSpPr>
-          <p:cNvPr id="11" name="Bloque 3 frase"/>
-          <p:cNvSpPr txBox="1"/>
-          <p:nvPr/>
-        </p:nvSpPr>
-        <p:spPr>
-          <a:xfrm>
-            <a:off x="6187288" y="4000500"/>
-            <a:ext cx="2636444" cy="1402080"/>
-          </a:xfrm>
-          <a:prstGeom prst="rect">
-            <a:avLst/>
-          </a:prstGeom>
-          <a:noFill/>
-        </p:spPr>
-        <p:txBody>
-          <a:bodyPr wrap="square" tIns="91440" bIns="91440" anchor="t">
-            <a:noAutofit/>
-          </a:bodyPr>
-          <a:lstStyle/>
-          <a:p>
-            <a:pPr algn="l"/>
-            <a:r>
-              <a:rPr sz="2000" b="0">
-                <a:solidFill>
-                  <a:srgbClr val="1B1F24"/>
-                </a:solidFill>
-                <a:latin typeface="Calibri"/>
-              </a:rPr>
-              <a:t>Puntúa con rareza, saturación y longitud del texto.</a:t>
-            </a:r>
-          </a:p>
-        </p:txBody>
-      </p:sp>
-      <p:sp>
-        <p:nvSpPr>
-          <p:cNvPr id="12" name="Marcador icono"/>
-          <p:cNvSpPr/>
-          <p:nvPr/>
-        </p:nvSpPr>
-        <p:spPr>
-          <a:xfrm>
-            <a:off x="9098051" y="1866900"/>
-            <a:ext cx="1554480" cy="1554480"/>
-          </a:xfrm>
-          <a:prstGeom prst="roundRect">
-            <a:avLst>
-              <a:gd name="adj" fmla="val 8823"/>
-            </a:avLst>
-          </a:prstGeom>
-          <a:noFill/>
-          <a:ln w="22225">
-            <a:solidFill>
-              <a:srgbClr val="E07A1F"/>
-            </a:solidFill>
-            <a:prstDash val="dash"/>
-          </a:ln>
-        </p:spPr>
-        <p:txBody>
-          <a:bodyPr rtlCol="0" anchor="ctr" wrap="square" tIns="91440" bIns="91440">
-            <a:noAutofit/>
-          </a:bodyPr>
-          <a:lstStyle/>
-          <a:p>
-            <a:pPr algn="ctr"/>
-            <a:r>
-              <a:rPr sz="1200" b="0">
-                <a:solidFill>
-                  <a:srgbClr val="5C6370"/>
-                </a:solidFill>
-                <a:latin typeface="Calibri"/>
-              </a:rPr>
-              <a:t>ICONO: matriz comprimida</a:t>
-            </a:r>
-          </a:p>
-        </p:txBody>
-      </p:sp>
-      <p:sp>
-        <p:nvSpPr>
-          <p:cNvPr id="13" name="Bloque 4 nombre"/>
-          <p:cNvSpPr txBox="1"/>
-          <p:nvPr/>
-        </p:nvSpPr>
-        <p:spPr>
-          <a:xfrm>
-            <a:off x="9006611" y="3512820"/>
-            <a:ext cx="2636444" cy="487680"/>
-          </a:xfrm>
-          <a:prstGeom prst="rect">
-            <a:avLst/>
-          </a:prstGeom>
-          <a:noFill/>
-        </p:spPr>
-        <p:txBody>
-          <a:bodyPr wrap="square" tIns="91440" bIns="91440" anchor="t">
-            <a:noAutofit/>
-          </a:bodyPr>
-          <a:lstStyle/>
-          <a:p>
-            <a:pPr algn="l"/>
-            <a:r>
-              <a:rPr sz="2000" b="1">
-                <a:solidFill>
-                  <a:srgbClr val="1B1F24"/>
-                </a:solidFill>
-                <a:latin typeface="Calibri"/>
-              </a:rPr>
-              <a:t>SVD</a:t>
-            </a:r>
-          </a:p>
-        </p:txBody>
-      </p:sp>
-      <p:sp>
-        <p:nvSpPr>
-          <p:cNvPr id="14" name="Bloque 4 frase"/>
-          <p:cNvSpPr txBox="1"/>
-          <p:nvPr/>
-        </p:nvSpPr>
-        <p:spPr>
-          <a:xfrm>
-            <a:off x="9006611" y="4000500"/>
-            <a:ext cx="2636444" cy="1402080"/>
-          </a:xfrm>
-          <a:prstGeom prst="rect">
-            <a:avLst/>
-          </a:prstGeom>
-          <a:noFill/>
-        </p:spPr>
-        <p:txBody>
-          <a:bodyPr wrap="square" tIns="91440" bIns="91440" anchor="t">
-            <a:noAutofit/>
-          </a:bodyPr>
-          <a:lstStyle/>
-          <a:p>
-            <a:pPr algn="l"/>
-            <a:r>
-              <a:rPr sz="2000" b="0">
-                <a:solidFill>
-                  <a:srgbClr val="1B1F24"/>
-                </a:solidFill>
-                <a:latin typeface="Calibri"/>
-              </a:rPr>
-              <a:t>Comprime el vocabulario en 200 dimensiones latentes.</a:t>
-            </a:r>
-          </a:p>
-        </p:txBody>
-      </p:sp>
-      <p:sp>
-        <p:nvSpPr>
-          <p:cNvPr id="15" name="Pie proyecto"/>
-          <p:cNvSpPr txBox="1"/>
-          <p:nvPr/>
-        </p:nvSpPr>
-        <p:spPr>
-          <a:xfrm>
-            <a:off x="548640" y="6035040"/>
-            <a:ext cx="3576218" cy="365760"/>
-          </a:xfrm>
-          <a:prstGeom prst="rect">
-            <a:avLst/>
-          </a:prstGeom>
-          <a:noFill/>
-        </p:spPr>
-        <p:txBody>
-          <a:bodyPr wrap="square" tIns="91440" bIns="91440" anchor="t">
-            <a:noAutofit/>
-          </a:bodyPr>
-          <a:lstStyle/>
-          <a:p>
-            <a:pPr algn="l"/>
-            <a:r>
-              <a:rPr sz="1200" b="0">
-                <a:solidFill>
-                  <a:srgbClr val="5C6370"/>
-                </a:solidFill>
-                <a:latin typeface="Calibri"/>
-              </a:rPr>
-              <a:t>BBC News IR</a:t>
-            </a:r>
-          </a:p>
-        </p:txBody>
-      </p:sp>
-      <p:sp>
-        <p:nvSpPr>
-          <p:cNvPr id="16" name="Numero de diapositiva"/>
-          <p:cNvSpPr txBox="1"/>
-          <p:nvPr/>
-        </p:nvSpPr>
-        <p:spPr>
-          <a:xfrm>
-            <a:off x="9946386" y="6035040"/>
-            <a:ext cx="1696669" cy="365760"/>
-          </a:xfrm>
-          <a:prstGeom prst="rect">
-            <a:avLst/>
-          </a:prstGeom>
-          <a:noFill/>
-        </p:spPr>
-        <p:txBody>
-          <a:bodyPr wrap="square" tIns="91440" bIns="91440" anchor="t">
-            <a:noAutofit/>
-          </a:bodyPr>
-          <a:lstStyle/>
-          <a:p>
-            <a:pPr algn="r"/>
-            <a:r>
-              <a:rPr sz="1200" b="0">
-                <a:solidFill>
-                  <a:srgbClr val="5C6370"/>
-                </a:solidFill>
-                <a:latin typeface="Calibri"/>
-              </a:rPr>
-              <a:t>9</a:t>
-            </a:r>
-          </a:p>
-        </p:txBody>
-      </p:sp>
+        </p:spPr>
+      </p:pic>
     </p:spTree>
   </p:cSld>
   <p:clrMapOvr>
@@ -9479,44 +8731,44 @@
         <a:sysClr val="window" lastClr="FFFFFF"/>
       </a:lt1>
       <a:dk2>
-        <a:srgbClr val="1F497D"/>
+        <a:srgbClr val="0E2841"/>
       </a:dk2>
       <a:lt2>
-        <a:srgbClr val="EEECE1"/>
+        <a:srgbClr val="E8E8E8"/>
       </a:lt2>
       <a:accent1>
-        <a:srgbClr val="4F81BD"/>
+        <a:srgbClr val="156082"/>
       </a:accent1>
       <a:accent2>
-        <a:srgbClr val="C0504D"/>
+        <a:srgbClr val="E97132"/>
       </a:accent2>
       <a:accent3>
-        <a:srgbClr val="9BBB59"/>
+        <a:srgbClr val="196B24"/>
       </a:accent3>
       <a:accent4>
-        <a:srgbClr val="8064A2"/>
+        <a:srgbClr val="0F9ED5"/>
       </a:accent4>
       <a:accent5>
-        <a:srgbClr val="4BACC6"/>
+        <a:srgbClr val="A02B93"/>
       </a:accent5>
       <a:accent6>
-        <a:srgbClr val="F79646"/>
+        <a:srgbClr val="4EA72E"/>
       </a:accent6>
       <a:hlink>
-        <a:srgbClr val="0000FF"/>
+        <a:srgbClr val="467886"/>
       </a:hlink>
       <a:folHlink>
-        <a:srgbClr val="800080"/>
+        <a:srgbClr val="96607D"/>
       </a:folHlink>
     </a:clrScheme>
     <a:fontScheme name="Office">
       <a:majorFont>
-        <a:latin typeface="Calibri"/>
+        <a:latin typeface="Aptos Display" panose="02110004020202020204"/>
         <a:ea typeface=""/>
         <a:cs typeface=""/>
-        <a:font script="Jpan" typeface="ＭＳ Ｐゴシック"/>
+        <a:font script="Jpan" typeface="游ゴシック Light"/>
         <a:font script="Hang" typeface="맑은 고딕"/>
-        <a:font script="Hans" typeface="宋体"/>
+        <a:font script="Hans" typeface="等线 Light"/>
         <a:font script="Hant" typeface="新細明體"/>
         <a:font script="Arab" typeface="Times New Roman"/>
         <a:font script="Hebr" typeface="Times New Roman"/>
@@ -9544,14 +8796,31 @@
         <a:font script="Viet" typeface="Times New Roman"/>
         <a:font script="Uigh" typeface="Microsoft Uighur"/>
         <a:font script="Geor" typeface="Sylfaen"/>
+        <a:font script="Armn" typeface="Arial"/>
+        <a:font script="Bugi" typeface="Leelawadee UI"/>
+        <a:font script="Bopo" typeface="Microsoft JhengHei"/>
+        <a:font script="Java" typeface="Javanese Text"/>
+        <a:font script="Lisu" typeface="Segoe UI"/>
+        <a:font script="Mymr" typeface="Myanmar Text"/>
+        <a:font script="Nkoo" typeface="Ebrima"/>
+        <a:font script="Olck" typeface="Nirmala UI"/>
+        <a:font script="Osma" typeface="Ebrima"/>
+        <a:font script="Phag" typeface="Phagspa"/>
+        <a:font script="Syrn" typeface="Estrangelo Edessa"/>
+        <a:font script="Syrj" typeface="Estrangelo Edessa"/>
+        <a:font script="Syre" typeface="Estrangelo Edessa"/>
+        <a:font script="Sora" typeface="Nirmala UI"/>
+        <a:font script="Tale" typeface="Microsoft Tai Le"/>
+        <a:font script="Talu" typeface="Microsoft New Tai Lue"/>
+        <a:font script="Tfng" typeface="Ebrima"/>
       </a:majorFont>
       <a:minorFont>
-        <a:latin typeface="Calibri"/>
+        <a:latin typeface="Aptos" panose="02110004020202020204"/>
         <a:ea typeface=""/>
         <a:cs typeface=""/>
-        <a:font script="Jpan" typeface="ＭＳ Ｐゴシック"/>
+        <a:font script="Jpan" typeface="游ゴシック"/>
         <a:font script="Hang" typeface="맑은 고딕"/>
-        <a:font script="Hans" typeface="宋体"/>
+        <a:font script="Hans" typeface="等线"/>
         <a:font script="Hant" typeface="新細明體"/>
         <a:font script="Arab" typeface="Arial"/>
         <a:font script="Hebr" typeface="Arial"/>
@@ -9579,6 +8848,23 @@
         <a:font script="Viet" typeface="Arial"/>
         <a:font script="Uigh" typeface="Microsoft Uighur"/>
         <a:font script="Geor" typeface="Sylfaen"/>
+        <a:font script="Armn" typeface="Arial"/>
+        <a:font script="Bugi" typeface="Leelawadee UI"/>
+        <a:font script="Bopo" typeface="Microsoft JhengHei"/>
+        <a:font script="Java" typeface="Javanese Text"/>
+        <a:font script="Lisu" typeface="Segoe UI"/>
+        <a:font script="Mymr" typeface="Myanmar Text"/>
+        <a:font script="Nkoo" typeface="Ebrima"/>
+        <a:font script="Olck" typeface="Nirmala UI"/>
+        <a:font script="Osma" typeface="Ebrima"/>
+        <a:font script="Phag" typeface="Phagspa"/>
+        <a:font script="Syrn" typeface="Estrangelo Edessa"/>
+        <a:font script="Syrj" typeface="Estrangelo Edessa"/>
+        <a:font script="Syre" typeface="Estrangelo Edessa"/>
+        <a:font script="Sora" typeface="Nirmala UI"/>
+        <a:font script="Tale" typeface="Microsoft Tai Le"/>
+        <a:font script="Talu" typeface="Microsoft New Tai Lue"/>
+        <a:font script="Tfng" typeface="Ebrima"/>
       </a:minorFont>
     </a:fontScheme>
     <a:fmtScheme name="Office">
@@ -9590,180 +8876,136 @@
           <a:gsLst>
             <a:gs pos="0">
               <a:schemeClr val="phClr">
-                <a:tint val="50000"/>
-                <a:satMod val="300000"/>
+                <a:lumMod val="110000"/>
+                <a:satMod val="105000"/>
+                <a:tint val="67000"/>
               </a:schemeClr>
             </a:gs>
-            <a:gs pos="35000">
+            <a:gs pos="50000">
               <a:schemeClr val="phClr">
-                <a:tint val="37000"/>
-                <a:satMod val="300000"/>
+                <a:lumMod val="105000"/>
+                <a:satMod val="103000"/>
+                <a:tint val="73000"/>
               </a:schemeClr>
             </a:gs>
             <a:gs pos="100000">
               <a:schemeClr val="phClr">
-                <a:tint val="15000"/>
-                <a:satMod val="350000"/>
+                <a:lumMod val="105000"/>
+                <a:satMod val="109000"/>
+                <a:tint val="81000"/>
               </a:schemeClr>
             </a:gs>
           </a:gsLst>
-          <a:lin ang="16200000" scaled="1"/>
+          <a:lin ang="5400000" scaled="0"/>
         </a:gradFill>
         <a:gradFill rotWithShape="1">
           <a:gsLst>
             <a:gs pos="0">
               <a:schemeClr val="phClr">
-                <a:tint val="100000"/>
+                <a:satMod val="103000"/>
+                <a:lumMod val="102000"/>
+                <a:tint val="94000"/>
+              </a:schemeClr>
+            </a:gs>
+            <a:gs pos="50000">
+              <a:schemeClr val="phClr">
+                <a:satMod val="110000"/>
+                <a:lumMod val="100000"/>
                 <a:shade val="100000"/>
-                <a:satMod val="130000"/>
               </a:schemeClr>
             </a:gs>
             <a:gs pos="100000">
               <a:schemeClr val="phClr">
-                <a:tint val="50000"/>
-                <a:shade val="100000"/>
-                <a:satMod val="350000"/>
+                <a:lumMod val="99000"/>
+                <a:satMod val="120000"/>
+                <a:shade val="78000"/>
               </a:schemeClr>
             </a:gs>
           </a:gsLst>
-          <a:lin ang="16200000" scaled="0"/>
+          <a:lin ang="5400000" scaled="0"/>
         </a:gradFill>
       </a:fillStyleLst>
       <a:lnStyleLst>
-        <a:ln w="9525" cap="flat" cmpd="sng" algn="ctr">
+        <a:ln w="12700" cap="flat" cmpd="sng" algn="ctr">
           <a:solidFill>
-            <a:schemeClr val="phClr">
-              <a:shade val="95000"/>
-              <a:satMod val="105000"/>
-            </a:schemeClr>
+            <a:schemeClr val="phClr"/>
           </a:solidFill>
           <a:prstDash val="solid"/>
+          <a:miter lim="800000"/>
+        </a:ln>
+        <a:ln w="19050" cap="flat" cmpd="sng" algn="ctr">
+          <a:solidFill>
+            <a:schemeClr val="phClr"/>
+          </a:solidFill>
+          <a:prstDash val="solid"/>
+          <a:miter lim="800000"/>
         </a:ln>
         <a:ln w="25400" cap="flat" cmpd="sng" algn="ctr">
           <a:solidFill>
             <a:schemeClr val="phClr"/>
           </a:solidFill>
           <a:prstDash val="solid"/>
-        </a:ln>
-        <a:ln w="38100" cap="flat" cmpd="sng" algn="ctr">
-          <a:solidFill>
-            <a:schemeClr val="phClr"/>
-          </a:solidFill>
-          <a:prstDash val="solid"/>
+          <a:miter lim="800000"/>
         </a:ln>
       </a:lnStyleLst>
       <a:effectStyleLst>
         <a:effectStyle>
+          <a:effectLst/>
+        </a:effectStyle>
+        <a:effectStyle>
+          <a:effectLst/>
+        </a:effectStyle>
+        <a:effectStyle>
           <a:effectLst>
-            <a:outerShdw blurRad="40000" dist="20000" dir="5400000" rotWithShape="0">
+            <a:outerShdw blurRad="57150" dist="19050" dir="5400000" algn="ctr" rotWithShape="0">
               <a:srgbClr val="000000">
-                <a:alpha val="38000"/>
+                <a:alpha val="63000"/>
               </a:srgbClr>
             </a:outerShdw>
           </a:effectLst>
-        </a:effectStyle>
-        <a:effectStyle>
-          <a:effectLst>
-            <a:outerShdw blurRad="40000" dist="23000" dir="5400000" rotWithShape="0">
-              <a:srgbClr val="000000">
-                <a:alpha val="35000"/>
-              </a:srgbClr>
-            </a:outerShdw>
-          </a:effectLst>
-        </a:effectStyle>
-        <a:effectStyle>
-          <a:effectLst>
-            <a:outerShdw blurRad="40000" dist="23000" dir="5400000" rotWithShape="0">
-              <a:srgbClr val="000000">
-                <a:alpha val="35000"/>
-              </a:srgbClr>
-            </a:outerShdw>
-          </a:effectLst>
-          <a:scene3d>
-            <a:camera prst="orthographicFront">
-              <a:rot lat="0" lon="0" rev="0"/>
-            </a:camera>
-            <a:lightRig rig="threePt" dir="t">
-              <a:rot lat="0" lon="0" rev="1200000"/>
-            </a:lightRig>
-          </a:scene3d>
-          <a:sp3d>
-            <a:bevelT w="63500" h="25400"/>
-          </a:sp3d>
         </a:effectStyle>
       </a:effectStyleLst>
       <a:bgFillStyleLst>
         <a:solidFill>
           <a:schemeClr val="phClr"/>
         </a:solidFill>
+        <a:solidFill>
+          <a:schemeClr val="phClr">
+            <a:tint val="95000"/>
+            <a:satMod val="170000"/>
+          </a:schemeClr>
+        </a:solidFill>
         <a:gradFill rotWithShape="1">
           <a:gsLst>
             <a:gs pos="0">
               <a:schemeClr val="phClr">
-                <a:tint val="40000"/>
-                <a:satMod val="350000"/>
+                <a:tint val="93000"/>
+                <a:satMod val="150000"/>
+                <a:shade val="98000"/>
+                <a:lumMod val="102000"/>
               </a:schemeClr>
             </a:gs>
-            <a:gs pos="40000">
+            <a:gs pos="50000">
               <a:schemeClr val="phClr">
-                <a:tint val="45000"/>
-                <a:shade val="99000"/>
-                <a:satMod val="350000"/>
+                <a:tint val="98000"/>
+                <a:satMod val="130000"/>
+                <a:shade val="90000"/>
+                <a:lumMod val="103000"/>
               </a:schemeClr>
             </a:gs>
             <a:gs pos="100000">
               <a:schemeClr val="phClr">
-                <a:shade val="20000"/>
-                <a:satMod val="255000"/>
+                <a:shade val="63000"/>
+                <a:satMod val="120000"/>
               </a:schemeClr>
             </a:gs>
           </a:gsLst>
-          <a:path path="circle">
-            <a:fillToRect l="50000" t="-80000" r="50000" b="180000"/>
-          </a:path>
-        </a:gradFill>
-        <a:gradFill rotWithShape="1">
-          <a:gsLst>
-            <a:gs pos="0">
-              <a:schemeClr val="phClr">
-                <a:tint val="80000"/>
-                <a:satMod val="300000"/>
-              </a:schemeClr>
-            </a:gs>
-            <a:gs pos="100000">
-              <a:schemeClr val="phClr">
-                <a:shade val="30000"/>
-                <a:satMod val="200000"/>
-              </a:schemeClr>
-            </a:gs>
-          </a:gsLst>
-          <a:path path="circle">
-            <a:fillToRect l="50000" t="50000" r="50000" b="50000"/>
-          </a:path>
+          <a:lin ang="5400000" scaled="0"/>
         </a:gradFill>
       </a:bgFillStyleLst>
     </a:fmtScheme>
   </a:themeElements>
   <a:objectDefaults>
-    <a:spDef>
-      <a:spPr/>
-      <a:bodyPr/>
-      <a:lstStyle/>
-      <a:style>
-        <a:lnRef idx="1">
-          <a:schemeClr val="accent1"/>
-        </a:lnRef>
-        <a:fillRef idx="3">
-          <a:schemeClr val="accent1"/>
-        </a:fillRef>
-        <a:effectRef idx="2">
-          <a:schemeClr val="accent1"/>
-        </a:effectRef>
-        <a:fontRef idx="minor">
-          <a:schemeClr val="lt1"/>
-        </a:fontRef>
-      </a:style>
-    </a:spDef>
     <a:lnDef>
       <a:spPr/>
       <a:bodyPr/>
@@ -9785,5 +9027,10 @@
     </a:lnDef>
   </a:objectDefaults>
   <a:extraClrSchemeLst/>
+  <a:extLst>
+    <a:ext uri="{05A4C25C-085E-4340-85A3-A5531E510DB2}">
+      <thm15:themeFamily xmlns:thm15="http://schemas.microsoft.com/office/thememl/2012/main" name="Office Theme" id="{2E142A2C-CD16-42D6-873A-C26D2A0506FA}" vid="{1BDDFF52-6CD6-40A5-AB3C-68EB2F1E4D0A}"/>
+    </a:ext>
+  </a:extLst>
 </a:theme>
 </file>